--- a/docs/VNE_Presentation.pptx
+++ b/docs/VNE_Presentation.pptx
@@ -5,44 +5,43 @@
     <p:sldMasterId id="2147483648" r:id="rId1"/>
   </p:sldMasterIdLst>
   <p:sldIdLst>
-    <p:sldId id="256" r:id="rId7"/>
-    <p:sldId id="257" r:id="rId8"/>
-    <p:sldId id="258" r:id="rId9"/>
-    <p:sldId id="259" r:id="rId10"/>
-    <p:sldId id="260" r:id="rId11"/>
-    <p:sldId id="261" r:id="rId12"/>
-    <p:sldId id="262" r:id="rId13"/>
-    <p:sldId id="263" r:id="rId14"/>
-    <p:sldId id="264" r:id="rId15"/>
-    <p:sldId id="265" r:id="rId16"/>
-    <p:sldId id="266" r:id="rId17"/>
-    <p:sldId id="267" r:id="rId18"/>
-    <p:sldId id="268" r:id="rId19"/>
-    <p:sldId id="269" r:id="rId20"/>
-    <p:sldId id="270" r:id="rId21"/>
-    <p:sldId id="271" r:id="rId22"/>
-    <p:sldId id="272" r:id="rId23"/>
-    <p:sldId id="273" r:id="rId24"/>
-    <p:sldId id="274" r:id="rId25"/>
-    <p:sldId id="275" r:id="rId26"/>
-    <p:sldId id="276" r:id="rId27"/>
-    <p:sldId id="277" r:id="rId28"/>
-    <p:sldId id="278" r:id="rId29"/>
-    <p:sldId id="279" r:id="rId30"/>
-    <p:sldId id="280" r:id="rId31"/>
-    <p:sldId id="281" r:id="rId32"/>
-    <p:sldId id="282" r:id="rId33"/>
-    <p:sldId id="283" r:id="rId34"/>
-    <p:sldId id="284" r:id="rId35"/>
-    <p:sldId id="285" r:id="rId36"/>
-    <p:sldId id="286" r:id="rId37"/>
-    <p:sldId id="287" r:id="rId38"/>
-    <p:sldId id="288" r:id="rId39"/>
-    <p:sldId id="289" r:id="rId40"/>
-    <p:sldId id="290" r:id="rId41"/>
-    <p:sldId id="291" r:id="rId42"/>
+    <p:sldId id="256" r:id="rId2"/>
+    <p:sldId id="257" r:id="rId3"/>
+    <p:sldId id="258" r:id="rId4"/>
+    <p:sldId id="259" r:id="rId5"/>
+    <p:sldId id="260" r:id="rId6"/>
+    <p:sldId id="261" r:id="rId7"/>
+    <p:sldId id="262" r:id="rId8"/>
+    <p:sldId id="263" r:id="rId9"/>
+    <p:sldId id="264" r:id="rId10"/>
+    <p:sldId id="265" r:id="rId11"/>
+    <p:sldId id="266" r:id="rId12"/>
+    <p:sldId id="267" r:id="rId13"/>
+    <p:sldId id="268" r:id="rId14"/>
+    <p:sldId id="269" r:id="rId15"/>
+    <p:sldId id="270" r:id="rId16"/>
+    <p:sldId id="271" r:id="rId17"/>
+    <p:sldId id="272" r:id="rId18"/>
+    <p:sldId id="273" r:id="rId19"/>
+    <p:sldId id="274" r:id="rId20"/>
+    <p:sldId id="276" r:id="rId21"/>
+    <p:sldId id="277" r:id="rId22"/>
+    <p:sldId id="278" r:id="rId23"/>
+    <p:sldId id="279" r:id="rId24"/>
+    <p:sldId id="280" r:id="rId25"/>
+    <p:sldId id="281" r:id="rId26"/>
+    <p:sldId id="282" r:id="rId27"/>
+    <p:sldId id="283" r:id="rId28"/>
+    <p:sldId id="284" r:id="rId29"/>
+    <p:sldId id="285" r:id="rId30"/>
+    <p:sldId id="286" r:id="rId31"/>
+    <p:sldId id="287" r:id="rId32"/>
+    <p:sldId id="288" r:id="rId33"/>
+    <p:sldId id="289" r:id="rId34"/>
+    <p:sldId id="290" r:id="rId35"/>
+    <p:sldId id="291" r:id="rId36"/>
   </p:sldIdLst>
-  <p:sldSz cx="12191695" cy="6858000" type="screen4x3"/>
+  <p:sldSz cx="12192000" cy="6858000"/>
   <p:notesSz cx="6858000" cy="9144000"/>
   <p:defaultTextStyle>
     <a:defPPr>
@@ -139,6 +138,22 @@
       </a:defRPr>
     </a:lvl9pPr>
   </p:defaultTextStyle>
+  <p:extLst>
+    <p:ext uri="{EFAFB233-063F-42B5-8137-9DF3F51BA10A}">
+      <p15:sldGuideLst xmlns:p15="http://schemas.microsoft.com/office/powerpoint/2012/main">
+        <p15:guide id="1" orient="horz" pos="2160">
+          <p15:clr>
+            <a:srgbClr val="A4A3A4"/>
+          </p15:clr>
+        </p15:guide>
+        <p15:guide id="2" pos="2880">
+          <p15:clr>
+            <a:srgbClr val="A4A3A4"/>
+          </p15:clr>
+        </p15:guide>
+      </p15:sldGuideLst>
+    </p:ext>
+  </p:extLst>
 </p:presentation>
 </file>
 
@@ -180,10 +195,9 @@
           <a:lstStyle/>
           <a:p>
             <a:r>
-              <a:rPr lang="en-US" smtClean="0"/>
+              <a:rPr lang="en-US"/>
               <a:t>Click to edit Master title style</a:t>
             </a:r>
-            <a:endParaRPr lang="en-US"/>
           </a:p>
         </p:txBody>
       </p:sp>
@@ -299,10 +313,9 @@
           </a:lstStyle>
           <a:p>
             <a:r>
-              <a:rPr lang="en-US" smtClean="0"/>
+              <a:rPr lang="en-US"/>
               <a:t>Click to edit Master subtitle style</a:t>
             </a:r>
-            <a:endParaRPr lang="en-US"/>
           </a:p>
         </p:txBody>
       </p:sp>
@@ -323,7 +336,7 @@
           <a:p>
             <a:fld id="{5BCAD085-E8A6-8845-BD4E-CB4CCA059FC4}" type="datetimeFigureOut">
               <a:rPr lang="en-US" smtClean="0"/>
-              <a:t>1/27/13</a:t>
+              <a:t>3/24/26</a:t>
             </a:fld>
             <a:endParaRPr lang="en-US"/>
           </a:p>
@@ -417,10 +430,9 @@
           <a:lstStyle/>
           <a:p>
             <a:r>
-              <a:rPr lang="en-US" smtClean="0"/>
+              <a:rPr lang="en-US"/>
               <a:t>Click to edit Master title style</a:t>
             </a:r>
-            <a:endParaRPr lang="en-US"/>
           </a:p>
         </p:txBody>
       </p:sp>
@@ -441,38 +453,37 @@
           <a:p>
             <a:pPr lvl="0"/>
             <a:r>
-              <a:rPr lang="en-US" smtClean="0"/>
+              <a:rPr lang="en-US"/>
               <a:t>Click to edit Master text styles</a:t>
             </a:r>
           </a:p>
           <a:p>
             <a:pPr lvl="1"/>
             <a:r>
-              <a:rPr lang="en-US" smtClean="0"/>
+              <a:rPr lang="en-US"/>
               <a:t>Second level</a:t>
             </a:r>
           </a:p>
           <a:p>
             <a:pPr lvl="2"/>
             <a:r>
-              <a:rPr lang="en-US" smtClean="0"/>
+              <a:rPr lang="en-US"/>
               <a:t>Third level</a:t>
             </a:r>
           </a:p>
           <a:p>
             <a:pPr lvl="3"/>
             <a:r>
-              <a:rPr lang="en-US" smtClean="0"/>
+              <a:rPr lang="en-US"/>
               <a:t>Fourth level</a:t>
             </a:r>
           </a:p>
           <a:p>
             <a:pPr lvl="4"/>
             <a:r>
-              <a:rPr lang="en-US" smtClean="0"/>
+              <a:rPr lang="en-US"/>
               <a:t>Fifth level</a:t>
             </a:r>
-            <a:endParaRPr lang="en-US"/>
           </a:p>
         </p:txBody>
       </p:sp>
@@ -493,7 +504,7 @@
           <a:p>
             <a:fld id="{5BCAD085-E8A6-8845-BD4E-CB4CCA059FC4}" type="datetimeFigureOut">
               <a:rPr lang="en-US" smtClean="0"/>
-              <a:t>1/27/13</a:t>
+              <a:t>3/24/26</a:t>
             </a:fld>
             <a:endParaRPr lang="en-US"/>
           </a:p>
@@ -592,10 +603,9 @@
           <a:lstStyle/>
           <a:p>
             <a:r>
-              <a:rPr lang="en-US" smtClean="0"/>
+              <a:rPr lang="en-US"/>
               <a:t>Click to edit Master title style</a:t>
             </a:r>
-            <a:endParaRPr lang="en-US"/>
           </a:p>
         </p:txBody>
       </p:sp>
@@ -621,38 +631,37 @@
           <a:p>
             <a:pPr lvl="0"/>
             <a:r>
-              <a:rPr lang="en-US" smtClean="0"/>
+              <a:rPr lang="en-US"/>
               <a:t>Click to edit Master text styles</a:t>
             </a:r>
           </a:p>
           <a:p>
             <a:pPr lvl="1"/>
             <a:r>
-              <a:rPr lang="en-US" smtClean="0"/>
+              <a:rPr lang="en-US"/>
               <a:t>Second level</a:t>
             </a:r>
           </a:p>
           <a:p>
             <a:pPr lvl="2"/>
             <a:r>
-              <a:rPr lang="en-US" smtClean="0"/>
+              <a:rPr lang="en-US"/>
               <a:t>Third level</a:t>
             </a:r>
           </a:p>
           <a:p>
             <a:pPr lvl="3"/>
             <a:r>
-              <a:rPr lang="en-US" smtClean="0"/>
+              <a:rPr lang="en-US"/>
               <a:t>Fourth level</a:t>
             </a:r>
           </a:p>
           <a:p>
             <a:pPr lvl="4"/>
             <a:r>
-              <a:rPr lang="en-US" smtClean="0"/>
+              <a:rPr lang="en-US"/>
               <a:t>Fifth level</a:t>
             </a:r>
-            <a:endParaRPr lang="en-US"/>
           </a:p>
         </p:txBody>
       </p:sp>
@@ -673,7 +682,7 @@
           <a:p>
             <a:fld id="{5BCAD085-E8A6-8845-BD4E-CB4CCA059FC4}" type="datetimeFigureOut">
               <a:rPr lang="en-US" smtClean="0"/>
-              <a:t>1/27/13</a:t>
+              <a:t>3/24/26</a:t>
             </a:fld>
             <a:endParaRPr lang="en-US"/>
           </a:p>
@@ -767,10 +776,9 @@
           <a:lstStyle/>
           <a:p>
             <a:r>
-              <a:rPr lang="en-US" smtClean="0"/>
+              <a:rPr lang="en-US"/>
               <a:t>Click to edit Master title style</a:t>
             </a:r>
-            <a:endParaRPr lang="en-US"/>
           </a:p>
         </p:txBody>
       </p:sp>
@@ -791,38 +799,37 @@
           <a:p>
             <a:pPr lvl="0"/>
             <a:r>
-              <a:rPr lang="en-US" smtClean="0"/>
+              <a:rPr lang="en-US"/>
               <a:t>Click to edit Master text styles</a:t>
             </a:r>
           </a:p>
           <a:p>
             <a:pPr lvl="1"/>
             <a:r>
-              <a:rPr lang="en-US" smtClean="0"/>
+              <a:rPr lang="en-US"/>
               <a:t>Second level</a:t>
             </a:r>
           </a:p>
           <a:p>
             <a:pPr lvl="2"/>
             <a:r>
-              <a:rPr lang="en-US" smtClean="0"/>
+              <a:rPr lang="en-US"/>
               <a:t>Third level</a:t>
             </a:r>
           </a:p>
           <a:p>
             <a:pPr lvl="3"/>
             <a:r>
-              <a:rPr lang="en-US" smtClean="0"/>
+              <a:rPr lang="en-US"/>
               <a:t>Fourth level</a:t>
             </a:r>
           </a:p>
           <a:p>
             <a:pPr lvl="4"/>
             <a:r>
-              <a:rPr lang="en-US" smtClean="0"/>
+              <a:rPr lang="en-US"/>
               <a:t>Fifth level</a:t>
             </a:r>
-            <a:endParaRPr lang="en-US"/>
           </a:p>
         </p:txBody>
       </p:sp>
@@ -843,7 +850,7 @@
           <a:p>
             <a:fld id="{5BCAD085-E8A6-8845-BD4E-CB4CCA059FC4}" type="datetimeFigureOut">
               <a:rPr lang="en-US" smtClean="0"/>
-              <a:t>1/27/13</a:t>
+              <a:t>3/24/26</a:t>
             </a:fld>
             <a:endParaRPr lang="en-US"/>
           </a:p>
@@ -946,10 +953,9 @@
           </a:lstStyle>
           <a:p>
             <a:r>
-              <a:rPr lang="en-US" smtClean="0"/>
+              <a:rPr lang="en-US"/>
               <a:t>Click to edit Master title style</a:t>
             </a:r>
-            <a:endParaRPr lang="en-US"/>
           </a:p>
         </p:txBody>
       </p:sp>
@@ -1066,7 +1072,7 @@
           <a:p>
             <a:pPr lvl="0"/>
             <a:r>
-              <a:rPr lang="en-US" smtClean="0"/>
+              <a:rPr lang="en-US"/>
               <a:t>Click to edit Master text styles</a:t>
             </a:r>
           </a:p>
@@ -1089,7 +1095,7 @@
           <a:p>
             <a:fld id="{5BCAD085-E8A6-8845-BD4E-CB4CCA059FC4}" type="datetimeFigureOut">
               <a:rPr lang="en-US" smtClean="0"/>
-              <a:t>1/27/13</a:t>
+              <a:t>3/24/26</a:t>
             </a:fld>
             <a:endParaRPr lang="en-US"/>
           </a:p>
@@ -1183,10 +1189,9 @@
           <a:lstStyle/>
           <a:p>
             <a:r>
-              <a:rPr lang="en-US" smtClean="0"/>
+              <a:rPr lang="en-US"/>
               <a:t>Click to edit Master title style</a:t>
             </a:r>
-            <a:endParaRPr lang="en-US"/>
           </a:p>
         </p:txBody>
       </p:sp>
@@ -1240,38 +1245,37 @@
           <a:p>
             <a:pPr lvl="0"/>
             <a:r>
-              <a:rPr lang="en-US" smtClean="0"/>
+              <a:rPr lang="en-US"/>
               <a:t>Click to edit Master text styles</a:t>
             </a:r>
           </a:p>
           <a:p>
             <a:pPr lvl="1"/>
             <a:r>
-              <a:rPr lang="en-US" smtClean="0"/>
+              <a:rPr lang="en-US"/>
               <a:t>Second level</a:t>
             </a:r>
           </a:p>
           <a:p>
             <a:pPr lvl="2"/>
             <a:r>
-              <a:rPr lang="en-US" smtClean="0"/>
+              <a:rPr lang="en-US"/>
               <a:t>Third level</a:t>
             </a:r>
           </a:p>
           <a:p>
             <a:pPr lvl="3"/>
             <a:r>
-              <a:rPr lang="en-US" smtClean="0"/>
+              <a:rPr lang="en-US"/>
               <a:t>Fourth level</a:t>
             </a:r>
           </a:p>
           <a:p>
             <a:pPr lvl="4"/>
             <a:r>
-              <a:rPr lang="en-US" smtClean="0"/>
+              <a:rPr lang="en-US"/>
               <a:t>Fifth level</a:t>
             </a:r>
-            <a:endParaRPr lang="en-US"/>
           </a:p>
         </p:txBody>
       </p:sp>
@@ -1325,38 +1329,37 @@
           <a:p>
             <a:pPr lvl="0"/>
             <a:r>
-              <a:rPr lang="en-US" smtClean="0"/>
+              <a:rPr lang="en-US"/>
               <a:t>Click to edit Master text styles</a:t>
             </a:r>
           </a:p>
           <a:p>
             <a:pPr lvl="1"/>
             <a:r>
-              <a:rPr lang="en-US" smtClean="0"/>
+              <a:rPr lang="en-US"/>
               <a:t>Second level</a:t>
             </a:r>
           </a:p>
           <a:p>
             <a:pPr lvl="2"/>
             <a:r>
-              <a:rPr lang="en-US" smtClean="0"/>
+              <a:rPr lang="en-US"/>
               <a:t>Third level</a:t>
             </a:r>
           </a:p>
           <a:p>
             <a:pPr lvl="3"/>
             <a:r>
-              <a:rPr lang="en-US" smtClean="0"/>
+              <a:rPr lang="en-US"/>
               <a:t>Fourth level</a:t>
             </a:r>
           </a:p>
           <a:p>
             <a:pPr lvl="4"/>
             <a:r>
-              <a:rPr lang="en-US" smtClean="0"/>
+              <a:rPr lang="en-US"/>
               <a:t>Fifth level</a:t>
             </a:r>
-            <a:endParaRPr lang="en-US"/>
           </a:p>
         </p:txBody>
       </p:sp>
@@ -1377,7 +1380,7 @@
           <a:p>
             <a:fld id="{5BCAD085-E8A6-8845-BD4E-CB4CCA059FC4}" type="datetimeFigureOut">
               <a:rPr lang="en-US" smtClean="0"/>
-              <a:t>1/27/13</a:t>
+              <a:t>3/24/26</a:t>
             </a:fld>
             <a:endParaRPr lang="en-US"/>
           </a:p>
@@ -1475,10 +1478,9 @@
           </a:lstStyle>
           <a:p>
             <a:r>
-              <a:rPr lang="en-US" smtClean="0"/>
+              <a:rPr lang="en-US"/>
               <a:t>Click to edit Master title style</a:t>
             </a:r>
-            <a:endParaRPr lang="en-US"/>
           </a:p>
         </p:txBody>
       </p:sp>
@@ -1541,7 +1543,7 @@
           <a:p>
             <a:pPr lvl="0"/>
             <a:r>
-              <a:rPr lang="en-US" smtClean="0"/>
+              <a:rPr lang="en-US"/>
               <a:t>Click to edit Master text styles</a:t>
             </a:r>
           </a:p>
@@ -1597,38 +1599,37 @@
           <a:p>
             <a:pPr lvl="0"/>
             <a:r>
-              <a:rPr lang="en-US" smtClean="0"/>
+              <a:rPr lang="en-US"/>
               <a:t>Click to edit Master text styles</a:t>
             </a:r>
           </a:p>
           <a:p>
             <a:pPr lvl="1"/>
             <a:r>
-              <a:rPr lang="en-US" smtClean="0"/>
+              <a:rPr lang="en-US"/>
               <a:t>Second level</a:t>
             </a:r>
           </a:p>
           <a:p>
             <a:pPr lvl="2"/>
             <a:r>
-              <a:rPr lang="en-US" smtClean="0"/>
+              <a:rPr lang="en-US"/>
               <a:t>Third level</a:t>
             </a:r>
           </a:p>
           <a:p>
             <a:pPr lvl="3"/>
             <a:r>
-              <a:rPr lang="en-US" smtClean="0"/>
+              <a:rPr lang="en-US"/>
               <a:t>Fourth level</a:t>
             </a:r>
           </a:p>
           <a:p>
             <a:pPr lvl="4"/>
             <a:r>
-              <a:rPr lang="en-US" smtClean="0"/>
+              <a:rPr lang="en-US"/>
               <a:t>Fifth level</a:t>
             </a:r>
-            <a:endParaRPr lang="en-US"/>
           </a:p>
         </p:txBody>
       </p:sp>
@@ -1691,7 +1692,7 @@
           <a:p>
             <a:pPr lvl="0"/>
             <a:r>
-              <a:rPr lang="en-US" smtClean="0"/>
+              <a:rPr lang="en-US"/>
               <a:t>Click to edit Master text styles</a:t>
             </a:r>
           </a:p>
@@ -1747,38 +1748,37 @@
           <a:p>
             <a:pPr lvl="0"/>
             <a:r>
-              <a:rPr lang="en-US" smtClean="0"/>
+              <a:rPr lang="en-US"/>
               <a:t>Click to edit Master text styles</a:t>
             </a:r>
           </a:p>
           <a:p>
             <a:pPr lvl="1"/>
             <a:r>
-              <a:rPr lang="en-US" smtClean="0"/>
+              <a:rPr lang="en-US"/>
               <a:t>Second level</a:t>
             </a:r>
           </a:p>
           <a:p>
             <a:pPr lvl="2"/>
             <a:r>
-              <a:rPr lang="en-US" smtClean="0"/>
+              <a:rPr lang="en-US"/>
               <a:t>Third level</a:t>
             </a:r>
           </a:p>
           <a:p>
             <a:pPr lvl="3"/>
             <a:r>
-              <a:rPr lang="en-US" smtClean="0"/>
+              <a:rPr lang="en-US"/>
               <a:t>Fourth level</a:t>
             </a:r>
           </a:p>
           <a:p>
             <a:pPr lvl="4"/>
             <a:r>
-              <a:rPr lang="en-US" smtClean="0"/>
+              <a:rPr lang="en-US"/>
               <a:t>Fifth level</a:t>
             </a:r>
-            <a:endParaRPr lang="en-US"/>
           </a:p>
         </p:txBody>
       </p:sp>
@@ -1799,7 +1799,7 @@
           <a:p>
             <a:fld id="{5BCAD085-E8A6-8845-BD4E-CB4CCA059FC4}" type="datetimeFigureOut">
               <a:rPr lang="en-US" smtClean="0"/>
-              <a:t>1/27/13</a:t>
+              <a:t>3/24/26</a:t>
             </a:fld>
             <a:endParaRPr lang="en-US"/>
           </a:p>
@@ -1893,10 +1893,9 @@
           <a:lstStyle/>
           <a:p>
             <a:r>
-              <a:rPr lang="en-US" smtClean="0"/>
+              <a:rPr lang="en-US"/>
               <a:t>Click to edit Master title style</a:t>
             </a:r>
-            <a:endParaRPr lang="en-US"/>
           </a:p>
         </p:txBody>
       </p:sp>
@@ -1917,7 +1916,7 @@
           <a:p>
             <a:fld id="{5BCAD085-E8A6-8845-BD4E-CB4CCA059FC4}" type="datetimeFigureOut">
               <a:rPr lang="en-US" smtClean="0"/>
-              <a:t>1/27/13</a:t>
+              <a:t>3/24/26</a:t>
             </a:fld>
             <a:endParaRPr lang="en-US"/>
           </a:p>
@@ -2012,7 +2011,7 @@
           <a:p>
             <a:fld id="{5BCAD085-E8A6-8845-BD4E-CB4CCA059FC4}" type="datetimeFigureOut">
               <a:rPr lang="en-US" smtClean="0"/>
-              <a:t>1/27/13</a:t>
+              <a:t>3/24/26</a:t>
             </a:fld>
             <a:endParaRPr lang="en-US"/>
           </a:p>
@@ -2115,10 +2114,9 @@
           </a:lstStyle>
           <a:p>
             <a:r>
-              <a:rPr lang="en-US" smtClean="0"/>
+              <a:rPr lang="en-US"/>
               <a:t>Click to edit Master title style</a:t>
             </a:r>
-            <a:endParaRPr lang="en-US"/>
           </a:p>
         </p:txBody>
       </p:sp>
@@ -2172,38 +2170,37 @@
           <a:p>
             <a:pPr lvl="0"/>
             <a:r>
-              <a:rPr lang="en-US" smtClean="0"/>
+              <a:rPr lang="en-US"/>
               <a:t>Click to edit Master text styles</a:t>
             </a:r>
           </a:p>
           <a:p>
             <a:pPr lvl="1"/>
             <a:r>
-              <a:rPr lang="en-US" smtClean="0"/>
+              <a:rPr lang="en-US"/>
               <a:t>Second level</a:t>
             </a:r>
           </a:p>
           <a:p>
             <a:pPr lvl="2"/>
             <a:r>
-              <a:rPr lang="en-US" smtClean="0"/>
+              <a:rPr lang="en-US"/>
               <a:t>Third level</a:t>
             </a:r>
           </a:p>
           <a:p>
             <a:pPr lvl="3"/>
             <a:r>
-              <a:rPr lang="en-US" smtClean="0"/>
+              <a:rPr lang="en-US"/>
               <a:t>Fourth level</a:t>
             </a:r>
           </a:p>
           <a:p>
             <a:pPr lvl="4"/>
             <a:r>
-              <a:rPr lang="en-US" smtClean="0"/>
+              <a:rPr lang="en-US"/>
               <a:t>Fifth level</a:t>
             </a:r>
-            <a:endParaRPr lang="en-US"/>
           </a:p>
         </p:txBody>
       </p:sp>
@@ -2266,7 +2263,7 @@
           <a:p>
             <a:pPr lvl="0"/>
             <a:r>
-              <a:rPr lang="en-US" smtClean="0"/>
+              <a:rPr lang="en-US"/>
               <a:t>Click to edit Master text styles</a:t>
             </a:r>
           </a:p>
@@ -2289,7 +2286,7 @@
           <a:p>
             <a:fld id="{5BCAD085-E8A6-8845-BD4E-CB4CCA059FC4}" type="datetimeFigureOut">
               <a:rPr lang="en-US" smtClean="0"/>
-              <a:t>1/27/13</a:t>
+              <a:t>3/24/26</a:t>
             </a:fld>
             <a:endParaRPr lang="en-US"/>
           </a:p>
@@ -2392,10 +2389,9 @@
           </a:lstStyle>
           <a:p>
             <a:r>
-              <a:rPr lang="en-US" smtClean="0"/>
+              <a:rPr lang="en-US"/>
               <a:t>Click to edit Master title style</a:t>
             </a:r>
-            <a:endParaRPr lang="en-US"/>
           </a:p>
         </p:txBody>
       </p:sp>
@@ -2519,7 +2515,7 @@
           <a:p>
             <a:pPr lvl="0"/>
             <a:r>
-              <a:rPr lang="en-US" smtClean="0"/>
+              <a:rPr lang="en-US"/>
               <a:t>Click to edit Master text styles</a:t>
             </a:r>
           </a:p>
@@ -2542,7 +2538,7 @@
           <a:p>
             <a:fld id="{5BCAD085-E8A6-8845-BD4E-CB4CCA059FC4}" type="datetimeFigureOut">
               <a:rPr lang="en-US" smtClean="0"/>
-              <a:t>1/27/13</a:t>
+              <a:t>3/24/26</a:t>
             </a:fld>
             <a:endParaRPr lang="en-US"/>
           </a:p>
@@ -2651,10 +2647,9 @@
           <a:lstStyle/>
           <a:p>
             <a:r>
-              <a:rPr lang="en-US" smtClean="0"/>
+              <a:rPr lang="en-US"/>
               <a:t>Click to edit Master title style</a:t>
             </a:r>
-            <a:endParaRPr lang="en-US"/>
           </a:p>
         </p:txBody>
       </p:sp>
@@ -2685,38 +2680,37 @@
           <a:p>
             <a:pPr lvl="0"/>
             <a:r>
-              <a:rPr lang="en-US" smtClean="0"/>
+              <a:rPr lang="en-US"/>
               <a:t>Click to edit Master text styles</a:t>
             </a:r>
           </a:p>
           <a:p>
             <a:pPr lvl="1"/>
             <a:r>
-              <a:rPr lang="en-US" smtClean="0"/>
+              <a:rPr lang="en-US"/>
               <a:t>Second level</a:t>
             </a:r>
           </a:p>
           <a:p>
             <a:pPr lvl="2"/>
             <a:r>
-              <a:rPr lang="en-US" smtClean="0"/>
+              <a:rPr lang="en-US"/>
               <a:t>Third level</a:t>
             </a:r>
           </a:p>
           <a:p>
             <a:pPr lvl="3"/>
             <a:r>
-              <a:rPr lang="en-US" smtClean="0"/>
+              <a:rPr lang="en-US"/>
               <a:t>Fourth level</a:t>
             </a:r>
           </a:p>
           <a:p>
             <a:pPr lvl="4"/>
             <a:r>
-              <a:rPr lang="en-US" smtClean="0"/>
+              <a:rPr lang="en-US"/>
               <a:t>Fifth level</a:t>
             </a:r>
-            <a:endParaRPr lang="en-US"/>
           </a:p>
         </p:txBody>
       </p:sp>
@@ -2755,7 +2749,7 @@
           <a:p>
             <a:fld id="{5BCAD085-E8A6-8845-BD4E-CB4CCA059FC4}" type="datetimeFigureOut">
               <a:rPr lang="en-US" smtClean="0"/>
-              <a:t>1/27/13</a:t>
+              <a:t>3/24/26</a:t>
             </a:fld>
             <a:endParaRPr lang="en-US"/>
           </a:p>
@@ -2836,6 +2830,54 @@
               <a:t>‹#›</a:t>
             </a:fld>
             <a:endParaRPr lang="en-US"/>
+          </a:p>
+        </p:txBody>
+      </p:sp>
+      <p:sp>
+        <p:nvSpPr>
+          <p:cNvPr id="8" name="TextBox 7">
+            <a:extLst>
+              <a:ext uri="{FF2B5EF4-FFF2-40B4-BE49-F238E27FC236}">
+                <a16:creationId xmlns:a16="http://schemas.microsoft.com/office/drawing/2014/main" id="{3514A080-827B-DF44-A3D6-B71E7F35EDCA}"/>
+              </a:ext>
+            </a:extLst>
+          </p:cNvPr>
+          <p:cNvSpPr txBox="1"/>
+          <p:nvPr userDrawn="1">
+            <p:extLst>
+              <p:ext uri="{1162E1C5-73C7-4A58-AE30-91384D911F3F}">
+                <p184:classification xmlns:p184="http://schemas.microsoft.com/office/powerpoint/2018/4/main" val="hdr"/>
+              </p:ext>
+            </p:extLst>
+          </p:nvPr>
+        </p:nvSpPr>
+        <p:spPr>
+          <a:xfrm>
+            <a:off x="5334000" y="63500"/>
+            <a:ext cx="1547813" cy="137160"/>
+          </a:xfrm>
+          <a:prstGeom prst="rect">
+            <a:avLst/>
+          </a:prstGeom>
+        </p:spPr>
+        <p:txBody>
+          <a:bodyPr horzOverflow="overflow" lIns="0" tIns="0" rIns="0" bIns="0">
+            <a:spAutoFit/>
+          </a:bodyPr>
+          <a:lstStyle/>
+          <a:p>
+            <a:pPr algn="l"/>
+            <a:r>
+              <a:rPr lang="en-US" sz="900">
+                <a:solidFill>
+                  <a:srgbClr val="000000">
+                    <a:alpha val="50000"/>
+                  </a:srgbClr>
+                </a:solidFill>
+                <a:latin typeface="Aptos" panose="020B0004020202020204" pitchFamily="34" charset="0"/>
+              </a:rPr>
+              <a:t>CONFIDENTIAL (by Asseco CE)</a:t>
+            </a:r>
           </a:p>
         </p:txBody>
       </p:sp>
@@ -3114,7 +3156,7 @@
 </file>
 
 <file path=ppt/slides/slide1.xml><?xml version="1.0" encoding="utf-8"?>
-<p:sld xmlns:a="http://schemas.openxmlformats.org/drawingml/2006/main" xmlns:p="http://schemas.openxmlformats.org/presentationml/2006/main" xmlns:r="http://schemas.openxmlformats.org/officeDocument/2006/relationships">
+<p:sld xmlns:a="http://schemas.openxmlformats.org/drawingml/2006/main" xmlns:r="http://schemas.openxmlformats.org/officeDocument/2006/relationships" xmlns:p="http://schemas.openxmlformats.org/presentationml/2006/main">
   <p:cSld>
     <p:bg>
       <p:bgPr>
@@ -3130,7 +3172,14 @@
         <p:cNvGrpSpPr/>
         <p:nvPr/>
       </p:nvGrpSpPr>
-      <p:grpSpPr/>
+      <p:grpSpPr>
+        <a:xfrm>
+          <a:off x="0" y="0"/>
+          <a:ext cx="0" cy="0"/>
+          <a:chOff x="0" y="0"/>
+          <a:chExt cx="0" cy="0"/>
+        </a:xfrm>
+      </p:grpSpPr>
       <p:sp>
         <p:nvSpPr>
           <p:cNvPr id="2" name="Rectangle 1"/>
@@ -3171,6 +3220,7 @@
           <a:lstStyle/>
           <a:p>
             <a:pPr algn="ctr"/>
+            <a:endParaRPr/>
           </a:p>
         </p:txBody>
       </p:sp>
@@ -3245,43 +3295,8 @@
               </a:defRPr>
             </a:pPr>
             <a:r>
+              <a:rPr dirty="0"/>
               <a:t>A Study of PSO, Reinforcement Learning, and Swarm Intelligence Approaches</a:t>
-            </a:r>
-          </a:p>
-        </p:txBody>
-      </p:sp>
-      <p:sp>
-        <p:nvSpPr>
-          <p:cNvPr id="5" name="TextBox 4"/>
-          <p:cNvSpPr txBox="1"/>
-          <p:nvPr/>
-        </p:nvSpPr>
-        <p:spPr>
-          <a:xfrm>
-            <a:off x="914400" y="3840480"/>
-            <a:ext cx="10332720" cy="457200"/>
-          </a:xfrm>
-          <a:prstGeom prst="rect">
-            <a:avLst/>
-          </a:prstGeom>
-          <a:noFill/>
-        </p:spPr>
-        <p:txBody>
-          <a:bodyPr wrap="square">
-            <a:spAutoFit/>
-          </a:bodyPr>
-          <a:lstStyle/>
-          <a:p>
-            <a:pPr algn="ctr">
-              <a:defRPr sz="2000" b="1">
-                <a:solidFill>
-                  <a:srgbClr val="4E9AF5"/>
-                </a:solidFill>
-                <a:latin typeface="Calibri"/>
-              </a:defRPr>
-            </a:pPr>
-            <a:r>
-              <a:t>Duvan Nguyen</a:t>
             </a:r>
           </a:p>
         </p:txBody>
@@ -3326,6 +3341,7 @@
           <a:lstStyle/>
           <a:p>
             <a:pPr algn="ctr"/>
+            <a:endParaRPr/>
           </a:p>
         </p:txBody>
       </p:sp>
@@ -3338,7 +3354,7 @@
 </file>
 
 <file path=ppt/slides/slide10.xml><?xml version="1.0" encoding="utf-8"?>
-<p:sld xmlns:a="http://schemas.openxmlformats.org/drawingml/2006/main" xmlns:p="http://schemas.openxmlformats.org/presentationml/2006/main" xmlns:r="http://schemas.openxmlformats.org/officeDocument/2006/relationships">
+<p:sld xmlns:a="http://schemas.openxmlformats.org/drawingml/2006/main" xmlns:r="http://schemas.openxmlformats.org/officeDocument/2006/relationships" xmlns:p="http://schemas.openxmlformats.org/presentationml/2006/main">
   <p:cSld>
     <p:bg>
       <p:bgPr>
@@ -3354,7 +3370,14 @@
         <p:cNvGrpSpPr/>
         <p:nvPr/>
       </p:nvGrpSpPr>
-      <p:grpSpPr/>
+      <p:grpSpPr>
+        <a:xfrm>
+          <a:off x="0" y="0"/>
+          <a:ext cx="0" cy="0"/>
+          <a:chOff x="0" y="0"/>
+          <a:chExt cx="0" cy="0"/>
+        </a:xfrm>
+      </p:grpSpPr>
       <p:sp>
         <p:nvSpPr>
           <p:cNvPr id="2" name="Rectangle 1"/>
@@ -3391,7 +3414,7 @@
           </a:fontRef>
         </p:style>
         <p:txBody>
-          <a:bodyPr rtlCol="0" anchor="ctr" lIns="457200" wrap="square"/>
+          <a:bodyPr wrap="square" lIns="457200" rtlCol="0" anchor="ctr"/>
           <a:lstStyle/>
           <a:p>
             <a:pPr algn="l">
@@ -3463,10 +3486,34 @@
                 <a:tableStyleId>{5C22544A-7EE6-4342-B048-85BDC9FD1C3A}</a:tableStyleId>
               </a:tblPr>
               <a:tblGrid>
-                <a:gridCol w="1828800"/>
-                <a:gridCol w="3200400"/>
-                <a:gridCol w="3200400"/>
-                <a:gridCol w="2743200"/>
+                <a:gridCol w="1828800">
+                  <a:extLst>
+                    <a:ext uri="{9D8B030D-6E8A-4147-A177-3AD203B41FA5}">
+                      <a16:colId xmlns:a16="http://schemas.microsoft.com/office/drawing/2014/main" val="20000"/>
+                    </a:ext>
+                  </a:extLst>
+                </a:gridCol>
+                <a:gridCol w="3200400">
+                  <a:extLst>
+                    <a:ext uri="{9D8B030D-6E8A-4147-A177-3AD203B41FA5}">
+                      <a16:colId xmlns:a16="http://schemas.microsoft.com/office/drawing/2014/main" val="20001"/>
+                    </a:ext>
+                  </a:extLst>
+                </a:gridCol>
+                <a:gridCol w="3200400">
+                  <a:extLst>
+                    <a:ext uri="{9D8B030D-6E8A-4147-A177-3AD203B41FA5}">
+                      <a16:colId xmlns:a16="http://schemas.microsoft.com/office/drawing/2014/main" val="20002"/>
+                    </a:ext>
+                  </a:extLst>
+                </a:gridCol>
+                <a:gridCol w="2743200">
+                  <a:extLst>
+                    <a:ext uri="{9D8B030D-6E8A-4147-A177-3AD203B41FA5}">
+                      <a16:colId xmlns:a16="http://schemas.microsoft.com/office/drawing/2014/main" val="20003"/>
+                    </a:ext>
+                  </a:extLst>
+                </a:gridCol>
               </a:tblGrid>
               <a:tr h="685800">
                 <a:tc>
@@ -3565,6 +3612,11 @@
                     </a:solidFill>
                   </a:tcPr>
                 </a:tc>
+                <a:extLst>
+                  <a:ext uri="{0D108BD9-81ED-4DB2-BD59-A6C34878D82A}">
+                    <a16:rowId xmlns:a16="http://schemas.microsoft.com/office/drawing/2014/main" val="10000"/>
+                  </a:ext>
+                </a:extLst>
               </a:tr>
               <a:tr h="685800">
                 <a:tc>
@@ -3663,6 +3715,11 @@
                     </a:solidFill>
                   </a:tcPr>
                 </a:tc>
+                <a:extLst>
+                  <a:ext uri="{0D108BD9-81ED-4DB2-BD59-A6C34878D82A}">
+                    <a16:rowId xmlns:a16="http://schemas.microsoft.com/office/drawing/2014/main" val="10001"/>
+                  </a:ext>
+                </a:extLst>
               </a:tr>
               <a:tr h="685800">
                 <a:tc>
@@ -3761,6 +3818,11 @@
                     </a:solidFill>
                   </a:tcPr>
                 </a:tc>
+                <a:extLst>
+                  <a:ext uri="{0D108BD9-81ED-4DB2-BD59-A6C34878D82A}">
+                    <a16:rowId xmlns:a16="http://schemas.microsoft.com/office/drawing/2014/main" val="10002"/>
+                  </a:ext>
+                </a:extLst>
               </a:tr>
               <a:tr h="685800">
                 <a:tc>
@@ -3859,6 +3921,11 @@
                     </a:solidFill>
                   </a:tcPr>
                 </a:tc>
+                <a:extLst>
+                  <a:ext uri="{0D108BD9-81ED-4DB2-BD59-A6C34878D82A}">
+                    <a16:rowId xmlns:a16="http://schemas.microsoft.com/office/drawing/2014/main" val="10003"/>
+                  </a:ext>
+                </a:extLst>
               </a:tr>
             </a:tbl>
           </a:graphicData>
@@ -3909,7 +3976,7 @@
 </file>
 
 <file path=ppt/slides/slide11.xml><?xml version="1.0" encoding="utf-8"?>
-<p:sld xmlns:a="http://schemas.openxmlformats.org/drawingml/2006/main" xmlns:p="http://schemas.openxmlformats.org/presentationml/2006/main" xmlns:r="http://schemas.openxmlformats.org/officeDocument/2006/relationships">
+<p:sld xmlns:a="http://schemas.openxmlformats.org/drawingml/2006/main" xmlns:r="http://schemas.openxmlformats.org/officeDocument/2006/relationships" xmlns:p="http://schemas.openxmlformats.org/presentationml/2006/main">
   <p:cSld>
     <p:bg>
       <p:bgPr>
@@ -3925,7 +3992,14 @@
         <p:cNvGrpSpPr/>
         <p:nvPr/>
       </p:nvGrpSpPr>
-      <p:grpSpPr/>
+      <p:grpSpPr>
+        <a:xfrm>
+          <a:off x="0" y="0"/>
+          <a:ext cx="0" cy="0"/>
+          <a:chOff x="0" y="0"/>
+          <a:chExt cx="0" cy="0"/>
+        </a:xfrm>
+      </p:grpSpPr>
       <p:sp>
         <p:nvSpPr>
           <p:cNvPr id="2" name="Rectangle 1"/>
@@ -3962,7 +4036,7 @@
           </a:fontRef>
         </p:style>
         <p:txBody>
-          <a:bodyPr rtlCol="0" anchor="ctr" lIns="457200" wrap="square"/>
+          <a:bodyPr wrap="square" lIns="457200" rtlCol="0" anchor="ctr"/>
           <a:lstStyle/>
           <a:p>
             <a:pPr algn="l">
@@ -4089,7 +4163,7 @@
           </a:fontRef>
         </p:style>
         <p:txBody>
-          <a:bodyPr rtlCol="0" anchor="ctr" wrap="square" lIns="137160" tIns="91440"/>
+          <a:bodyPr wrap="square" lIns="137160" tIns="91440" rtlCol="0" anchor="ctr"/>
           <a:lstStyle/>
           <a:p>
             <a:pPr algn="l">
@@ -4296,7 +4370,7 @@
           </a:fontRef>
         </p:style>
         <p:txBody>
-          <a:bodyPr rtlCol="0" anchor="ctr" wrap="square" lIns="137160" tIns="91440"/>
+          <a:bodyPr wrap="square" lIns="137160" tIns="91440" rtlCol="0" anchor="ctr"/>
           <a:lstStyle/>
           <a:p>
             <a:pPr algn="l">
@@ -4427,7 +4501,7 @@
           </a:fontRef>
         </p:style>
         <p:txBody>
-          <a:bodyPr rtlCol="0" anchor="ctr" wrap="square" lIns="137160" tIns="91440"/>
+          <a:bodyPr wrap="square" lIns="137160" tIns="91440" rtlCol="0" anchor="ctr"/>
           <a:lstStyle/>
           <a:p>
             <a:pPr algn="l">
@@ -4510,7 +4584,7 @@
 </file>
 
 <file path=ppt/slides/slide12.xml><?xml version="1.0" encoding="utf-8"?>
-<p:sld xmlns:a="http://schemas.openxmlformats.org/drawingml/2006/main" xmlns:p="http://schemas.openxmlformats.org/presentationml/2006/main" xmlns:r="http://schemas.openxmlformats.org/officeDocument/2006/relationships">
+<p:sld xmlns:a="http://schemas.openxmlformats.org/drawingml/2006/main" xmlns:r="http://schemas.openxmlformats.org/officeDocument/2006/relationships" xmlns:p="http://schemas.openxmlformats.org/presentationml/2006/main">
   <p:cSld>
     <p:bg>
       <p:bgPr>
@@ -4526,7 +4600,14 @@
         <p:cNvGrpSpPr/>
         <p:nvPr/>
       </p:nvGrpSpPr>
-      <p:grpSpPr/>
+      <p:grpSpPr>
+        <a:xfrm>
+          <a:off x="0" y="0"/>
+          <a:ext cx="0" cy="0"/>
+          <a:chOff x="0" y="0"/>
+          <a:chExt cx="0" cy="0"/>
+        </a:xfrm>
+      </p:grpSpPr>
       <p:sp>
         <p:nvSpPr>
           <p:cNvPr id="2" name="Rectangle 1"/>
@@ -4563,7 +4644,7 @@
           </a:fontRef>
         </p:style>
         <p:txBody>
-          <a:bodyPr rtlCol="0" anchor="ctr" lIns="457200" wrap="square"/>
+          <a:bodyPr wrap="square" lIns="457200" rtlCol="0" anchor="ctr"/>
           <a:lstStyle/>
           <a:p>
             <a:pPr algn="l">
@@ -4690,7 +4771,7 @@
           </a:fontRef>
         </p:style>
         <p:txBody>
-          <a:bodyPr rtlCol="0" anchor="ctr" wrap="square" lIns="137160" tIns="91440"/>
+          <a:bodyPr wrap="square" lIns="137160" tIns="91440" rtlCol="0" anchor="ctr"/>
           <a:lstStyle/>
           <a:p>
             <a:pPr algn="l">
@@ -4702,6 +4783,7 @@
               </a:defRPr>
             </a:pPr>
             <a:r>
+              <a:rPr dirty="0"/>
               <a:t>Bidirectional Action</a:t>
             </a:r>
           </a:p>
@@ -4721,6 +4803,7 @@
               </a:defRPr>
             </a:pPr>
             <a:r>
+              <a:rPr dirty="0"/>
               <a:t>• Joint selection of virtual AND</a:t>
             </a:r>
           </a:p>
@@ -4740,6 +4823,7 @@
               </a:defRPr>
             </a:pPr>
             <a:r>
+              <a:rPr dirty="0"/>
               <a:t>• physical node simultaneously</a:t>
             </a:r>
           </a:p>
@@ -4759,6 +4843,7 @@
               </a:defRPr>
             </a:pPr>
             <a:r>
+              <a:rPr dirty="0"/>
               <a:t>• aₜ = (nᵛ, nᵖ)</a:t>
             </a:r>
           </a:p>
@@ -4778,7 +4863,8 @@
               </a:defRPr>
             </a:pPr>
             <a:r>
-              <a:t>• </a:t>
+              <a:rPr dirty="0"/>
+              <a:t>• Expands action space from</a:t>
             </a:r>
           </a:p>
           <a:p>
@@ -4797,7 +4883,8 @@
               </a:defRPr>
             </a:pPr>
             <a:r>
-              <a:t>• Expands action space from</a:t>
+              <a:rPr dirty="0"/>
+              <a:t>• |Nᵖ|×1 to |Nᵖ|×|Nᵛ|</a:t>
             </a:r>
           </a:p>
           <a:p>
@@ -4816,7 +4903,8 @@
               </a:defRPr>
             </a:pPr>
             <a:r>
-              <a:t>• |Nᵖ|×1 to |Nᵖ|×|Nᵛ|</a:t>
+              <a:rPr dirty="0"/>
+              <a:t>• Provably better than</a:t>
             </a:r>
           </a:p>
           <a:p>
@@ -4835,44 +4923,7 @@
               </a:defRPr>
             </a:pPr>
             <a:r>
-              <a:t>• </a:t>
-            </a:r>
-          </a:p>
-          <a:p>
-            <a:pPr>
-              <a:spcBef>
-                <a:spcPts val="400"/>
-              </a:spcBef>
-              <a:spcAft>
-                <a:spcPts val="200"/>
-              </a:spcAft>
-              <a:defRPr sz="1200" b="0">
-                <a:solidFill>
-                  <a:srgbClr val="F0F0F0"/>
-                </a:solidFill>
-                <a:latin typeface="Calibri"/>
-              </a:defRPr>
-            </a:pPr>
-            <a:r>
-              <a:t>• Provably better than</a:t>
-            </a:r>
-          </a:p>
-          <a:p>
-            <a:pPr>
-              <a:spcBef>
-                <a:spcPts val="400"/>
-              </a:spcBef>
-              <a:spcAft>
-                <a:spcPts val="200"/>
-              </a:spcAft>
-              <a:defRPr sz="1200" b="0">
-                <a:solidFill>
-                  <a:srgbClr val="F0F0F0"/>
-                </a:solidFill>
-                <a:latin typeface="Calibri"/>
-              </a:defRPr>
-            </a:pPr>
-            <a:r>
+              <a:rPr dirty="0"/>
               <a:t>• unidirectional (Theorem 1)</a:t>
             </a:r>
           </a:p>
@@ -4916,7 +4967,7 @@
           </a:fontRef>
         </p:style>
         <p:txBody>
-          <a:bodyPr rtlCol="0" anchor="ctr" wrap="square" lIns="137160" tIns="91440"/>
+          <a:bodyPr wrap="square" lIns="137160" tIns="91440" rtlCol="0" anchor="ctr"/>
           <a:lstStyle/>
           <a:p>
             <a:pPr algn="l">
@@ -4928,6 +4979,7 @@
               </a:defRPr>
             </a:pPr>
             <a:r>
+              <a:rPr dirty="0"/>
               <a:t>Hierarchical Decoder</a:t>
             </a:r>
           </a:p>
@@ -4947,6 +4999,7 @@
               </a:defRPr>
             </a:pPr>
             <a:r>
+              <a:rPr dirty="0"/>
               <a:t>• Bilevel policy decomposition:</a:t>
             </a:r>
           </a:p>
@@ -4966,7 +5019,16 @@
               </a:defRPr>
             </a:pPr>
             <a:r>
-              <a:t>• π(aₜ|sₜ) = πᴴ(nᵛ|sₜ) · πᴸ(nᵖ|sₜ,nᵛ)</a:t>
+              <a:rPr dirty="0"/>
+              <a:t>• π(aₜ|sₜ) = πᴴ(nᵛ|sₜ) · πᴸ(nᵖ|</a:t>
+            </a:r>
+            <a:r>
+              <a:rPr dirty="0" err="1"/>
+              <a:t>sₜ,n</a:t>
+            </a:r>
+            <a:r>
+              <a:rPr dirty="0"/>
+              <a:t>ᵛ)</a:t>
             </a:r>
           </a:p>
           <a:p>
@@ -4985,7 +5047,8 @@
               </a:defRPr>
             </a:pPr>
             <a:r>
-              <a:t>• </a:t>
+              <a:rPr dirty="0"/>
+              <a:t>• High-level: which virtual node</a:t>
             </a:r>
           </a:p>
           <a:p>
@@ -5004,7 +5067,8 @@
               </a:defRPr>
             </a:pPr>
             <a:r>
-              <a:t>• High-level: which virtual node</a:t>
+              <a:rPr dirty="0"/>
+              <a:t>• Low-level: where to place it</a:t>
             </a:r>
           </a:p>
           <a:p>
@@ -5023,7 +5087,8 @@
               </a:defRPr>
             </a:pPr>
             <a:r>
-              <a:t>• Low-level: where to place it</a:t>
+              <a:rPr dirty="0"/>
+              <a:t>• Reduces distribution size:</a:t>
             </a:r>
           </a:p>
           <a:p>
@@ -5042,44 +5107,7 @@
               </a:defRPr>
             </a:pPr>
             <a:r>
-              <a:t>• </a:t>
-            </a:r>
-          </a:p>
-          <a:p>
-            <a:pPr>
-              <a:spcBef>
-                <a:spcPts val="400"/>
-              </a:spcBef>
-              <a:spcAft>
-                <a:spcPts val="200"/>
-              </a:spcAft>
-              <a:defRPr sz="1200" b="0">
-                <a:solidFill>
-                  <a:srgbClr val="F0F0F0"/>
-                </a:solidFill>
-                <a:latin typeface="Calibri"/>
-              </a:defRPr>
-            </a:pPr>
-            <a:r>
-              <a:t>• Reduces distribution size:</a:t>
-            </a:r>
-          </a:p>
-          <a:p>
-            <a:pPr>
-              <a:spcBef>
-                <a:spcPts val="400"/>
-              </a:spcBef>
-              <a:spcAft>
-                <a:spcPts val="200"/>
-              </a:spcAft>
-              <a:defRPr sz="1200" b="0">
-                <a:solidFill>
-                  <a:srgbClr val="F0F0F0"/>
-                </a:solidFill>
-                <a:latin typeface="Calibri"/>
-              </a:defRPr>
-            </a:pPr>
-            <a:r>
+              <a:rPr dirty="0"/>
               <a:t>• |Nᵛ|×|Nᵖ| → |Nᵛ|+|Nᵖ|</a:t>
             </a:r>
           </a:p>
@@ -5123,7 +5151,7 @@
           </a:fontRef>
         </p:style>
         <p:txBody>
-          <a:bodyPr rtlCol="0" anchor="ctr" wrap="square" lIns="137160" tIns="91440"/>
+          <a:bodyPr wrap="square" lIns="137160" tIns="91440" rtlCol="0" anchor="ctr"/>
           <a:lstStyle/>
           <a:p>
             <a:pPr algn="l">
@@ -5135,6 +5163,7 @@
               </a:defRPr>
             </a:pPr>
             <a:r>
+              <a:rPr dirty="0"/>
               <a:t>Meta-RL + Curriculum</a:t>
             </a:r>
           </a:p>
@@ -5154,6 +5183,7 @@
               </a:defRPr>
             </a:pPr>
             <a:r>
+              <a:rPr dirty="0"/>
               <a:t>• MAML for varying VNR sizes</a:t>
             </a:r>
           </a:p>
@@ -5173,6 +5203,7 @@
               </a:defRPr>
             </a:pPr>
             <a:r>
+              <a:rPr dirty="0"/>
               <a:t>• as distinct tasks</a:t>
             </a:r>
           </a:p>
@@ -5192,7 +5223,8 @@
               </a:defRPr>
             </a:pPr>
             <a:r>
-              <a:t>• </a:t>
+              <a:rPr dirty="0"/>
+              <a:t>• Curriculum scheduling:</a:t>
             </a:r>
           </a:p>
           <a:p>
@@ -5211,7 +5243,8 @@
               </a:defRPr>
             </a:pPr>
             <a:r>
-              <a:t>• Curriculum scheduling:</a:t>
+              <a:rPr dirty="0"/>
+              <a:t>• 1. Start with smallest VNRs</a:t>
             </a:r>
           </a:p>
           <a:p>
@@ -5230,7 +5263,8 @@
               </a:defRPr>
             </a:pPr>
             <a:r>
-              <a:t>• 1. Start with smallest VNRs</a:t>
+              <a:rPr dirty="0"/>
+              <a:t>• 2. Monitor policy entropy</a:t>
             </a:r>
           </a:p>
           <a:p>
@@ -5249,7 +5283,8 @@
               </a:defRPr>
             </a:pPr>
             <a:r>
-              <a:t>• 2. Monitor policy entropy</a:t>
+              <a:rPr dirty="0"/>
+              <a:t>• 3. Add larger sizes when</a:t>
             </a:r>
           </a:p>
           <a:p>
@@ -5268,8 +5303,14 @@
               </a:defRPr>
             </a:pPr>
             <a:r>
-              <a:t>• 3. Add larger sizes when</a:t>
-            </a:r>
+              <a:rPr dirty="0"/>
+              <a:t>•    entropy &lt; threshold </a:t>
+            </a:r>
+            <a:r>
+              <a:rPr dirty="0" err="1"/>
+              <a:t>δ</a:t>
+            </a:r>
+            <a:endParaRPr dirty="0"/>
           </a:p>
           <a:p>
             <a:pPr>
@@ -5287,44 +5328,7 @@
               </a:defRPr>
             </a:pPr>
             <a:r>
-              <a:t>•    entropy &lt; threshold δ</a:t>
-            </a:r>
-          </a:p>
-          <a:p>
-            <a:pPr>
-              <a:spcBef>
-                <a:spcPts val="400"/>
-              </a:spcBef>
-              <a:spcAft>
-                <a:spcPts val="200"/>
-              </a:spcAft>
-              <a:defRPr sz="1200" b="0">
-                <a:solidFill>
-                  <a:srgbClr val="F0F0F0"/>
-                </a:solidFill>
-                <a:latin typeface="Calibri"/>
-              </a:defRPr>
-            </a:pPr>
-            <a:r>
-              <a:t>• </a:t>
-            </a:r>
-          </a:p>
-          <a:p>
-            <a:pPr>
-              <a:spcBef>
-                <a:spcPts val="400"/>
-              </a:spcBef>
-              <a:spcAft>
-                <a:spcPts val="200"/>
-              </a:spcAft>
-              <a:defRPr sz="1200" b="0">
-                <a:solidFill>
-                  <a:srgbClr val="F0F0F0"/>
-                </a:solidFill>
-                <a:latin typeface="Calibri"/>
-              </a:defRPr>
-            </a:pPr>
-            <a:r>
+              <a:rPr dirty="0"/>
               <a:t>• Result: +10.4% RAC over A3C-GCN</a:t>
             </a:r>
           </a:p>
@@ -5368,7 +5372,7 @@
           </a:fontRef>
         </p:style>
         <p:txBody>
-          <a:bodyPr rtlCol="0" anchor="ctr" wrap="square" lIns="137160" tIns="91440"/>
+          <a:bodyPr wrap="square" lIns="137160" tIns="91440" rtlCol="0" anchor="ctr"/>
           <a:lstStyle/>
           <a:p>
             <a:pPr algn="l">
@@ -5413,7 +5417,7 @@
 </file>
 
 <file path=ppt/slides/slide13.xml><?xml version="1.0" encoding="utf-8"?>
-<p:sld xmlns:a="http://schemas.openxmlformats.org/drawingml/2006/main" xmlns:p="http://schemas.openxmlformats.org/presentationml/2006/main" xmlns:r="http://schemas.openxmlformats.org/officeDocument/2006/relationships">
+<p:sld xmlns:a="http://schemas.openxmlformats.org/drawingml/2006/main" xmlns:r="http://schemas.openxmlformats.org/officeDocument/2006/relationships" xmlns:p="http://schemas.openxmlformats.org/presentationml/2006/main">
   <p:cSld>
     <p:bg>
       <p:bgPr>
@@ -5429,7 +5433,14 @@
         <p:cNvGrpSpPr/>
         <p:nvPr/>
       </p:nvGrpSpPr>
-      <p:grpSpPr/>
+      <p:grpSpPr>
+        <a:xfrm>
+          <a:off x="0" y="0"/>
+          <a:ext cx="0" cy="0"/>
+          <a:chOff x="0" y="0"/>
+          <a:chExt cx="0" cy="0"/>
+        </a:xfrm>
+      </p:grpSpPr>
       <p:sp>
         <p:nvSpPr>
           <p:cNvPr id="2" name="Rectangle 1"/>
@@ -5466,7 +5477,7 @@
           </a:fontRef>
         </p:style>
         <p:txBody>
-          <a:bodyPr rtlCol="0" anchor="ctr" lIns="457200" wrap="square"/>
+          <a:bodyPr wrap="square" lIns="457200" rtlCol="0" anchor="ctr"/>
           <a:lstStyle/>
           <a:p>
             <a:pPr algn="l">
@@ -5557,7 +5568,7 @@
           </a:fontRef>
         </p:style>
         <p:txBody>
-          <a:bodyPr rtlCol="0" anchor="ctr" wrap="square" lIns="137160" tIns="91440"/>
+          <a:bodyPr wrap="square" lIns="137160" tIns="91440" rtlCol="0" anchor="ctr"/>
           <a:lstStyle/>
           <a:p>
             <a:pPr algn="l">
@@ -5707,7 +5718,7 @@
           </a:fontRef>
         </p:style>
         <p:txBody>
-          <a:bodyPr rtlCol="0" anchor="ctr" wrap="square" lIns="137160" tIns="91440"/>
+          <a:bodyPr wrap="square" lIns="137160" tIns="91440" rtlCol="0" anchor="ctr"/>
           <a:lstStyle/>
           <a:p>
             <a:pPr algn="l">
@@ -5876,7 +5887,7 @@
           </a:fontRef>
         </p:style>
         <p:txBody>
-          <a:bodyPr rtlCol="0" anchor="ctr" wrap="square" lIns="137160" tIns="91440"/>
+          <a:bodyPr wrap="square" lIns="137160" tIns="91440" rtlCol="0" anchor="ctr"/>
           <a:lstStyle/>
           <a:p>
             <a:pPr algn="l">
@@ -5959,7 +5970,7 @@
 </file>
 
 <file path=ppt/slides/slide14.xml><?xml version="1.0" encoding="utf-8"?>
-<p:sld xmlns:a="http://schemas.openxmlformats.org/drawingml/2006/main" xmlns:p="http://schemas.openxmlformats.org/presentationml/2006/main" xmlns:r="http://schemas.openxmlformats.org/officeDocument/2006/relationships">
+<p:sld xmlns:a="http://schemas.openxmlformats.org/drawingml/2006/main" xmlns:r="http://schemas.openxmlformats.org/officeDocument/2006/relationships" xmlns:p="http://schemas.openxmlformats.org/presentationml/2006/main">
   <p:cSld>
     <p:bg>
       <p:bgPr>
@@ -5975,7 +5986,14 @@
         <p:cNvGrpSpPr/>
         <p:nvPr/>
       </p:nvGrpSpPr>
-      <p:grpSpPr/>
+      <p:grpSpPr>
+        <a:xfrm>
+          <a:off x="0" y="0"/>
+          <a:ext cx="0" cy="0"/>
+          <a:chOff x="0" y="0"/>
+          <a:chExt cx="0" cy="0"/>
+        </a:xfrm>
+      </p:grpSpPr>
       <p:sp>
         <p:nvSpPr>
           <p:cNvPr id="2" name="Rectangle 1"/>
@@ -6012,7 +6030,7 @@
           </a:fontRef>
         </p:style>
         <p:txBody>
-          <a:bodyPr rtlCol="0" anchor="ctr" lIns="457200" wrap="square"/>
+          <a:bodyPr wrap="square" lIns="457200" rtlCol="0" anchor="ctr"/>
           <a:lstStyle/>
           <a:p>
             <a:pPr algn="l">
@@ -6120,9 +6138,27 @@
                 <a:tableStyleId>{5C22544A-7EE6-4342-B048-85BDC9FD1C3A}</a:tableStyleId>
               </a:tblPr>
               <a:tblGrid>
-                <a:gridCol w="2011680"/>
-                <a:gridCol w="2194560"/>
-                <a:gridCol w="2194560"/>
+                <a:gridCol w="2011680">
+                  <a:extLst>
+                    <a:ext uri="{9D8B030D-6E8A-4147-A177-3AD203B41FA5}">
+                      <a16:colId xmlns:a16="http://schemas.microsoft.com/office/drawing/2014/main" val="20000"/>
+                    </a:ext>
+                  </a:extLst>
+                </a:gridCol>
+                <a:gridCol w="2194560">
+                  <a:extLst>
+                    <a:ext uri="{9D8B030D-6E8A-4147-A177-3AD203B41FA5}">
+                      <a16:colId xmlns:a16="http://schemas.microsoft.com/office/drawing/2014/main" val="20001"/>
+                    </a:ext>
+                  </a:extLst>
+                </a:gridCol>
+                <a:gridCol w="2194560">
+                  <a:extLst>
+                    <a:ext uri="{9D8B030D-6E8A-4147-A177-3AD203B41FA5}">
+                      <a16:colId xmlns:a16="http://schemas.microsoft.com/office/drawing/2014/main" val="20002"/>
+                    </a:ext>
+                  </a:extLst>
+                </a:gridCol>
               </a:tblGrid>
               <a:tr h="457200">
                 <a:tc>
@@ -6197,6 +6233,11 @@
                     </a:solidFill>
                   </a:tcPr>
                 </a:tc>
+                <a:extLst>
+                  <a:ext uri="{0D108BD9-81ED-4DB2-BD59-A6C34878D82A}">
+                    <a16:rowId xmlns:a16="http://schemas.microsoft.com/office/drawing/2014/main" val="10000"/>
+                  </a:ext>
+                </a:extLst>
               </a:tr>
               <a:tr h="457200">
                 <a:tc>
@@ -6271,6 +6312,11 @@
                     </a:solidFill>
                   </a:tcPr>
                 </a:tc>
+                <a:extLst>
+                  <a:ext uri="{0D108BD9-81ED-4DB2-BD59-A6C34878D82A}">
+                    <a16:rowId xmlns:a16="http://schemas.microsoft.com/office/drawing/2014/main" val="10001"/>
+                  </a:ext>
+                </a:extLst>
               </a:tr>
               <a:tr h="457200">
                 <a:tc>
@@ -6345,6 +6391,11 @@
                     </a:solidFill>
                   </a:tcPr>
                 </a:tc>
+                <a:extLst>
+                  <a:ext uri="{0D108BD9-81ED-4DB2-BD59-A6C34878D82A}">
+                    <a16:rowId xmlns:a16="http://schemas.microsoft.com/office/drawing/2014/main" val="10002"/>
+                  </a:ext>
+                </a:extLst>
               </a:tr>
               <a:tr h="457200">
                 <a:tc>
@@ -6419,6 +6470,11 @@
                     </a:solidFill>
                   </a:tcPr>
                 </a:tc>
+                <a:extLst>
+                  <a:ext uri="{0D108BD9-81ED-4DB2-BD59-A6C34878D82A}">
+                    <a16:rowId xmlns:a16="http://schemas.microsoft.com/office/drawing/2014/main" val="10003"/>
+                  </a:ext>
+                </a:extLst>
               </a:tr>
               <a:tr h="457200">
                 <a:tc>
@@ -6493,6 +6549,11 @@
                     </a:solidFill>
                   </a:tcPr>
                 </a:tc>
+                <a:extLst>
+                  <a:ext uri="{0D108BD9-81ED-4DB2-BD59-A6C34878D82A}">
+                    <a16:rowId xmlns:a16="http://schemas.microsoft.com/office/drawing/2014/main" val="10004"/>
+                  </a:ext>
+                </a:extLst>
               </a:tr>
               <a:tr h="457200">
                 <a:tc>
@@ -6567,6 +6628,11 @@
                     </a:solidFill>
                   </a:tcPr>
                 </a:tc>
+                <a:extLst>
+                  <a:ext uri="{0D108BD9-81ED-4DB2-BD59-A6C34878D82A}">
+                    <a16:rowId xmlns:a16="http://schemas.microsoft.com/office/drawing/2014/main" val="10005"/>
+                  </a:ext>
+                </a:extLst>
               </a:tr>
             </a:tbl>
           </a:graphicData>
@@ -6610,7 +6676,7 @@
           </a:fontRef>
         </p:style>
         <p:txBody>
-          <a:bodyPr rtlCol="0" anchor="ctr" wrap="square" lIns="137160" tIns="91440"/>
+          <a:bodyPr wrap="square" lIns="137160" tIns="91440" rtlCol="0" anchor="ctr"/>
           <a:lstStyle/>
           <a:p>
             <a:pPr algn="l">
@@ -6622,8 +6688,14 @@
               </a:defRPr>
             </a:pPr>
             <a:r>
-              <a:t>Key Findings from Virne</a:t>
-            </a:r>
+              <a:rPr dirty="0"/>
+              <a:t>Key Findings from </a:t>
+            </a:r>
+            <a:r>
+              <a:rPr dirty="0" err="1"/>
+              <a:t>Virne</a:t>
+            </a:r>
+            <a:endParaRPr dirty="0"/>
           </a:p>
           <a:p>
             <a:pPr>
@@ -6641,7 +6713,16 @@
               </a:defRPr>
             </a:pPr>
             <a:r>
-              <a:t>• PPO-DualGAT best: 78.1% RAC, 0.74 R2C</a:t>
+              <a:rPr dirty="0"/>
+              <a:t>• PPO-</a:t>
+            </a:r>
+            <a:r>
+              <a:rPr dirty="0" err="1"/>
+              <a:t>DualGAT</a:t>
+            </a:r>
+            <a:r>
+              <a:rPr dirty="0"/>
+              <a:t> best: 78.1% RAC, 0.74 R2C</a:t>
             </a:r>
           </a:p>
           <a:p>
@@ -6660,6 +6741,7 @@
               </a:defRPr>
             </a:pPr>
             <a:r>
+              <a:rPr dirty="0"/>
               <a:t>• Fixed intermediate reward (0.1) is optimal</a:t>
             </a:r>
           </a:p>
@@ -6679,6 +6761,7 @@
               </a:defRPr>
             </a:pPr>
             <a:r>
+              <a:rPr dirty="0"/>
               <a:t>• Action masking: +5.3% acceptance</a:t>
             </a:r>
           </a:p>
@@ -6698,6 +6781,7 @@
               </a:defRPr>
             </a:pPr>
             <a:r>
+              <a:rPr dirty="0"/>
               <a:t>• Generalization is biggest open problem</a:t>
             </a:r>
           </a:p>
@@ -6717,6 +6801,7 @@
               </a:defRPr>
             </a:pPr>
             <a:r>
+              <a:rPr dirty="0"/>
               <a:t>•   → policies degrade on unseen traffic</a:t>
             </a:r>
           </a:p>
@@ -6736,26 +6821,16 @@
               </a:defRPr>
             </a:pPr>
             <a:r>
-              <a:t>• </a:t>
-            </a:r>
-          </a:p>
-          <a:p>
-            <a:pPr>
-              <a:spcBef>
-                <a:spcPts val="400"/>
-              </a:spcBef>
-              <a:spcAft>
-                <a:spcPts val="200"/>
-              </a:spcAft>
-              <a:defRPr sz="1200" b="0">
-                <a:solidFill>
-                  <a:srgbClr val="F0F0F0"/>
-                </a:solidFill>
-                <a:latin typeface="Calibri"/>
-              </a:defRPr>
-            </a:pPr>
-            <a:r>
-              <a:t>• We use Virne's metrics &amp; methodology</a:t>
+              <a:rPr dirty="0"/>
+              <a:t>• We use </a:t>
+            </a:r>
+            <a:r>
+              <a:rPr dirty="0" err="1"/>
+              <a:t>Virne's</a:t>
+            </a:r>
+            <a:r>
+              <a:rPr dirty="0"/>
+              <a:t> metrics &amp; methodology</a:t>
             </a:r>
           </a:p>
         </p:txBody>
@@ -6769,7 +6844,7 @@
 </file>
 
 <file path=ppt/slides/slide15.xml><?xml version="1.0" encoding="utf-8"?>
-<p:sld xmlns:a="http://schemas.openxmlformats.org/drawingml/2006/main" xmlns:p="http://schemas.openxmlformats.org/presentationml/2006/main" xmlns:r="http://schemas.openxmlformats.org/officeDocument/2006/relationships">
+<p:sld xmlns:a="http://schemas.openxmlformats.org/drawingml/2006/main" xmlns:r="http://schemas.openxmlformats.org/officeDocument/2006/relationships" xmlns:p="http://schemas.openxmlformats.org/presentationml/2006/main">
   <p:cSld>
     <p:bg>
       <p:bgPr>
@@ -6785,7 +6860,14 @@
         <p:cNvGrpSpPr/>
         <p:nvPr/>
       </p:nvGrpSpPr>
-      <p:grpSpPr/>
+      <p:grpSpPr>
+        <a:xfrm>
+          <a:off x="0" y="0"/>
+          <a:ext cx="0" cy="0"/>
+          <a:chOff x="0" y="0"/>
+          <a:chExt cx="0" cy="0"/>
+        </a:xfrm>
+      </p:grpSpPr>
       <p:sp>
         <p:nvSpPr>
           <p:cNvPr id="2" name="Rectangle 1"/>
@@ -6822,7 +6904,7 @@
           </a:fontRef>
         </p:style>
         <p:txBody>
-          <a:bodyPr rtlCol="0" anchor="ctr" lIns="457200" wrap="square"/>
+          <a:bodyPr wrap="square" lIns="457200" rtlCol="0" anchor="ctr"/>
           <a:lstStyle/>
           <a:p>
             <a:pPr algn="l">
@@ -6937,7 +7019,7 @@
           </a:fontRef>
         </p:style>
         <p:txBody>
-          <a:bodyPr rtlCol="0" anchor="ctr" wrap="square" lIns="137160" tIns="91440"/>
+          <a:bodyPr wrap="square" lIns="137160" tIns="91440" rtlCol="0" anchor="ctr"/>
           <a:lstStyle/>
           <a:p>
             <a:pPr algn="l">
@@ -7049,7 +7131,7 @@
           </a:fontRef>
         </p:style>
         <p:txBody>
-          <a:bodyPr rtlCol="0" anchor="ctr" wrap="square" lIns="137160" tIns="91440"/>
+          <a:bodyPr wrap="square" lIns="137160" tIns="91440" rtlCol="0" anchor="ctr"/>
           <a:lstStyle/>
           <a:p>
             <a:pPr algn="l">
@@ -7132,7 +7214,7 @@
 </file>
 
 <file path=ppt/slides/slide16.xml><?xml version="1.0" encoding="utf-8"?>
-<p:sld xmlns:a="http://schemas.openxmlformats.org/drawingml/2006/main" xmlns:p="http://schemas.openxmlformats.org/presentationml/2006/main" xmlns:r="http://schemas.openxmlformats.org/officeDocument/2006/relationships">
+<p:sld xmlns:a="http://schemas.openxmlformats.org/drawingml/2006/main" xmlns:r="http://schemas.openxmlformats.org/officeDocument/2006/relationships" xmlns:p="http://schemas.openxmlformats.org/presentationml/2006/main">
   <p:cSld>
     <p:bg>
       <p:bgPr>
@@ -7148,7 +7230,14 @@
         <p:cNvGrpSpPr/>
         <p:nvPr/>
       </p:nvGrpSpPr>
-      <p:grpSpPr/>
+      <p:grpSpPr>
+        <a:xfrm>
+          <a:off x="0" y="0"/>
+          <a:ext cx="0" cy="0"/>
+          <a:chOff x="0" y="0"/>
+          <a:chExt cx="0" cy="0"/>
+        </a:xfrm>
+      </p:grpSpPr>
       <p:sp>
         <p:nvSpPr>
           <p:cNvPr id="2" name="Rectangle 1"/>
@@ -7185,7 +7274,7 @@
           </a:fontRef>
         </p:style>
         <p:txBody>
-          <a:bodyPr rtlCol="0" anchor="ctr" lIns="457200" wrap="square"/>
+          <a:bodyPr wrap="square" lIns="457200" rtlCol="0" anchor="ctr"/>
           <a:lstStyle/>
           <a:p>
             <a:pPr algn="l">
@@ -7300,7 +7389,7 @@
           </a:fontRef>
         </p:style>
         <p:txBody>
-          <a:bodyPr rtlCol="0" anchor="ctr" wrap="square" lIns="137160" tIns="91440"/>
+          <a:bodyPr wrap="square" lIns="137160" tIns="91440" rtlCol="0" anchor="ctr"/>
           <a:lstStyle/>
           <a:p>
             <a:pPr algn="l">
@@ -7431,7 +7520,7 @@
           </a:fontRef>
         </p:style>
         <p:txBody>
-          <a:bodyPr rtlCol="0" anchor="ctr" wrap="square" lIns="137160" tIns="91440"/>
+          <a:bodyPr wrap="square" lIns="137160" tIns="91440" rtlCol="0" anchor="ctr"/>
           <a:lstStyle/>
           <a:p>
             <a:pPr algn="l">
@@ -7571,7 +7660,7 @@
 </file>
 
 <file path=ppt/slides/slide17.xml><?xml version="1.0" encoding="utf-8"?>
-<p:sld xmlns:a="http://schemas.openxmlformats.org/drawingml/2006/main" xmlns:p="http://schemas.openxmlformats.org/presentationml/2006/main" xmlns:r="http://schemas.openxmlformats.org/officeDocument/2006/relationships">
+<p:sld xmlns:a="http://schemas.openxmlformats.org/drawingml/2006/main" xmlns:r="http://schemas.openxmlformats.org/officeDocument/2006/relationships" xmlns:p="http://schemas.openxmlformats.org/presentationml/2006/main">
   <p:cSld>
     <p:bg>
       <p:bgPr>
@@ -7587,7 +7676,14 @@
         <p:cNvGrpSpPr/>
         <p:nvPr/>
       </p:nvGrpSpPr>
-      <p:grpSpPr/>
+      <p:grpSpPr>
+        <a:xfrm>
+          <a:off x="0" y="0"/>
+          <a:ext cx="0" cy="0"/>
+          <a:chOff x="0" y="0"/>
+          <a:chExt cx="0" cy="0"/>
+        </a:xfrm>
+      </p:grpSpPr>
       <p:sp>
         <p:nvSpPr>
           <p:cNvPr id="2" name="Rectangle 1"/>
@@ -7624,7 +7720,7 @@
           </a:fontRef>
         </p:style>
         <p:txBody>
-          <a:bodyPr rtlCol="0" anchor="ctr" lIns="457200" wrap="square"/>
+          <a:bodyPr wrap="square" lIns="457200" rtlCol="0" anchor="ctr"/>
           <a:lstStyle/>
           <a:p>
             <a:pPr algn="l">
@@ -7696,11 +7792,41 @@
                 <a:tableStyleId>{5C22544A-7EE6-4342-B048-85BDC9FD1C3A}</a:tableStyleId>
               </a:tblPr>
               <a:tblGrid>
-                <a:gridCol w="1828800"/>
-                <a:gridCol w="2743200"/>
-                <a:gridCol w="2743200"/>
-                <a:gridCol w="1828800"/>
-                <a:gridCol w="1828800"/>
+                <a:gridCol w="1828800">
+                  <a:extLst>
+                    <a:ext uri="{9D8B030D-6E8A-4147-A177-3AD203B41FA5}">
+                      <a16:colId xmlns:a16="http://schemas.microsoft.com/office/drawing/2014/main" val="20000"/>
+                    </a:ext>
+                  </a:extLst>
+                </a:gridCol>
+                <a:gridCol w="2743200">
+                  <a:extLst>
+                    <a:ext uri="{9D8B030D-6E8A-4147-A177-3AD203B41FA5}">
+                      <a16:colId xmlns:a16="http://schemas.microsoft.com/office/drawing/2014/main" val="20001"/>
+                    </a:ext>
+                  </a:extLst>
+                </a:gridCol>
+                <a:gridCol w="2743200">
+                  <a:extLst>
+                    <a:ext uri="{9D8B030D-6E8A-4147-A177-3AD203B41FA5}">
+                      <a16:colId xmlns:a16="http://schemas.microsoft.com/office/drawing/2014/main" val="20002"/>
+                    </a:ext>
+                  </a:extLst>
+                </a:gridCol>
+                <a:gridCol w="1828800">
+                  <a:extLst>
+                    <a:ext uri="{9D8B030D-6E8A-4147-A177-3AD203B41FA5}">
+                      <a16:colId xmlns:a16="http://schemas.microsoft.com/office/drawing/2014/main" val="20003"/>
+                    </a:ext>
+                  </a:extLst>
+                </a:gridCol>
+                <a:gridCol w="1828800">
+                  <a:extLst>
+                    <a:ext uri="{9D8B030D-6E8A-4147-A177-3AD203B41FA5}">
+                      <a16:colId xmlns:a16="http://schemas.microsoft.com/office/drawing/2014/main" val="20004"/>
+                    </a:ext>
+                  </a:extLst>
+                </a:gridCol>
               </a:tblGrid>
               <a:tr h="457200">
                 <a:tc>
@@ -7823,6 +7949,11 @@
                     </a:solidFill>
                   </a:tcPr>
                 </a:tc>
+                <a:extLst>
+                  <a:ext uri="{0D108BD9-81ED-4DB2-BD59-A6C34878D82A}">
+                    <a16:rowId xmlns:a16="http://schemas.microsoft.com/office/drawing/2014/main" val="10000"/>
+                  </a:ext>
+                </a:extLst>
               </a:tr>
               <a:tr h="457200">
                 <a:tc>
@@ -7945,6 +8076,11 @@
                     </a:solidFill>
                   </a:tcPr>
                 </a:tc>
+                <a:extLst>
+                  <a:ext uri="{0D108BD9-81ED-4DB2-BD59-A6C34878D82A}">
+                    <a16:rowId xmlns:a16="http://schemas.microsoft.com/office/drawing/2014/main" val="10001"/>
+                  </a:ext>
+                </a:extLst>
               </a:tr>
               <a:tr h="457200">
                 <a:tc>
@@ -8067,6 +8203,11 @@
                     </a:solidFill>
                   </a:tcPr>
                 </a:tc>
+                <a:extLst>
+                  <a:ext uri="{0D108BD9-81ED-4DB2-BD59-A6C34878D82A}">
+                    <a16:rowId xmlns:a16="http://schemas.microsoft.com/office/drawing/2014/main" val="10002"/>
+                  </a:ext>
+                </a:extLst>
               </a:tr>
               <a:tr h="457200">
                 <a:tc>
@@ -8189,6 +8330,11 @@
                     </a:solidFill>
                   </a:tcPr>
                 </a:tc>
+                <a:extLst>
+                  <a:ext uri="{0D108BD9-81ED-4DB2-BD59-A6C34878D82A}">
+                    <a16:rowId xmlns:a16="http://schemas.microsoft.com/office/drawing/2014/main" val="10003"/>
+                  </a:ext>
+                </a:extLst>
               </a:tr>
               <a:tr h="457200">
                 <a:tc>
@@ -8311,6 +8457,11 @@
                     </a:solidFill>
                   </a:tcPr>
                 </a:tc>
+                <a:extLst>
+                  <a:ext uri="{0D108BD9-81ED-4DB2-BD59-A6C34878D82A}">
+                    <a16:rowId xmlns:a16="http://schemas.microsoft.com/office/drawing/2014/main" val="10004"/>
+                  </a:ext>
+                </a:extLst>
               </a:tr>
               <a:tr h="457200">
                 <a:tc>
@@ -8433,6 +8584,11 @@
                     </a:solidFill>
                   </a:tcPr>
                 </a:tc>
+                <a:extLst>
+                  <a:ext uri="{0D108BD9-81ED-4DB2-BD59-A6C34878D82A}">
+                    <a16:rowId xmlns:a16="http://schemas.microsoft.com/office/drawing/2014/main" val="10005"/>
+                  </a:ext>
+                </a:extLst>
               </a:tr>
               <a:tr h="457200">
                 <a:tc>
@@ -8555,6 +8711,11 @@
                     </a:solidFill>
                   </a:tcPr>
                 </a:tc>
+                <a:extLst>
+                  <a:ext uri="{0D108BD9-81ED-4DB2-BD59-A6C34878D82A}">
+                    <a16:rowId xmlns:a16="http://schemas.microsoft.com/office/drawing/2014/main" val="10006"/>
+                  </a:ext>
+                </a:extLst>
               </a:tr>
             </a:tbl>
           </a:graphicData>
@@ -8576,7 +8737,7 @@
         </p:blipFill>
         <p:spPr>
           <a:xfrm>
-            <a:off x="274320" y="4937760"/>
+            <a:off x="263769" y="7188591"/>
             <a:ext cx="11430000" cy="7708155"/>
           </a:xfrm>
           <a:prstGeom prst="rect">
@@ -8593,7 +8754,7 @@
 </file>
 
 <file path=ppt/slides/slide18.xml><?xml version="1.0" encoding="utf-8"?>
-<p:sld xmlns:a="http://schemas.openxmlformats.org/drawingml/2006/main" xmlns:p="http://schemas.openxmlformats.org/presentationml/2006/main" xmlns:r="http://schemas.openxmlformats.org/officeDocument/2006/relationships">
+<p:sld xmlns:a="http://schemas.openxmlformats.org/drawingml/2006/main" xmlns:r="http://schemas.openxmlformats.org/officeDocument/2006/relationships" xmlns:p="http://schemas.openxmlformats.org/presentationml/2006/main">
   <p:cSld>
     <p:bg>
       <p:bgPr>
@@ -8609,7 +8770,14 @@
         <p:cNvGrpSpPr/>
         <p:nvPr/>
       </p:nvGrpSpPr>
-      <p:grpSpPr/>
+      <p:grpSpPr>
+        <a:xfrm>
+          <a:off x="0" y="0"/>
+          <a:ext cx="0" cy="0"/>
+          <a:chOff x="0" y="0"/>
+          <a:chExt cx="0" cy="0"/>
+        </a:xfrm>
+      </p:grpSpPr>
       <p:sp>
         <p:nvSpPr>
           <p:cNvPr id="2" name="Rectangle 1"/>
@@ -8646,7 +8814,7 @@
           </a:fontRef>
         </p:style>
         <p:txBody>
-          <a:bodyPr rtlCol="0" anchor="ctr" lIns="457200" wrap="square"/>
+          <a:bodyPr wrap="square" lIns="457200" rtlCol="0" anchor="ctr"/>
           <a:lstStyle/>
           <a:p>
             <a:pPr algn="l">
@@ -8737,7 +8905,7 @@
           </a:fontRef>
         </p:style>
         <p:txBody>
-          <a:bodyPr rtlCol="0" anchor="ctr" wrap="square" lIns="137160" tIns="91440"/>
+          <a:bodyPr wrap="square" lIns="137160" tIns="91440" rtlCol="0" anchor="ctr"/>
           <a:lstStyle/>
           <a:p>
             <a:pPr algn="l">
@@ -8906,7 +9074,7 @@
           </a:fontRef>
         </p:style>
         <p:txBody>
-          <a:bodyPr rtlCol="0" anchor="ctr" wrap="square" lIns="137160" tIns="91440"/>
+          <a:bodyPr wrap="square" lIns="137160" tIns="91440" rtlCol="0" anchor="ctr"/>
           <a:lstStyle/>
           <a:p>
             <a:pPr algn="l">
@@ -9056,7 +9224,7 @@
           </a:fontRef>
         </p:style>
         <p:txBody>
-          <a:bodyPr rtlCol="0" anchor="ctr" wrap="square" lIns="137160" tIns="91440"/>
+          <a:bodyPr wrap="square" lIns="137160" tIns="91440" rtlCol="0" anchor="ctr"/>
           <a:lstStyle/>
           <a:p>
             <a:pPr algn="l">
@@ -9168,7 +9336,7 @@
           </a:fontRef>
         </p:style>
         <p:txBody>
-          <a:bodyPr rtlCol="0" anchor="ctr" wrap="square" lIns="137160" tIns="91440"/>
+          <a:bodyPr wrap="square" lIns="137160" tIns="91440" rtlCol="0" anchor="ctr"/>
           <a:lstStyle/>
           <a:p>
             <a:pPr algn="l">
@@ -9251,7 +9419,7 @@
 </file>
 
 <file path=ppt/slides/slide19.xml><?xml version="1.0" encoding="utf-8"?>
-<p:sld xmlns:a="http://schemas.openxmlformats.org/drawingml/2006/main" xmlns:p="http://schemas.openxmlformats.org/presentationml/2006/main" xmlns:r="http://schemas.openxmlformats.org/officeDocument/2006/relationships">
+<p:sld xmlns:a="http://schemas.openxmlformats.org/drawingml/2006/main" xmlns:r="http://schemas.openxmlformats.org/officeDocument/2006/relationships" xmlns:p="http://schemas.openxmlformats.org/presentationml/2006/main">
   <p:cSld>
     <p:bg>
       <p:bgPr>
@@ -9267,7 +9435,14 @@
         <p:cNvGrpSpPr/>
         <p:nvPr/>
       </p:nvGrpSpPr>
-      <p:grpSpPr/>
+      <p:grpSpPr>
+        <a:xfrm>
+          <a:off x="0" y="0"/>
+          <a:ext cx="0" cy="0"/>
+          <a:chOff x="0" y="0"/>
+          <a:chExt cx="0" cy="0"/>
+        </a:xfrm>
+      </p:grpSpPr>
       <p:sp>
         <p:nvSpPr>
           <p:cNvPr id="2" name="Rectangle 1"/>
@@ -9304,7 +9479,7 @@
           </a:fontRef>
         </p:style>
         <p:txBody>
-          <a:bodyPr rtlCol="0" anchor="ctr" lIns="457200" wrap="square"/>
+          <a:bodyPr wrap="square" lIns="457200" rtlCol="0" anchor="ctr"/>
           <a:lstStyle/>
           <a:p>
             <a:pPr algn="l">
@@ -9395,7 +9570,7 @@
           </a:fontRef>
         </p:style>
         <p:txBody>
-          <a:bodyPr rtlCol="0" anchor="ctr" wrap="square" lIns="137160" tIns="91440"/>
+          <a:bodyPr wrap="square" lIns="137160" tIns="91440" rtlCol="0" anchor="ctr"/>
           <a:lstStyle/>
           <a:p>
             <a:pPr algn="l">
@@ -9507,9 +9682,27 @@
                 <a:tableStyleId>{5C22544A-7EE6-4342-B048-85BDC9FD1C3A}</a:tableStyleId>
               </a:tblPr>
               <a:tblGrid>
-                <a:gridCol w="1645920"/>
-                <a:gridCol w="1097280"/>
-                <a:gridCol w="2286000"/>
+                <a:gridCol w="1645920">
+                  <a:extLst>
+                    <a:ext uri="{9D8B030D-6E8A-4147-A177-3AD203B41FA5}">
+                      <a16:colId xmlns:a16="http://schemas.microsoft.com/office/drawing/2014/main" val="20000"/>
+                    </a:ext>
+                  </a:extLst>
+                </a:gridCol>
+                <a:gridCol w="1097280">
+                  <a:extLst>
+                    <a:ext uri="{9D8B030D-6E8A-4147-A177-3AD203B41FA5}">
+                      <a16:colId xmlns:a16="http://schemas.microsoft.com/office/drawing/2014/main" val="20001"/>
+                    </a:ext>
+                  </a:extLst>
+                </a:gridCol>
+                <a:gridCol w="2286000">
+                  <a:extLst>
+                    <a:ext uri="{9D8B030D-6E8A-4147-A177-3AD203B41FA5}">
+                      <a16:colId xmlns:a16="http://schemas.microsoft.com/office/drawing/2014/main" val="20002"/>
+                    </a:ext>
+                  </a:extLst>
+                </a:gridCol>
               </a:tblGrid>
               <a:tr h="365760">
                 <a:tc>
@@ -9584,6 +9777,11 @@
                     </a:solidFill>
                   </a:tcPr>
                 </a:tc>
+                <a:extLst>
+                  <a:ext uri="{0D108BD9-81ED-4DB2-BD59-A6C34878D82A}">
+                    <a16:rowId xmlns:a16="http://schemas.microsoft.com/office/drawing/2014/main" val="10000"/>
+                  </a:ext>
+                </a:extLst>
               </a:tr>
               <a:tr h="365760">
                 <a:tc>
@@ -9658,6 +9856,11 @@
                     </a:solidFill>
                   </a:tcPr>
                 </a:tc>
+                <a:extLst>
+                  <a:ext uri="{0D108BD9-81ED-4DB2-BD59-A6C34878D82A}">
+                    <a16:rowId xmlns:a16="http://schemas.microsoft.com/office/drawing/2014/main" val="10001"/>
+                  </a:ext>
+                </a:extLst>
               </a:tr>
               <a:tr h="365760">
                 <a:tc>
@@ -9732,6 +9935,11 @@
                     </a:solidFill>
                   </a:tcPr>
                 </a:tc>
+                <a:extLst>
+                  <a:ext uri="{0D108BD9-81ED-4DB2-BD59-A6C34878D82A}">
+                    <a16:rowId xmlns:a16="http://schemas.microsoft.com/office/drawing/2014/main" val="10002"/>
+                  </a:ext>
+                </a:extLst>
               </a:tr>
               <a:tr h="365760">
                 <a:tc>
@@ -9806,6 +10014,11 @@
                     </a:solidFill>
                   </a:tcPr>
                 </a:tc>
+                <a:extLst>
+                  <a:ext uri="{0D108BD9-81ED-4DB2-BD59-A6C34878D82A}">
+                    <a16:rowId xmlns:a16="http://schemas.microsoft.com/office/drawing/2014/main" val="10003"/>
+                  </a:ext>
+                </a:extLst>
               </a:tr>
               <a:tr h="365760">
                 <a:tc>
@@ -9880,6 +10093,11 @@
                     </a:solidFill>
                   </a:tcPr>
                 </a:tc>
+                <a:extLst>
+                  <a:ext uri="{0D108BD9-81ED-4DB2-BD59-A6C34878D82A}">
+                    <a16:rowId xmlns:a16="http://schemas.microsoft.com/office/drawing/2014/main" val="10004"/>
+                  </a:ext>
+                </a:extLst>
               </a:tr>
               <a:tr h="365760">
                 <a:tc>
@@ -9954,6 +10172,11 @@
                     </a:solidFill>
                   </a:tcPr>
                 </a:tc>
+                <a:extLst>
+                  <a:ext uri="{0D108BD9-81ED-4DB2-BD59-A6C34878D82A}">
+                    <a16:rowId xmlns:a16="http://schemas.microsoft.com/office/drawing/2014/main" val="10005"/>
+                  </a:ext>
+                </a:extLst>
               </a:tr>
               <a:tr h="365760">
                 <a:tc>
@@ -10028,6 +10251,11 @@
                     </a:solidFill>
                   </a:tcPr>
                 </a:tc>
+                <a:extLst>
+                  <a:ext uri="{0D108BD9-81ED-4DB2-BD59-A6C34878D82A}">
+                    <a16:rowId xmlns:a16="http://schemas.microsoft.com/office/drawing/2014/main" val="10006"/>
+                  </a:ext>
+                </a:extLst>
               </a:tr>
             </a:tbl>
           </a:graphicData>
@@ -10071,7 +10299,7 @@
           </a:fontRef>
         </p:style>
         <p:txBody>
-          <a:bodyPr rtlCol="0" anchor="ctr" wrap="square" lIns="137160" tIns="91440"/>
+          <a:bodyPr wrap="square" lIns="137160" tIns="91440" rtlCol="0" anchor="ctr"/>
           <a:lstStyle/>
           <a:p>
             <a:pPr algn="l">
@@ -10164,7 +10392,7 @@
           </a:fontRef>
         </p:style>
         <p:txBody>
-          <a:bodyPr rtlCol="0" anchor="ctr" wrap="square" lIns="137160" tIns="91440"/>
+          <a:bodyPr wrap="square" lIns="137160" tIns="91440" rtlCol="0" anchor="ctr"/>
           <a:lstStyle/>
           <a:p>
             <a:pPr algn="l">
@@ -10247,7 +10475,7 @@
 </file>
 
 <file path=ppt/slides/slide2.xml><?xml version="1.0" encoding="utf-8"?>
-<p:sld xmlns:a="http://schemas.openxmlformats.org/drawingml/2006/main" xmlns:p="http://schemas.openxmlformats.org/presentationml/2006/main" xmlns:r="http://schemas.openxmlformats.org/officeDocument/2006/relationships">
+<p:sld xmlns:a="http://schemas.openxmlformats.org/drawingml/2006/main" xmlns:r="http://schemas.openxmlformats.org/officeDocument/2006/relationships" xmlns:p="http://schemas.openxmlformats.org/presentationml/2006/main">
   <p:cSld>
     <p:bg>
       <p:bgPr>
@@ -10263,7 +10491,14 @@
         <p:cNvGrpSpPr/>
         <p:nvPr/>
       </p:nvGrpSpPr>
-      <p:grpSpPr/>
+      <p:grpSpPr>
+        <a:xfrm>
+          <a:off x="0" y="0"/>
+          <a:ext cx="0" cy="0"/>
+          <a:chOff x="0" y="0"/>
+          <a:chExt cx="0" cy="0"/>
+        </a:xfrm>
+      </p:grpSpPr>
       <p:sp>
         <p:nvSpPr>
           <p:cNvPr id="2" name="Rectangle 1"/>
@@ -10300,7 +10535,7 @@
           </a:fontRef>
         </p:style>
         <p:txBody>
-          <a:bodyPr rtlCol="0" anchor="ctr" lIns="457200" wrap="square"/>
+          <a:bodyPr wrap="square" lIns="457200" rtlCol="0" anchor="ctr"/>
           <a:lstStyle/>
           <a:p>
             <a:pPr algn="l">
@@ -10353,7 +10588,7 @@
           </a:fontRef>
         </p:style>
         <p:txBody>
-          <a:bodyPr rtlCol="0" anchor="ctr" wrap="square"/>
+          <a:bodyPr wrap="square" rtlCol="0" anchor="ctr"/>
           <a:lstStyle/>
           <a:p>
             <a:pPr algn="ctr">
@@ -10442,7 +10677,7 @@
           </a:fontRef>
         </p:style>
         <p:txBody>
-          <a:bodyPr rtlCol="0" anchor="ctr" wrap="square"/>
+          <a:bodyPr wrap="square" rtlCol="0" anchor="ctr"/>
           <a:lstStyle/>
           <a:p>
             <a:pPr algn="ctr">
@@ -10531,7 +10766,7 @@
           </a:fontRef>
         </p:style>
         <p:txBody>
-          <a:bodyPr rtlCol="0" anchor="ctr" wrap="square"/>
+          <a:bodyPr wrap="square" rtlCol="0" anchor="ctr"/>
           <a:lstStyle/>
           <a:p>
             <a:pPr algn="ctr">
@@ -10620,7 +10855,7 @@
           </a:fontRef>
         </p:style>
         <p:txBody>
-          <a:bodyPr rtlCol="0" anchor="ctr" wrap="square"/>
+          <a:bodyPr wrap="square" rtlCol="0" anchor="ctr"/>
           <a:lstStyle/>
           <a:p>
             <a:pPr algn="ctr">
@@ -10709,7 +10944,7 @@
           </a:fontRef>
         </p:style>
         <p:txBody>
-          <a:bodyPr rtlCol="0" anchor="ctr" wrap="square"/>
+          <a:bodyPr wrap="square" rtlCol="0" anchor="ctr"/>
           <a:lstStyle/>
           <a:p>
             <a:pPr algn="ctr">
@@ -10798,7 +11033,7 @@
           </a:fontRef>
         </p:style>
         <p:txBody>
-          <a:bodyPr rtlCol="0" anchor="ctr" wrap="square"/>
+          <a:bodyPr wrap="square" rtlCol="0" anchor="ctr"/>
           <a:lstStyle/>
           <a:p>
             <a:pPr algn="ctr">
@@ -10887,7 +11122,7 @@
           </a:fontRef>
         </p:style>
         <p:txBody>
-          <a:bodyPr rtlCol="0" anchor="ctr" wrap="square"/>
+          <a:bodyPr wrap="square" rtlCol="0" anchor="ctr"/>
           <a:lstStyle/>
           <a:p>
             <a:pPr algn="ctr">
@@ -10976,7 +11211,7 @@
           </a:fontRef>
         </p:style>
         <p:txBody>
-          <a:bodyPr rtlCol="0" anchor="ctr" wrap="square"/>
+          <a:bodyPr wrap="square" rtlCol="0" anchor="ctr"/>
           <a:lstStyle/>
           <a:p>
             <a:pPr algn="ctr">
@@ -11065,7 +11300,7 @@
           </a:fontRef>
         </p:style>
         <p:txBody>
-          <a:bodyPr rtlCol="0" anchor="ctr" wrap="square"/>
+          <a:bodyPr wrap="square" rtlCol="0" anchor="ctr"/>
           <a:lstStyle/>
           <a:p>
             <a:pPr algn="ctr">
@@ -11127,7 +11362,7 @@
 </file>
 
 <file path=ppt/slides/slide20.xml><?xml version="1.0" encoding="utf-8"?>
-<p:sld xmlns:a="http://schemas.openxmlformats.org/drawingml/2006/main" xmlns:p="http://schemas.openxmlformats.org/presentationml/2006/main" xmlns:r="http://schemas.openxmlformats.org/officeDocument/2006/relationships">
+<p:sld xmlns:a="http://schemas.openxmlformats.org/drawingml/2006/main" xmlns:r="http://schemas.openxmlformats.org/officeDocument/2006/relationships" xmlns:p="http://schemas.openxmlformats.org/presentationml/2006/main">
   <p:cSld>
     <p:bg>
       <p:bgPr>
@@ -11143,7 +11378,14 @@
         <p:cNvGrpSpPr/>
         <p:nvPr/>
       </p:nvGrpSpPr>
-      <p:grpSpPr/>
+      <p:grpSpPr>
+        <a:xfrm>
+          <a:off x="0" y="0"/>
+          <a:ext cx="0" cy="0"/>
+          <a:chOff x="0" y="0"/>
+          <a:chExt cx="0" cy="0"/>
+        </a:xfrm>
+      </p:grpSpPr>
       <p:sp>
         <p:nvSpPr>
           <p:cNvPr id="2" name="Rectangle 1"/>
@@ -11180,146 +11422,7 @@
           </a:fontRef>
         </p:style>
         <p:txBody>
-          <a:bodyPr rtlCol="0" anchor="ctr" lIns="457200" wrap="square"/>
-          <a:lstStyle/>
-          <a:p>
-            <a:pPr algn="l">
-              <a:defRPr sz="2800" b="1">
-                <a:solidFill>
-                  <a:srgbClr val="F0F0F0"/>
-                </a:solidFill>
-                <a:latin typeface="Calibri"/>
-              </a:defRPr>
-            </a:pPr>
-            <a:r>
-              <a:t>V. PROPOSED METHODS</a:t>
-            </a:r>
-          </a:p>
-        </p:txBody>
-      </p:sp>
-      <p:sp>
-        <p:nvSpPr>
-          <p:cNvPr id="3" name="TextBox 2"/>
-          <p:cNvSpPr txBox="1"/>
-          <p:nvPr/>
-        </p:nvSpPr>
-        <p:spPr>
-          <a:xfrm>
-            <a:off x="548640" y="914400"/>
-            <a:ext cx="10972800" cy="548640"/>
-          </a:xfrm>
-          <a:prstGeom prst="rect">
-            <a:avLst/>
-          </a:prstGeom>
-          <a:noFill/>
-        </p:spPr>
-        <p:txBody>
-          <a:bodyPr wrap="square">
-            <a:spAutoFit/>
-          </a:bodyPr>
-          <a:lstStyle/>
-          <a:p>
-            <a:pPr algn="l">
-              <a:defRPr sz="2600" b="1">
-                <a:solidFill>
-                  <a:srgbClr val="56CCF2"/>
-                </a:solidFill>
-                <a:latin typeface="Calibri"/>
-              </a:defRPr>
-            </a:pPr>
-            <a:r>
-              <a:t>Method 2: MP-VNE — Multi-Path Link Allocation</a:t>
-            </a:r>
-          </a:p>
-        </p:txBody>
-      </p:sp>
-      <p:pic>
-        <p:nvPicPr>
-          <p:cNvPr id="4" name="Picture 3" descr="multipath_allocation.png"/>
-          <p:cNvPicPr>
-            <a:picLocks noChangeAspect="1"/>
-          </p:cNvPicPr>
-          <p:nvPr/>
-        </p:nvPicPr>
-        <p:blipFill>
-          <a:blip r:embed="rId2"/>
-          <a:stretch>
-            <a:fillRect/>
-          </a:stretch>
-        </p:blipFill>
-        <p:spPr>
-          <a:xfrm>
-            <a:off x="1371600" y="1645920"/>
-            <a:ext cx="9418320" cy="4881323"/>
-          </a:xfrm>
-          <a:prstGeom prst="rect">
-            <a:avLst/>
-          </a:prstGeom>
-        </p:spPr>
-      </p:pic>
-    </p:spTree>
-  </p:cSld>
-  <p:clrMapOvr>
-    <a:masterClrMapping/>
-  </p:clrMapOvr>
-</p:sld>
-</file>
-
-<file path=ppt/slides/slide21.xml><?xml version="1.0" encoding="utf-8"?>
-<p:sld xmlns:a="http://schemas.openxmlformats.org/drawingml/2006/main" xmlns:p="http://schemas.openxmlformats.org/presentationml/2006/main" xmlns:r="http://schemas.openxmlformats.org/officeDocument/2006/relationships">
-  <p:cSld>
-    <p:bg>
-      <p:bgPr>
-        <a:solidFill>
-          <a:srgbClr val="1B1B2F"/>
-        </a:solidFill>
-        <a:effectLst/>
-      </p:bgPr>
-    </p:bg>
-    <p:spTree>
-      <p:nvGrpSpPr>
-        <p:cNvPr id="1" name=""/>
-        <p:cNvGrpSpPr/>
-        <p:nvPr/>
-      </p:nvGrpSpPr>
-      <p:grpSpPr/>
-      <p:sp>
-        <p:nvSpPr>
-          <p:cNvPr id="2" name="Rectangle 1"/>
-          <p:cNvSpPr/>
-          <p:nvPr/>
-        </p:nvSpPr>
-        <p:spPr>
-          <a:xfrm>
-            <a:off x="0" y="0"/>
-            <a:ext cx="12191695" cy="822960"/>
-          </a:xfrm>
-          <a:prstGeom prst="rect">
-            <a:avLst/>
-          </a:prstGeom>
-          <a:solidFill>
-            <a:srgbClr val="4E9AF5"/>
-          </a:solidFill>
-          <a:ln>
-            <a:noFill/>
-          </a:ln>
-        </p:spPr>
-        <p:style>
-          <a:lnRef idx="1">
-            <a:schemeClr val="accent1"/>
-          </a:lnRef>
-          <a:fillRef idx="3">
-            <a:schemeClr val="accent1"/>
-          </a:fillRef>
-          <a:effectRef idx="2">
-            <a:schemeClr val="accent1"/>
-          </a:effectRef>
-          <a:fontRef idx="minor">
-            <a:schemeClr val="lt1"/>
-          </a:fontRef>
-        </p:style>
-        <p:txBody>
-          <a:bodyPr rtlCol="0" anchor="ctr" lIns="457200" wrap="square"/>
+          <a:bodyPr wrap="square" lIns="457200" rtlCol="0" anchor="ctr"/>
           <a:lstStyle/>
           <a:p>
             <a:pPr algn="l">
@@ -11410,7 +11513,7 @@
           </a:fontRef>
         </p:style>
         <p:txBody>
-          <a:bodyPr rtlCol="0" anchor="ctr" wrap="square" lIns="137160" tIns="91440"/>
+          <a:bodyPr wrap="square" lIns="137160" tIns="91440" rtlCol="0" anchor="ctr"/>
           <a:lstStyle/>
           <a:p>
             <a:pPr algn="l">
@@ -11422,6 +11525,7 @@
               </a:defRPr>
             </a:pPr>
             <a:r>
+              <a:rPr dirty="0"/>
               <a:t>Q-Learning Node Selection</a:t>
             </a:r>
           </a:p>
@@ -11441,7 +11545,24 @@
               </a:defRPr>
             </a:pPr>
             <a:r>
-              <a:t>• Q-table maps (domain_id, snode_id) → Q-value</a:t>
+              <a:rPr dirty="0"/>
+              <a:t>• Q-table maps (</a:t>
+            </a:r>
+            <a:r>
+              <a:rPr dirty="0" err="1"/>
+              <a:t>domain_id</a:t>
+            </a:r>
+            <a:r>
+              <a:rPr dirty="0"/>
+              <a:t>, </a:t>
+            </a:r>
+            <a:r>
+              <a:rPr dirty="0" err="1"/>
+              <a:t>snode_id</a:t>
+            </a:r>
+            <a:r>
+              <a:rPr dirty="0"/>
+              <a:t>) → Q-value</a:t>
             </a:r>
           </a:p>
           <a:p>
@@ -11460,7 +11581,8 @@
               </a:defRPr>
             </a:pPr>
             <a:r>
-              <a:t>• </a:t>
+              <a:rPr dirty="0"/>
+              <a:t>• Initialization:</a:t>
             </a:r>
           </a:p>
           <a:p>
@@ -11479,7 +11601,48 @@
               </a:defRPr>
             </a:pPr>
             <a:r>
-              <a:t>• Initialization:</a:t>
+              <a:rPr dirty="0"/>
+              <a:t>•   Q(s) = </a:t>
+            </a:r>
+            <a:r>
+              <a:rPr dirty="0" err="1"/>
+              <a:t>C_cpu</a:t>
+            </a:r>
+            <a:r>
+              <a:rPr dirty="0"/>
+              <a:t>(</a:t>
+            </a:r>
+            <a:r>
+              <a:rPr dirty="0" err="1"/>
+              <a:t>nˢ</a:t>
+            </a:r>
+            <a:r>
+              <a:rPr dirty="0"/>
+              <a:t>) / (</a:t>
+            </a:r>
+            <a:r>
+              <a:rPr dirty="0" err="1"/>
+              <a:t>P_cpu</a:t>
+            </a:r>
+            <a:r>
+              <a:rPr dirty="0"/>
+              <a:t>(</a:t>
+            </a:r>
+            <a:r>
+              <a:rPr dirty="0" err="1"/>
+              <a:t>nˢ</a:t>
+            </a:r>
+            <a:r>
+              <a:rPr dirty="0"/>
+              <a:t>) + </a:t>
+            </a:r>
+            <a:r>
+              <a:rPr dirty="0" err="1"/>
+              <a:t>ε</a:t>
+            </a:r>
+            <a:r>
+              <a:rPr dirty="0"/>
+              <a:t>)</a:t>
             </a:r>
           </a:p>
           <a:p>
@@ -11498,7 +11661,16 @@
               </a:defRPr>
             </a:pPr>
             <a:r>
-              <a:t>•   Q(s) = C_cpu(nˢ) / (P_cpu(nˢ) + ε)</a:t>
+              <a:rPr dirty="0"/>
+              <a:t>• Action selection (</a:t>
+            </a:r>
+            <a:r>
+              <a:rPr dirty="0" err="1"/>
+              <a:t>ε</a:t>
+            </a:r>
+            <a:r>
+              <a:rPr dirty="0"/>
+              <a:t>-greedy):</a:t>
             </a:r>
           </a:p>
           <a:p>
@@ -11517,7 +11689,8 @@
               </a:defRPr>
             </a:pPr>
             <a:r>
-              <a:t>• </a:t>
+              <a:rPr dirty="0"/>
+              <a:t>•   90%: select argmax Q(s)  (exploit)</a:t>
             </a:r>
           </a:p>
           <a:p>
@@ -11536,7 +11709,8 @@
               </a:defRPr>
             </a:pPr>
             <a:r>
-              <a:t>• Action selection (ε-greedy):</a:t>
+              <a:rPr dirty="0"/>
+              <a:t>•   10%: select random  (explore)</a:t>
             </a:r>
           </a:p>
           <a:p>
@@ -11555,7 +11729,8 @@
               </a:defRPr>
             </a:pPr>
             <a:r>
-              <a:t>•   90%: select argmax Q(s)  (exploit)</a:t>
+              <a:rPr dirty="0"/>
+              <a:t>• Q-update after each VNR:</a:t>
             </a:r>
           </a:p>
           <a:p>
@@ -11574,63 +11749,7 @@
               </a:defRPr>
             </a:pPr>
             <a:r>
-              <a:t>•   10%: select random  (explore)</a:t>
-            </a:r>
-          </a:p>
-          <a:p>
-            <a:pPr>
-              <a:spcBef>
-                <a:spcPts val="400"/>
-              </a:spcBef>
-              <a:spcAft>
-                <a:spcPts val="200"/>
-              </a:spcAft>
-              <a:defRPr sz="1200" b="0">
-                <a:solidFill>
-                  <a:srgbClr val="F0F0F0"/>
-                </a:solidFill>
-                <a:latin typeface="Calibri"/>
-              </a:defRPr>
-            </a:pPr>
-            <a:r>
-              <a:t>• </a:t>
-            </a:r>
-          </a:p>
-          <a:p>
-            <a:pPr>
-              <a:spcBef>
-                <a:spcPts val="400"/>
-              </a:spcBef>
-              <a:spcAft>
-                <a:spcPts val="200"/>
-              </a:spcAft>
-              <a:defRPr sz="1200" b="0">
-                <a:solidFill>
-                  <a:srgbClr val="F0F0F0"/>
-                </a:solidFill>
-                <a:latin typeface="Calibri"/>
-              </a:defRPr>
-            </a:pPr>
-            <a:r>
-              <a:t>• Q-update after each VNR:</a:t>
-            </a:r>
-          </a:p>
-          <a:p>
-            <a:pPr>
-              <a:spcBef>
-                <a:spcPts val="400"/>
-              </a:spcBef>
-              <a:spcAft>
-                <a:spcPts val="200"/>
-              </a:spcAft>
-              <a:defRPr sz="1200" b="0">
-                <a:solidFill>
-                  <a:srgbClr val="F0F0F0"/>
-                </a:solidFill>
-                <a:latin typeface="Calibri"/>
-              </a:defRPr>
-            </a:pPr>
-            <a:r>
+              <a:rPr dirty="0"/>
               <a:t>•   Q(s) ← Q(s) + α·(reward - Q(s))</a:t>
             </a:r>
           </a:p>
@@ -11655,8 +11774,20 @@
                 <a:tableStyleId>{5C22544A-7EE6-4342-B048-85BDC9FD1C3A}</a:tableStyleId>
               </a:tblPr>
               <a:tblGrid>
-                <a:gridCol w="2743200"/>
-                <a:gridCol w="2286000"/>
+                <a:gridCol w="2743200">
+                  <a:extLst>
+                    <a:ext uri="{9D8B030D-6E8A-4147-A177-3AD203B41FA5}">
+                      <a16:colId xmlns:a16="http://schemas.microsoft.com/office/drawing/2014/main" val="20000"/>
+                    </a:ext>
+                  </a:extLst>
+                </a:gridCol>
+                <a:gridCol w="2286000">
+                  <a:extLst>
+                    <a:ext uri="{9D8B030D-6E8A-4147-A177-3AD203B41FA5}">
+                      <a16:colId xmlns:a16="http://schemas.microsoft.com/office/drawing/2014/main" val="20001"/>
+                    </a:ext>
+                  </a:extLst>
+                </a:gridCol>
               </a:tblGrid>
               <a:tr h="365760">
                 <a:tc>
@@ -11707,6 +11838,11 @@
                     </a:solidFill>
                   </a:tcPr>
                 </a:tc>
+                <a:extLst>
+                  <a:ext uri="{0D108BD9-81ED-4DB2-BD59-A6C34878D82A}">
+                    <a16:rowId xmlns:a16="http://schemas.microsoft.com/office/drawing/2014/main" val="10000"/>
+                  </a:ext>
+                </a:extLst>
               </a:tr>
               <a:tr h="365760">
                 <a:tc>
@@ -11757,6 +11893,11 @@
                     </a:solidFill>
                   </a:tcPr>
                 </a:tc>
+                <a:extLst>
+                  <a:ext uri="{0D108BD9-81ED-4DB2-BD59-A6C34878D82A}">
+                    <a16:rowId xmlns:a16="http://schemas.microsoft.com/office/drawing/2014/main" val="10001"/>
+                  </a:ext>
+                </a:extLst>
               </a:tr>
               <a:tr h="365760">
                 <a:tc>
@@ -11807,6 +11948,11 @@
                     </a:solidFill>
                   </a:tcPr>
                 </a:tc>
+                <a:extLst>
+                  <a:ext uri="{0D108BD9-81ED-4DB2-BD59-A6C34878D82A}">
+                    <a16:rowId xmlns:a16="http://schemas.microsoft.com/office/drawing/2014/main" val="10002"/>
+                  </a:ext>
+                </a:extLst>
               </a:tr>
               <a:tr h="365760">
                 <a:tc>
@@ -11857,6 +12003,11 @@
                     </a:solidFill>
                   </a:tcPr>
                 </a:tc>
+                <a:extLst>
+                  <a:ext uri="{0D108BD9-81ED-4DB2-BD59-A6C34878D82A}">
+                    <a16:rowId xmlns:a16="http://schemas.microsoft.com/office/drawing/2014/main" val="10003"/>
+                  </a:ext>
+                </a:extLst>
               </a:tr>
               <a:tr h="365760">
                 <a:tc>
@@ -11907,6 +12058,11 @@
                     </a:solidFill>
                   </a:tcPr>
                 </a:tc>
+                <a:extLst>
+                  <a:ext uri="{0D108BD9-81ED-4DB2-BD59-A6C34878D82A}">
+                    <a16:rowId xmlns:a16="http://schemas.microsoft.com/office/drawing/2014/main" val="10004"/>
+                  </a:ext>
+                </a:extLst>
               </a:tr>
             </a:tbl>
           </a:graphicData>
@@ -11950,7 +12106,7 @@
           </a:fontRef>
         </p:style>
         <p:txBody>
-          <a:bodyPr rtlCol="0" anchor="ctr" wrap="square" lIns="137160" tIns="91440"/>
+          <a:bodyPr wrap="square" lIns="137160" tIns="91440" rtlCol="0" anchor="ctr"/>
           <a:lstStyle/>
           <a:p>
             <a:pPr algn="l">
@@ -12043,7 +12199,7 @@
           </a:fontRef>
         </p:style>
         <p:txBody>
-          <a:bodyPr rtlCol="0" anchor="ctr" wrap="square" lIns="137160" tIns="91440"/>
+          <a:bodyPr wrap="square" lIns="137160" tIns="91440" rtlCol="0" anchor="ctr"/>
           <a:lstStyle/>
           <a:p>
             <a:pPr algn="l">
@@ -12106,8 +12262,8 @@
 </p:sld>
 </file>
 
-<file path=ppt/slides/slide22.xml><?xml version="1.0" encoding="utf-8"?>
-<p:sld xmlns:a="http://schemas.openxmlformats.org/drawingml/2006/main" xmlns:p="http://schemas.openxmlformats.org/presentationml/2006/main" xmlns:r="http://schemas.openxmlformats.org/officeDocument/2006/relationships">
+<file path=ppt/slides/slide21.xml><?xml version="1.0" encoding="utf-8"?>
+<p:sld xmlns:a="http://schemas.openxmlformats.org/drawingml/2006/main" xmlns:r="http://schemas.openxmlformats.org/officeDocument/2006/relationships" xmlns:p="http://schemas.openxmlformats.org/presentationml/2006/main">
   <p:cSld>
     <p:bg>
       <p:bgPr>
@@ -12123,7 +12279,14 @@
         <p:cNvGrpSpPr/>
         <p:nvPr/>
       </p:nvGrpSpPr>
-      <p:grpSpPr/>
+      <p:grpSpPr>
+        <a:xfrm>
+          <a:off x="0" y="0"/>
+          <a:ext cx="0" cy="0"/>
+          <a:chOff x="0" y="0"/>
+          <a:chExt cx="0" cy="0"/>
+        </a:xfrm>
+      </p:grpSpPr>
       <p:sp>
         <p:nvSpPr>
           <p:cNvPr id="2" name="Rectangle 1"/>
@@ -12160,7 +12323,7 @@
           </a:fontRef>
         </p:style>
         <p:txBody>
-          <a:bodyPr rtlCol="0" anchor="ctr" lIns="457200" wrap="square"/>
+          <a:bodyPr wrap="square" lIns="457200" rtlCol="0" anchor="ctr"/>
           <a:lstStyle/>
           <a:p>
             <a:pPr algn="l">
@@ -12251,7 +12414,7 @@
           </a:fontRef>
         </p:style>
         <p:txBody>
-          <a:bodyPr rtlCol="0" anchor="ctr" wrap="square" lIns="137160" tIns="91440"/>
+          <a:bodyPr wrap="square" lIns="137160" tIns="91440" rtlCol="0" anchor="ctr"/>
           <a:lstStyle/>
           <a:p>
             <a:pPr algn="l">
@@ -12354,7 +12517,7 @@
         </p:nvGraphicFramePr>
         <p:xfrm>
           <a:off x="4480560" y="1828800"/>
-          <a:ext cx="4114800" cy="2560320"/>
+          <a:ext cx="4114800" cy="2767584"/>
         </p:xfrm>
         <a:graphic>
           <a:graphicData uri="http://schemas.openxmlformats.org/drawingml/2006/table">
@@ -12363,9 +12526,27 @@
                 <a:tableStyleId>{5C22544A-7EE6-4342-B048-85BDC9FD1C3A}</a:tableStyleId>
               </a:tblPr>
               <a:tblGrid>
-                <a:gridCol w="1097280"/>
-                <a:gridCol w="1828800"/>
-                <a:gridCol w="1188720"/>
+                <a:gridCol w="1097280">
+                  <a:extLst>
+                    <a:ext uri="{9D8B030D-6E8A-4147-A177-3AD203B41FA5}">
+                      <a16:colId xmlns:a16="http://schemas.microsoft.com/office/drawing/2014/main" val="20000"/>
+                    </a:ext>
+                  </a:extLst>
+                </a:gridCol>
+                <a:gridCol w="1828800">
+                  <a:extLst>
+                    <a:ext uri="{9D8B030D-6E8A-4147-A177-3AD203B41FA5}">
+                      <a16:colId xmlns:a16="http://schemas.microsoft.com/office/drawing/2014/main" val="20001"/>
+                    </a:ext>
+                  </a:extLst>
+                </a:gridCol>
+                <a:gridCol w="1188720">
+                  <a:extLst>
+                    <a:ext uri="{9D8B030D-6E8A-4147-A177-3AD203B41FA5}">
+                      <a16:colId xmlns:a16="http://schemas.microsoft.com/office/drawing/2014/main" val="20002"/>
+                    </a:ext>
+                  </a:extLst>
+                </a:gridCol>
               </a:tblGrid>
               <a:tr h="365760">
                 <a:tc>
@@ -12440,6 +12621,11 @@
                     </a:solidFill>
                   </a:tcPr>
                 </a:tc>
+                <a:extLst>
+                  <a:ext uri="{0D108BD9-81ED-4DB2-BD59-A6C34878D82A}">
+                    <a16:rowId xmlns:a16="http://schemas.microsoft.com/office/drawing/2014/main" val="10000"/>
+                  </a:ext>
+                </a:extLst>
               </a:tr>
               <a:tr h="365760">
                 <a:tc>
@@ -12514,6 +12700,11 @@
                     </a:solidFill>
                   </a:tcPr>
                 </a:tc>
+                <a:extLst>
+                  <a:ext uri="{0D108BD9-81ED-4DB2-BD59-A6C34878D82A}">
+                    <a16:rowId xmlns:a16="http://schemas.microsoft.com/office/drawing/2014/main" val="10001"/>
+                  </a:ext>
+                </a:extLst>
               </a:tr>
               <a:tr h="365760">
                 <a:tc>
@@ -12588,6 +12779,11 @@
                     </a:solidFill>
                   </a:tcPr>
                 </a:tc>
+                <a:extLst>
+                  <a:ext uri="{0D108BD9-81ED-4DB2-BD59-A6C34878D82A}">
+                    <a16:rowId xmlns:a16="http://schemas.microsoft.com/office/drawing/2014/main" val="10002"/>
+                  </a:ext>
+                </a:extLst>
               </a:tr>
               <a:tr h="365760">
                 <a:tc>
@@ -12662,6 +12858,11 @@
                     </a:solidFill>
                   </a:tcPr>
                 </a:tc>
+                <a:extLst>
+                  <a:ext uri="{0D108BD9-81ED-4DB2-BD59-A6C34878D82A}">
+                    <a16:rowId xmlns:a16="http://schemas.microsoft.com/office/drawing/2014/main" val="10003"/>
+                  </a:ext>
+                </a:extLst>
               </a:tr>
               <a:tr h="365760">
                 <a:tc>
@@ -12736,6 +12937,11 @@
                     </a:solidFill>
                   </a:tcPr>
                 </a:tc>
+                <a:extLst>
+                  <a:ext uri="{0D108BD9-81ED-4DB2-BD59-A6C34878D82A}">
+                    <a16:rowId xmlns:a16="http://schemas.microsoft.com/office/drawing/2014/main" val="10004"/>
+                  </a:ext>
+                </a:extLst>
               </a:tr>
               <a:tr h="365760">
                 <a:tc>
@@ -12810,6 +13016,11 @@
                     </a:solidFill>
                   </a:tcPr>
                 </a:tc>
+                <a:extLst>
+                  <a:ext uri="{0D108BD9-81ED-4DB2-BD59-A6C34878D82A}">
+                    <a16:rowId xmlns:a16="http://schemas.microsoft.com/office/drawing/2014/main" val="10005"/>
+                  </a:ext>
+                </a:extLst>
               </a:tr>
               <a:tr h="365760">
                 <a:tc>
@@ -12850,6 +13061,7 @@
                         </a:defRPr>
                       </a:pPr>
                       <a:r>
+                        <a:rPr dirty="0"/>
                         <a:t>Constant term</a:t>
                       </a:r>
                     </a:p>
@@ -12874,6 +13086,7 @@
                         </a:defRPr>
                       </a:pPr>
                       <a:r>
+                        <a:rPr dirty="0"/>
                         <a:t>0.5</a:t>
                       </a:r>
                     </a:p>
@@ -12884,6 +13097,11 @@
                     </a:solidFill>
                   </a:tcPr>
                 </a:tc>
+                <a:extLst>
+                  <a:ext uri="{0D108BD9-81ED-4DB2-BD59-A6C34878D82A}">
+                    <a16:rowId xmlns:a16="http://schemas.microsoft.com/office/drawing/2014/main" val="10006"/>
+                  </a:ext>
+                </a:extLst>
               </a:tr>
             </a:tbl>
           </a:graphicData>
@@ -12927,7 +13145,7 @@
           </a:fontRef>
         </p:style>
         <p:txBody>
-          <a:bodyPr rtlCol="0" anchor="ctr" wrap="square" lIns="137160" tIns="91440"/>
+          <a:bodyPr wrap="square" lIns="137160" tIns="91440" rtlCol="0" anchor="ctr"/>
           <a:lstStyle/>
           <a:p>
             <a:pPr algn="l">
@@ -13134,7 +13352,7 @@
           </a:fontRef>
         </p:style>
         <p:txBody>
-          <a:bodyPr rtlCol="0" anchor="ctr" wrap="square" lIns="137160" tIns="91440"/>
+          <a:bodyPr wrap="square" lIns="137160" tIns="91440" rtlCol="0" anchor="ctr"/>
           <a:lstStyle/>
           <a:p>
             <a:pPr algn="l">
@@ -13246,7 +13464,7 @@
           </a:fontRef>
         </p:style>
         <p:txBody>
-          <a:bodyPr rtlCol="0" anchor="ctr" wrap="square" lIns="137160" tIns="91440"/>
+          <a:bodyPr wrap="square" lIns="137160" tIns="91440" rtlCol="0" anchor="ctr"/>
           <a:lstStyle/>
           <a:p>
             <a:pPr algn="l">
@@ -13328,8 +13546,8 @@
 </p:sld>
 </file>
 
-<file path=ppt/slides/slide23.xml><?xml version="1.0" encoding="utf-8"?>
-<p:sld xmlns:a="http://schemas.openxmlformats.org/drawingml/2006/main" xmlns:p="http://schemas.openxmlformats.org/presentationml/2006/main" xmlns:r="http://schemas.openxmlformats.org/officeDocument/2006/relationships">
+<file path=ppt/slides/slide22.xml><?xml version="1.0" encoding="utf-8"?>
+<p:sld xmlns:a="http://schemas.openxmlformats.org/drawingml/2006/main" xmlns:r="http://schemas.openxmlformats.org/officeDocument/2006/relationships" xmlns:p="http://schemas.openxmlformats.org/presentationml/2006/main">
   <p:cSld>
     <p:bg>
       <p:bgPr>
@@ -13345,7 +13563,14 @@
         <p:cNvGrpSpPr/>
         <p:nvPr/>
       </p:nvGrpSpPr>
-      <p:grpSpPr/>
+      <p:grpSpPr>
+        <a:xfrm>
+          <a:off x="0" y="0"/>
+          <a:ext cx="0" cy="0"/>
+          <a:chOff x="0" y="0"/>
+          <a:chExt cx="0" cy="0"/>
+        </a:xfrm>
+      </p:grpSpPr>
       <p:sp>
         <p:nvSpPr>
           <p:cNvPr id="2" name="Rectangle 1"/>
@@ -13382,7 +13607,7 @@
           </a:fontRef>
         </p:style>
         <p:txBody>
-          <a:bodyPr rtlCol="0" anchor="ctr" lIns="457200" wrap="square"/>
+          <a:bodyPr wrap="square" lIns="457200" rtlCol="0" anchor="ctr"/>
           <a:lstStyle/>
           <a:p>
             <a:pPr algn="l">
@@ -13467,8 +13692,8 @@
 </p:sld>
 </file>
 
-<file path=ppt/slides/slide24.xml><?xml version="1.0" encoding="utf-8"?>
-<p:sld xmlns:a="http://schemas.openxmlformats.org/drawingml/2006/main" xmlns:p="http://schemas.openxmlformats.org/presentationml/2006/main" xmlns:r="http://schemas.openxmlformats.org/officeDocument/2006/relationships">
+<file path=ppt/slides/slide23.xml><?xml version="1.0" encoding="utf-8"?>
+<p:sld xmlns:a="http://schemas.openxmlformats.org/drawingml/2006/main" xmlns:r="http://schemas.openxmlformats.org/officeDocument/2006/relationships" xmlns:p="http://schemas.openxmlformats.org/presentationml/2006/main">
   <p:cSld>
     <p:bg>
       <p:bgPr>
@@ -13484,7 +13709,14 @@
         <p:cNvGrpSpPr/>
         <p:nvPr/>
       </p:nvGrpSpPr>
-      <p:grpSpPr/>
+      <p:grpSpPr>
+        <a:xfrm>
+          <a:off x="0" y="0"/>
+          <a:ext cx="0" cy="0"/>
+          <a:chOff x="0" y="0"/>
+          <a:chExt cx="0" cy="0"/>
+        </a:xfrm>
+      </p:grpSpPr>
       <p:sp>
         <p:nvSpPr>
           <p:cNvPr id="2" name="Rectangle 1"/>
@@ -13521,7 +13753,7 @@
           </a:fontRef>
         </p:style>
         <p:txBody>
-          <a:bodyPr rtlCol="0" anchor="ctr" lIns="457200" wrap="square"/>
+          <a:bodyPr wrap="square" lIns="457200" rtlCol="0" anchor="ctr"/>
           <a:lstStyle/>
           <a:p>
             <a:pPr algn="l">
@@ -13612,7 +13844,7 @@
           </a:fontRef>
         </p:style>
         <p:txBody>
-          <a:bodyPr rtlCol="0" anchor="ctr" wrap="square" lIns="137160" tIns="91440"/>
+          <a:bodyPr wrap="square" lIns="137160" tIns="91440" rtlCol="0" anchor="ctr"/>
           <a:lstStyle/>
           <a:p>
             <a:pPr algn="l">
@@ -13710,7 +13942,7 @@
           </a:fontRef>
         </p:style>
         <p:txBody>
-          <a:bodyPr rtlCol="0" anchor="ctr" wrap="square" lIns="137160" tIns="91440"/>
+          <a:bodyPr wrap="square" lIns="137160" tIns="91440" rtlCol="0" anchor="ctr"/>
           <a:lstStyle/>
           <a:p>
             <a:pPr algn="l">
@@ -13822,7 +14054,7 @@
           </a:fontRef>
         </p:style>
         <p:txBody>
-          <a:bodyPr rtlCol="0" anchor="ctr" wrap="square" lIns="137160" tIns="91440"/>
+          <a:bodyPr wrap="square" lIns="137160" tIns="91440" rtlCol="0" anchor="ctr"/>
           <a:lstStyle/>
           <a:p>
             <a:pPr algn="l">
@@ -13904,8 +14136,8 @@
 </p:sld>
 </file>
 
-<file path=ppt/slides/slide25.xml><?xml version="1.0" encoding="utf-8"?>
-<p:sld xmlns:a="http://schemas.openxmlformats.org/drawingml/2006/main" xmlns:p="http://schemas.openxmlformats.org/presentationml/2006/main" xmlns:r="http://schemas.openxmlformats.org/officeDocument/2006/relationships">
+<file path=ppt/slides/slide24.xml><?xml version="1.0" encoding="utf-8"?>
+<p:sld xmlns:a="http://schemas.openxmlformats.org/drawingml/2006/main" xmlns:r="http://schemas.openxmlformats.org/officeDocument/2006/relationships" xmlns:p="http://schemas.openxmlformats.org/presentationml/2006/main">
   <p:cSld>
     <p:bg>
       <p:bgPr>
@@ -13921,7 +14153,14 @@
         <p:cNvGrpSpPr/>
         <p:nvPr/>
       </p:nvGrpSpPr>
-      <p:grpSpPr/>
+      <p:grpSpPr>
+        <a:xfrm>
+          <a:off x="0" y="0"/>
+          <a:ext cx="0" cy="0"/>
+          <a:chOff x="0" y="0"/>
+          <a:chExt cx="0" cy="0"/>
+        </a:xfrm>
+      </p:grpSpPr>
       <p:sp>
         <p:nvSpPr>
           <p:cNvPr id="2" name="Rectangle 1"/>
@@ -13958,7 +14197,7 @@
           </a:fontRef>
         </p:style>
         <p:txBody>
-          <a:bodyPr rtlCol="0" anchor="ctr" lIns="457200" wrap="square"/>
+          <a:bodyPr wrap="square" lIns="457200" rtlCol="0" anchor="ctr"/>
           <a:lstStyle/>
           <a:p>
             <a:pPr algn="l">
@@ -14066,8 +14305,20 @@
                 <a:tableStyleId>{5C22544A-7EE6-4342-B048-85BDC9FD1C3A}</a:tableStyleId>
               </a:tblPr>
               <a:tblGrid>
-                <a:gridCol w="2286000"/>
-                <a:gridCol w="2286000"/>
+                <a:gridCol w="2286000">
+                  <a:extLst>
+                    <a:ext uri="{9D8B030D-6E8A-4147-A177-3AD203B41FA5}">
+                      <a16:colId xmlns:a16="http://schemas.microsoft.com/office/drawing/2014/main" val="20000"/>
+                    </a:ext>
+                  </a:extLst>
+                </a:gridCol>
+                <a:gridCol w="2286000">
+                  <a:extLst>
+                    <a:ext uri="{9D8B030D-6E8A-4147-A177-3AD203B41FA5}">
+                      <a16:colId xmlns:a16="http://schemas.microsoft.com/office/drawing/2014/main" val="20001"/>
+                    </a:ext>
+                  </a:extLst>
+                </a:gridCol>
               </a:tblGrid>
               <a:tr h="381000">
                 <a:tc>
@@ -14118,6 +14369,11 @@
                     </a:solidFill>
                   </a:tcPr>
                 </a:tc>
+                <a:extLst>
+                  <a:ext uri="{0D108BD9-81ED-4DB2-BD59-A6C34878D82A}">
+                    <a16:rowId xmlns:a16="http://schemas.microsoft.com/office/drawing/2014/main" val="10000"/>
+                  </a:ext>
+                </a:extLst>
               </a:tr>
               <a:tr h="381000">
                 <a:tc>
@@ -14168,6 +14424,11 @@
                     </a:solidFill>
                   </a:tcPr>
                 </a:tc>
+                <a:extLst>
+                  <a:ext uri="{0D108BD9-81ED-4DB2-BD59-A6C34878D82A}">
+                    <a16:rowId xmlns:a16="http://schemas.microsoft.com/office/drawing/2014/main" val="10001"/>
+                  </a:ext>
+                </a:extLst>
               </a:tr>
               <a:tr h="381000">
                 <a:tc>
@@ -14218,6 +14479,11 @@
                     </a:solidFill>
                   </a:tcPr>
                 </a:tc>
+                <a:extLst>
+                  <a:ext uri="{0D108BD9-81ED-4DB2-BD59-A6C34878D82A}">
+                    <a16:rowId xmlns:a16="http://schemas.microsoft.com/office/drawing/2014/main" val="10002"/>
+                  </a:ext>
+                </a:extLst>
               </a:tr>
               <a:tr h="381000">
                 <a:tc>
@@ -14268,6 +14534,11 @@
                     </a:solidFill>
                   </a:tcPr>
                 </a:tc>
+                <a:extLst>
+                  <a:ext uri="{0D108BD9-81ED-4DB2-BD59-A6C34878D82A}">
+                    <a16:rowId xmlns:a16="http://schemas.microsoft.com/office/drawing/2014/main" val="10003"/>
+                  </a:ext>
+                </a:extLst>
               </a:tr>
               <a:tr h="381000">
                 <a:tc>
@@ -14318,6 +14589,11 @@
                     </a:solidFill>
                   </a:tcPr>
                 </a:tc>
+                <a:extLst>
+                  <a:ext uri="{0D108BD9-81ED-4DB2-BD59-A6C34878D82A}">
+                    <a16:rowId xmlns:a16="http://schemas.microsoft.com/office/drawing/2014/main" val="10004"/>
+                  </a:ext>
+                </a:extLst>
               </a:tr>
               <a:tr h="381000">
                 <a:tc>
@@ -14368,6 +14644,11 @@
                     </a:solidFill>
                   </a:tcPr>
                 </a:tc>
+                <a:extLst>
+                  <a:ext uri="{0D108BD9-81ED-4DB2-BD59-A6C34878D82A}">
+                    <a16:rowId xmlns:a16="http://schemas.microsoft.com/office/drawing/2014/main" val="10005"/>
+                  </a:ext>
+                </a:extLst>
               </a:tr>
             </a:tbl>
           </a:graphicData>
@@ -14416,9 +14697,27 @@
                 <a:tableStyleId>{5C22544A-7EE6-4342-B048-85BDC9FD1C3A}</a:tableStyleId>
               </a:tblPr>
               <a:tblGrid>
-                <a:gridCol w="3657600"/>
-                <a:gridCol w="3657600"/>
-                <a:gridCol w="3657600"/>
+                <a:gridCol w="3657600">
+                  <a:extLst>
+                    <a:ext uri="{9D8B030D-6E8A-4147-A177-3AD203B41FA5}">
+                      <a16:colId xmlns:a16="http://schemas.microsoft.com/office/drawing/2014/main" val="20000"/>
+                    </a:ext>
+                  </a:extLst>
+                </a:gridCol>
+                <a:gridCol w="3657600">
+                  <a:extLst>
+                    <a:ext uri="{9D8B030D-6E8A-4147-A177-3AD203B41FA5}">
+                      <a16:colId xmlns:a16="http://schemas.microsoft.com/office/drawing/2014/main" val="20001"/>
+                    </a:ext>
+                  </a:extLst>
+                </a:gridCol>
+                <a:gridCol w="3657600">
+                  <a:extLst>
+                    <a:ext uri="{9D8B030D-6E8A-4147-A177-3AD203B41FA5}">
+                      <a16:colId xmlns:a16="http://schemas.microsoft.com/office/drawing/2014/main" val="20002"/>
+                    </a:ext>
+                  </a:extLst>
+                </a:gridCol>
               </a:tblGrid>
               <a:tr h="411480">
                 <a:tc>
@@ -14434,6 +14733,7 @@
                           <a:latin typeface="Calibri"/>
                         </a:defRPr>
                       </a:pPr>
+                      <a:endParaRPr/>
                     </a:p>
                   </a:txBody>
                   <a:tcPr marL="73152" marR="73152" marT="36576" marB="36576">
@@ -14490,6 +14790,11 @@
                     </a:solidFill>
                   </a:tcPr>
                 </a:tc>
+                <a:extLst>
+                  <a:ext uri="{0D108BD9-81ED-4DB2-BD59-A6C34878D82A}">
+                    <a16:rowId xmlns:a16="http://schemas.microsoft.com/office/drawing/2014/main" val="10000"/>
+                  </a:ext>
+                </a:extLst>
               </a:tr>
               <a:tr h="411480">
                 <a:tc>
@@ -14564,6 +14869,11 @@
                     </a:solidFill>
                   </a:tcPr>
                 </a:tc>
+                <a:extLst>
+                  <a:ext uri="{0D108BD9-81ED-4DB2-BD59-A6C34878D82A}">
+                    <a16:rowId xmlns:a16="http://schemas.microsoft.com/office/drawing/2014/main" val="10001"/>
+                  </a:ext>
+                </a:extLst>
               </a:tr>
               <a:tr h="411480">
                 <a:tc>
@@ -14638,6 +14948,11 @@
                     </a:solidFill>
                   </a:tcPr>
                 </a:tc>
+                <a:extLst>
+                  <a:ext uri="{0D108BD9-81ED-4DB2-BD59-A6C34878D82A}">
+                    <a16:rowId xmlns:a16="http://schemas.microsoft.com/office/drawing/2014/main" val="10002"/>
+                  </a:ext>
+                </a:extLst>
               </a:tr>
               <a:tr h="411480">
                 <a:tc>
@@ -14712,6 +15027,11 @@
                     </a:solidFill>
                   </a:tcPr>
                 </a:tc>
+                <a:extLst>
+                  <a:ext uri="{0D108BD9-81ED-4DB2-BD59-A6C34878D82A}">
+                    <a16:rowId xmlns:a16="http://schemas.microsoft.com/office/drawing/2014/main" val="10003"/>
+                  </a:ext>
+                </a:extLst>
               </a:tr>
             </a:tbl>
           </a:graphicData>
@@ -14725,8 +15045,8 @@
 </p:sld>
 </file>
 
-<file path=ppt/slides/slide26.xml><?xml version="1.0" encoding="utf-8"?>
-<p:sld xmlns:a="http://schemas.openxmlformats.org/drawingml/2006/main" xmlns:p="http://schemas.openxmlformats.org/presentationml/2006/main" xmlns:r="http://schemas.openxmlformats.org/officeDocument/2006/relationships">
+<file path=ppt/slides/slide25.xml><?xml version="1.0" encoding="utf-8"?>
+<p:sld xmlns:a="http://schemas.openxmlformats.org/drawingml/2006/main" xmlns:r="http://schemas.openxmlformats.org/officeDocument/2006/relationships" xmlns:p="http://schemas.openxmlformats.org/presentationml/2006/main">
   <p:cSld>
     <p:bg>
       <p:bgPr>
@@ -14742,7 +15062,14 @@
         <p:cNvGrpSpPr/>
         <p:nvPr/>
       </p:nvGrpSpPr>
-      <p:grpSpPr/>
+      <p:grpSpPr>
+        <a:xfrm>
+          <a:off x="0" y="0"/>
+          <a:ext cx="0" cy="0"/>
+          <a:chOff x="0" y="0"/>
+          <a:chExt cx="0" cy="0"/>
+        </a:xfrm>
+      </p:grpSpPr>
       <p:sp>
         <p:nvSpPr>
           <p:cNvPr id="2" name="Rectangle 1"/>
@@ -14779,7 +15106,7 @@
           </a:fontRef>
         </p:style>
         <p:txBody>
-          <a:bodyPr rtlCol="0" anchor="ctr" lIns="457200" wrap="square"/>
+          <a:bodyPr wrap="square" lIns="457200" rtlCol="0" anchor="ctr"/>
           <a:lstStyle/>
           <a:p>
             <a:pPr algn="l">
@@ -14851,8 +15178,20 @@
                 <a:tableStyleId>{5C22544A-7EE6-4342-B048-85BDC9FD1C3A}</a:tableStyleId>
               </a:tblPr>
               <a:tblGrid>
-                <a:gridCol w="2743200"/>
-                <a:gridCol w="2286000"/>
+                <a:gridCol w="2743200">
+                  <a:extLst>
+                    <a:ext uri="{9D8B030D-6E8A-4147-A177-3AD203B41FA5}">
+                      <a16:colId xmlns:a16="http://schemas.microsoft.com/office/drawing/2014/main" val="20000"/>
+                    </a:ext>
+                  </a:extLst>
+                </a:gridCol>
+                <a:gridCol w="2286000">
+                  <a:extLst>
+                    <a:ext uri="{9D8B030D-6E8A-4147-A177-3AD203B41FA5}">
+                      <a16:colId xmlns:a16="http://schemas.microsoft.com/office/drawing/2014/main" val="20001"/>
+                    </a:ext>
+                  </a:extLst>
+                </a:gridCol>
               </a:tblGrid>
               <a:tr h="391885">
                 <a:tc>
@@ -14903,6 +15242,11 @@
                     </a:solidFill>
                   </a:tcPr>
                 </a:tc>
+                <a:extLst>
+                  <a:ext uri="{0D108BD9-81ED-4DB2-BD59-A6C34878D82A}">
+                    <a16:rowId xmlns:a16="http://schemas.microsoft.com/office/drawing/2014/main" val="10000"/>
+                  </a:ext>
+                </a:extLst>
               </a:tr>
               <a:tr h="391885">
                 <a:tc>
@@ -14953,6 +15297,11 @@
                     </a:solidFill>
                   </a:tcPr>
                 </a:tc>
+                <a:extLst>
+                  <a:ext uri="{0D108BD9-81ED-4DB2-BD59-A6C34878D82A}">
+                    <a16:rowId xmlns:a16="http://schemas.microsoft.com/office/drawing/2014/main" val="10001"/>
+                  </a:ext>
+                </a:extLst>
               </a:tr>
               <a:tr h="391885">
                 <a:tc>
@@ -15003,6 +15352,11 @@
                     </a:solidFill>
                   </a:tcPr>
                 </a:tc>
+                <a:extLst>
+                  <a:ext uri="{0D108BD9-81ED-4DB2-BD59-A6C34878D82A}">
+                    <a16:rowId xmlns:a16="http://schemas.microsoft.com/office/drawing/2014/main" val="10002"/>
+                  </a:ext>
+                </a:extLst>
               </a:tr>
               <a:tr h="391885">
                 <a:tc>
@@ -15053,6 +15407,11 @@
                     </a:solidFill>
                   </a:tcPr>
                 </a:tc>
+                <a:extLst>
+                  <a:ext uri="{0D108BD9-81ED-4DB2-BD59-A6C34878D82A}">
+                    <a16:rowId xmlns:a16="http://schemas.microsoft.com/office/drawing/2014/main" val="10003"/>
+                  </a:ext>
+                </a:extLst>
               </a:tr>
               <a:tr h="391885">
                 <a:tc>
@@ -15103,6 +15462,11 @@
                     </a:solidFill>
                   </a:tcPr>
                 </a:tc>
+                <a:extLst>
+                  <a:ext uri="{0D108BD9-81ED-4DB2-BD59-A6C34878D82A}">
+                    <a16:rowId xmlns:a16="http://schemas.microsoft.com/office/drawing/2014/main" val="10004"/>
+                  </a:ext>
+                </a:extLst>
               </a:tr>
               <a:tr h="391885">
                 <a:tc>
@@ -15153,6 +15517,11 @@
                     </a:solidFill>
                   </a:tcPr>
                 </a:tc>
+                <a:extLst>
+                  <a:ext uri="{0D108BD9-81ED-4DB2-BD59-A6C34878D82A}">
+                    <a16:rowId xmlns:a16="http://schemas.microsoft.com/office/drawing/2014/main" val="10005"/>
+                  </a:ext>
+                </a:extLst>
               </a:tr>
               <a:tr h="391890">
                 <a:tc>
@@ -15203,6 +15572,11 @@
                     </a:solidFill>
                   </a:tcPr>
                 </a:tc>
+                <a:extLst>
+                  <a:ext uri="{0D108BD9-81ED-4DB2-BD59-A6C34878D82A}">
+                    <a16:rowId xmlns:a16="http://schemas.microsoft.com/office/drawing/2014/main" val="10006"/>
+                  </a:ext>
+                </a:extLst>
               </a:tr>
             </a:tbl>
           </a:graphicData>
@@ -15227,9 +15601,27 @@
                 <a:tableStyleId>{5C22544A-7EE6-4342-B048-85BDC9FD1C3A}</a:tableStyleId>
               </a:tblPr>
               <a:tblGrid>
-                <a:gridCol w="2011680"/>
-                <a:gridCol w="1828800"/>
-                <a:gridCol w="1828800"/>
+                <a:gridCol w="2011680">
+                  <a:extLst>
+                    <a:ext uri="{9D8B030D-6E8A-4147-A177-3AD203B41FA5}">
+                      <a16:colId xmlns:a16="http://schemas.microsoft.com/office/drawing/2014/main" val="20000"/>
+                    </a:ext>
+                  </a:extLst>
+                </a:gridCol>
+                <a:gridCol w="1828800">
+                  <a:extLst>
+                    <a:ext uri="{9D8B030D-6E8A-4147-A177-3AD203B41FA5}">
+                      <a16:colId xmlns:a16="http://schemas.microsoft.com/office/drawing/2014/main" val="20001"/>
+                    </a:ext>
+                  </a:extLst>
+                </a:gridCol>
+                <a:gridCol w="1828800">
+                  <a:extLst>
+                    <a:ext uri="{9D8B030D-6E8A-4147-A177-3AD203B41FA5}">
+                      <a16:colId xmlns:a16="http://schemas.microsoft.com/office/drawing/2014/main" val="20002"/>
+                    </a:ext>
+                  </a:extLst>
+                </a:gridCol>
               </a:tblGrid>
               <a:tr h="391885">
                 <a:tc>
@@ -15304,6 +15696,11 @@
                     </a:solidFill>
                   </a:tcPr>
                 </a:tc>
+                <a:extLst>
+                  <a:ext uri="{0D108BD9-81ED-4DB2-BD59-A6C34878D82A}">
+                    <a16:rowId xmlns:a16="http://schemas.microsoft.com/office/drawing/2014/main" val="10000"/>
+                  </a:ext>
+                </a:extLst>
               </a:tr>
               <a:tr h="391885">
                 <a:tc>
@@ -15378,6 +15775,11 @@
                     </a:solidFill>
                   </a:tcPr>
                 </a:tc>
+                <a:extLst>
+                  <a:ext uri="{0D108BD9-81ED-4DB2-BD59-A6C34878D82A}">
+                    <a16:rowId xmlns:a16="http://schemas.microsoft.com/office/drawing/2014/main" val="10001"/>
+                  </a:ext>
+                </a:extLst>
               </a:tr>
               <a:tr h="391885">
                 <a:tc>
@@ -15452,6 +15854,11 @@
                     </a:solidFill>
                   </a:tcPr>
                 </a:tc>
+                <a:extLst>
+                  <a:ext uri="{0D108BD9-81ED-4DB2-BD59-A6C34878D82A}">
+                    <a16:rowId xmlns:a16="http://schemas.microsoft.com/office/drawing/2014/main" val="10002"/>
+                  </a:ext>
+                </a:extLst>
               </a:tr>
               <a:tr h="391885">
                 <a:tc>
@@ -15526,6 +15933,11 @@
                     </a:solidFill>
                   </a:tcPr>
                 </a:tc>
+                <a:extLst>
+                  <a:ext uri="{0D108BD9-81ED-4DB2-BD59-A6C34878D82A}">
+                    <a16:rowId xmlns:a16="http://schemas.microsoft.com/office/drawing/2014/main" val="10003"/>
+                  </a:ext>
+                </a:extLst>
               </a:tr>
               <a:tr h="391885">
                 <a:tc>
@@ -15600,6 +16012,11 @@
                     </a:solidFill>
                   </a:tcPr>
                 </a:tc>
+                <a:extLst>
+                  <a:ext uri="{0D108BD9-81ED-4DB2-BD59-A6C34878D82A}">
+                    <a16:rowId xmlns:a16="http://schemas.microsoft.com/office/drawing/2014/main" val="10004"/>
+                  </a:ext>
+                </a:extLst>
               </a:tr>
               <a:tr h="391885">
                 <a:tc>
@@ -15674,6 +16091,11 @@
                     </a:solidFill>
                   </a:tcPr>
                 </a:tc>
+                <a:extLst>
+                  <a:ext uri="{0D108BD9-81ED-4DB2-BD59-A6C34878D82A}">
+                    <a16:rowId xmlns:a16="http://schemas.microsoft.com/office/drawing/2014/main" val="10005"/>
+                  </a:ext>
+                </a:extLst>
               </a:tr>
               <a:tr h="391890">
                 <a:tc>
@@ -15748,6 +16170,11 @@
                     </a:solidFill>
                   </a:tcPr>
                 </a:tc>
+                <a:extLst>
+                  <a:ext uri="{0D108BD9-81ED-4DB2-BD59-A6C34878D82A}">
+                    <a16:rowId xmlns:a16="http://schemas.microsoft.com/office/drawing/2014/main" val="10006"/>
+                  </a:ext>
+                </a:extLst>
               </a:tr>
             </a:tbl>
           </a:graphicData>
@@ -15761,8 +16188,8 @@
 </p:sld>
 </file>
 
-<file path=ppt/slides/slide27.xml><?xml version="1.0" encoding="utf-8"?>
-<p:sld xmlns:a="http://schemas.openxmlformats.org/drawingml/2006/main" xmlns:p="http://schemas.openxmlformats.org/presentationml/2006/main" xmlns:r="http://schemas.openxmlformats.org/officeDocument/2006/relationships">
+<file path=ppt/slides/slide26.xml><?xml version="1.0" encoding="utf-8"?>
+<p:sld xmlns:a="http://schemas.openxmlformats.org/drawingml/2006/main" xmlns:r="http://schemas.openxmlformats.org/officeDocument/2006/relationships" xmlns:p="http://schemas.openxmlformats.org/presentationml/2006/main">
   <p:cSld>
     <p:bg>
       <p:bgPr>
@@ -15778,7 +16205,14 @@
         <p:cNvGrpSpPr/>
         <p:nvPr/>
       </p:nvGrpSpPr>
-      <p:grpSpPr/>
+      <p:grpSpPr>
+        <a:xfrm>
+          <a:off x="0" y="0"/>
+          <a:ext cx="0" cy="0"/>
+          <a:chOff x="0" y="0"/>
+          <a:chExt cx="0" cy="0"/>
+        </a:xfrm>
+      </p:grpSpPr>
       <p:sp>
         <p:nvSpPr>
           <p:cNvPr id="2" name="Rectangle 1"/>
@@ -15815,7 +16249,7 @@
           </a:fontRef>
         </p:style>
         <p:txBody>
-          <a:bodyPr rtlCol="0" anchor="ctr" lIns="457200" wrap="square"/>
+          <a:bodyPr wrap="square" lIns="457200" rtlCol="0" anchor="ctr"/>
           <a:lstStyle/>
           <a:p>
             <a:pPr algn="l">
@@ -15887,8 +16321,20 @@
                 <a:tableStyleId>{5C22544A-7EE6-4342-B048-85BDC9FD1C3A}</a:tableStyleId>
               </a:tblPr>
               <a:tblGrid>
-                <a:gridCol w="2743200"/>
-                <a:gridCol w="2286000"/>
+                <a:gridCol w="2743200">
+                  <a:extLst>
+                    <a:ext uri="{9D8B030D-6E8A-4147-A177-3AD203B41FA5}">
+                      <a16:colId xmlns:a16="http://schemas.microsoft.com/office/drawing/2014/main" val="20000"/>
+                    </a:ext>
+                  </a:extLst>
+                </a:gridCol>
+                <a:gridCol w="2286000">
+                  <a:extLst>
+                    <a:ext uri="{9D8B030D-6E8A-4147-A177-3AD203B41FA5}">
+                      <a16:colId xmlns:a16="http://schemas.microsoft.com/office/drawing/2014/main" val="20001"/>
+                    </a:ext>
+                  </a:extLst>
+                </a:gridCol>
               </a:tblGrid>
               <a:tr h="365760">
                 <a:tc>
@@ -15939,6 +16385,11 @@
                     </a:solidFill>
                   </a:tcPr>
                 </a:tc>
+                <a:extLst>
+                  <a:ext uri="{0D108BD9-81ED-4DB2-BD59-A6C34878D82A}">
+                    <a16:rowId xmlns:a16="http://schemas.microsoft.com/office/drawing/2014/main" val="10000"/>
+                  </a:ext>
+                </a:extLst>
               </a:tr>
               <a:tr h="365760">
                 <a:tc>
@@ -15989,6 +16440,11 @@
                     </a:solidFill>
                   </a:tcPr>
                 </a:tc>
+                <a:extLst>
+                  <a:ext uri="{0D108BD9-81ED-4DB2-BD59-A6C34878D82A}">
+                    <a16:rowId xmlns:a16="http://schemas.microsoft.com/office/drawing/2014/main" val="10001"/>
+                  </a:ext>
+                </a:extLst>
               </a:tr>
               <a:tr h="365760">
                 <a:tc>
@@ -16039,6 +16495,11 @@
                     </a:solidFill>
                   </a:tcPr>
                 </a:tc>
+                <a:extLst>
+                  <a:ext uri="{0D108BD9-81ED-4DB2-BD59-A6C34878D82A}">
+                    <a16:rowId xmlns:a16="http://schemas.microsoft.com/office/drawing/2014/main" val="10002"/>
+                  </a:ext>
+                </a:extLst>
               </a:tr>
               <a:tr h="365760">
                 <a:tc>
@@ -16089,6 +16550,11 @@
                     </a:solidFill>
                   </a:tcPr>
                 </a:tc>
+                <a:extLst>
+                  <a:ext uri="{0D108BD9-81ED-4DB2-BD59-A6C34878D82A}">
+                    <a16:rowId xmlns:a16="http://schemas.microsoft.com/office/drawing/2014/main" val="10003"/>
+                  </a:ext>
+                </a:extLst>
               </a:tr>
               <a:tr h="365760">
                 <a:tc>
@@ -16139,6 +16605,11 @@
                     </a:solidFill>
                   </a:tcPr>
                 </a:tc>
+                <a:extLst>
+                  <a:ext uri="{0D108BD9-81ED-4DB2-BD59-A6C34878D82A}">
+                    <a16:rowId xmlns:a16="http://schemas.microsoft.com/office/drawing/2014/main" val="10004"/>
+                  </a:ext>
+                </a:extLst>
               </a:tr>
               <a:tr h="365760">
                 <a:tc>
@@ -16189,6 +16660,11 @@
                     </a:solidFill>
                   </a:tcPr>
                 </a:tc>
+                <a:extLst>
+                  <a:ext uri="{0D108BD9-81ED-4DB2-BD59-A6C34878D82A}">
+                    <a16:rowId xmlns:a16="http://schemas.microsoft.com/office/drawing/2014/main" val="10005"/>
+                  </a:ext>
+                </a:extLst>
               </a:tr>
               <a:tr h="365760">
                 <a:tc>
@@ -16239,6 +16715,11 @@
                     </a:solidFill>
                   </a:tcPr>
                 </a:tc>
+                <a:extLst>
+                  <a:ext uri="{0D108BD9-81ED-4DB2-BD59-A6C34878D82A}">
+                    <a16:rowId xmlns:a16="http://schemas.microsoft.com/office/drawing/2014/main" val="10006"/>
+                  </a:ext>
+                </a:extLst>
               </a:tr>
             </a:tbl>
           </a:graphicData>
@@ -16282,7 +16763,7 @@
           </a:fontRef>
         </p:style>
         <p:txBody>
-          <a:bodyPr rtlCol="0" anchor="ctr" wrap="square" lIns="137160" tIns="91440"/>
+          <a:bodyPr wrap="square" lIns="137160" tIns="91440" rtlCol="0" anchor="ctr"/>
           <a:lstStyle/>
           <a:p>
             <a:pPr algn="l">
@@ -16394,8 +16875,20 @@
                 <a:tableStyleId>{5C22544A-7EE6-4342-B048-85BDC9FD1C3A}</a:tableStyleId>
               </a:tblPr>
               <a:tblGrid>
-                <a:gridCol w="1645920"/>
-                <a:gridCol w="4023360"/>
+                <a:gridCol w="1645920">
+                  <a:extLst>
+                    <a:ext uri="{9D8B030D-6E8A-4147-A177-3AD203B41FA5}">
+                      <a16:colId xmlns:a16="http://schemas.microsoft.com/office/drawing/2014/main" val="20000"/>
+                    </a:ext>
+                  </a:extLst>
+                </a:gridCol>
+                <a:gridCol w="4023360">
+                  <a:extLst>
+                    <a:ext uri="{9D8B030D-6E8A-4147-A177-3AD203B41FA5}">
+                      <a16:colId xmlns:a16="http://schemas.microsoft.com/office/drawing/2014/main" val="20001"/>
+                    </a:ext>
+                  </a:extLst>
+                </a:gridCol>
               </a:tblGrid>
               <a:tr h="365760">
                 <a:tc>
@@ -16446,6 +16939,11 @@
                     </a:solidFill>
                   </a:tcPr>
                 </a:tc>
+                <a:extLst>
+                  <a:ext uri="{0D108BD9-81ED-4DB2-BD59-A6C34878D82A}">
+                    <a16:rowId xmlns:a16="http://schemas.microsoft.com/office/drawing/2014/main" val="10000"/>
+                  </a:ext>
+                </a:extLst>
               </a:tr>
               <a:tr h="365760">
                 <a:tc>
@@ -16496,6 +16994,11 @@
                     </a:solidFill>
                   </a:tcPr>
                 </a:tc>
+                <a:extLst>
+                  <a:ext uri="{0D108BD9-81ED-4DB2-BD59-A6C34878D82A}">
+                    <a16:rowId xmlns:a16="http://schemas.microsoft.com/office/drawing/2014/main" val="10001"/>
+                  </a:ext>
+                </a:extLst>
               </a:tr>
               <a:tr h="365760">
                 <a:tc>
@@ -16546,6 +17049,11 @@
                     </a:solidFill>
                   </a:tcPr>
                 </a:tc>
+                <a:extLst>
+                  <a:ext uri="{0D108BD9-81ED-4DB2-BD59-A6C34878D82A}">
+                    <a16:rowId xmlns:a16="http://schemas.microsoft.com/office/drawing/2014/main" val="10002"/>
+                  </a:ext>
+                </a:extLst>
               </a:tr>
               <a:tr h="365760">
                 <a:tc>
@@ -16596,6 +17104,11 @@
                     </a:solidFill>
                   </a:tcPr>
                 </a:tc>
+                <a:extLst>
+                  <a:ext uri="{0D108BD9-81ED-4DB2-BD59-A6C34878D82A}">
+                    <a16:rowId xmlns:a16="http://schemas.microsoft.com/office/drawing/2014/main" val="10003"/>
+                  </a:ext>
+                </a:extLst>
               </a:tr>
               <a:tr h="365760">
                 <a:tc>
@@ -16646,6 +17159,11 @@
                     </a:solidFill>
                   </a:tcPr>
                 </a:tc>
+                <a:extLst>
+                  <a:ext uri="{0D108BD9-81ED-4DB2-BD59-A6C34878D82A}">
+                    <a16:rowId xmlns:a16="http://schemas.microsoft.com/office/drawing/2014/main" val="10004"/>
+                  </a:ext>
+                </a:extLst>
               </a:tr>
               <a:tr h="365760">
                 <a:tc>
@@ -16696,6 +17214,11 @@
                     </a:solidFill>
                   </a:tcPr>
                 </a:tc>
+                <a:extLst>
+                  <a:ext uri="{0D108BD9-81ED-4DB2-BD59-A6C34878D82A}">
+                    <a16:rowId xmlns:a16="http://schemas.microsoft.com/office/drawing/2014/main" val="10005"/>
+                  </a:ext>
+                </a:extLst>
               </a:tr>
               <a:tr h="365760">
                 <a:tc>
@@ -16746,6 +17269,11 @@
                     </a:solidFill>
                   </a:tcPr>
                 </a:tc>
+                <a:extLst>
+                  <a:ext uri="{0D108BD9-81ED-4DB2-BD59-A6C34878D82A}">
+                    <a16:rowId xmlns:a16="http://schemas.microsoft.com/office/drawing/2014/main" val="10006"/>
+                  </a:ext>
+                </a:extLst>
               </a:tr>
             </a:tbl>
           </a:graphicData>
@@ -16759,8 +17287,8 @@
 </p:sld>
 </file>
 
-<file path=ppt/slides/slide28.xml><?xml version="1.0" encoding="utf-8"?>
-<p:sld xmlns:a="http://schemas.openxmlformats.org/drawingml/2006/main" xmlns:p="http://schemas.openxmlformats.org/presentationml/2006/main" xmlns:r="http://schemas.openxmlformats.org/officeDocument/2006/relationships">
+<file path=ppt/slides/slide27.xml><?xml version="1.0" encoding="utf-8"?>
+<p:sld xmlns:a="http://schemas.openxmlformats.org/drawingml/2006/main" xmlns:r="http://schemas.openxmlformats.org/officeDocument/2006/relationships" xmlns:p="http://schemas.openxmlformats.org/presentationml/2006/main">
   <p:cSld>
     <p:bg>
       <p:bgPr>
@@ -16776,7 +17304,14 @@
         <p:cNvGrpSpPr/>
         <p:nvPr/>
       </p:nvGrpSpPr>
-      <p:grpSpPr/>
+      <p:grpSpPr>
+        <a:xfrm>
+          <a:off x="0" y="0"/>
+          <a:ext cx="0" cy="0"/>
+          <a:chOff x="0" y="0"/>
+          <a:chExt cx="0" cy="0"/>
+        </a:xfrm>
+      </p:grpSpPr>
       <p:sp>
         <p:nvSpPr>
           <p:cNvPr id="2" name="Rectangle 1"/>
@@ -16813,7 +17348,7 @@
           </a:fontRef>
         </p:style>
         <p:txBody>
-          <a:bodyPr rtlCol="0" anchor="ctr" lIns="457200" wrap="square"/>
+          <a:bodyPr wrap="square" lIns="457200" rtlCol="0" anchor="ctr"/>
           <a:lstStyle/>
           <a:p>
             <a:pPr algn="l">
@@ -16882,8 +17417,8 @@
         </p:blipFill>
         <p:spPr>
           <a:xfrm>
-            <a:off x="457200" y="1645920"/>
-            <a:ext cx="11247120" cy="6248400"/>
+            <a:off x="548640" y="822960"/>
+            <a:ext cx="10972801" cy="6096001"/>
           </a:xfrm>
           <a:prstGeom prst="rect">
             <a:avLst/>
@@ -16898,8 +17433,8 @@
 </p:sld>
 </file>
 
-<file path=ppt/slides/slide29.xml><?xml version="1.0" encoding="utf-8"?>
-<p:sld xmlns:a="http://schemas.openxmlformats.org/drawingml/2006/main" xmlns:p="http://schemas.openxmlformats.org/presentationml/2006/main" xmlns:r="http://schemas.openxmlformats.org/officeDocument/2006/relationships">
+<file path=ppt/slides/slide28.xml><?xml version="1.0" encoding="utf-8"?>
+<p:sld xmlns:a="http://schemas.openxmlformats.org/drawingml/2006/main" xmlns:r="http://schemas.openxmlformats.org/officeDocument/2006/relationships" xmlns:p="http://schemas.openxmlformats.org/presentationml/2006/main">
   <p:cSld>
     <p:bg>
       <p:bgPr>
@@ -16915,7 +17450,14 @@
         <p:cNvGrpSpPr/>
         <p:nvPr/>
       </p:nvGrpSpPr>
-      <p:grpSpPr/>
+      <p:grpSpPr>
+        <a:xfrm>
+          <a:off x="0" y="0"/>
+          <a:ext cx="0" cy="0"/>
+          <a:chOff x="0" y="0"/>
+          <a:chExt cx="0" cy="0"/>
+        </a:xfrm>
+      </p:grpSpPr>
       <p:sp>
         <p:nvSpPr>
           <p:cNvPr id="2" name="Rectangle 1"/>
@@ -16952,7 +17494,7 @@
           </a:fontRef>
         </p:style>
         <p:txBody>
-          <a:bodyPr rtlCol="0" anchor="ctr" lIns="457200" wrap="square"/>
+          <a:bodyPr wrap="square" lIns="457200" rtlCol="0" anchor="ctr"/>
           <a:lstStyle/>
           <a:p>
             <a:pPr algn="l">
@@ -17024,8 +17566,20 @@
                 <a:tableStyleId>{5C22544A-7EE6-4342-B048-85BDC9FD1C3A}</a:tableStyleId>
               </a:tblPr>
               <a:tblGrid>
-                <a:gridCol w="2743200"/>
-                <a:gridCol w="8229600"/>
+                <a:gridCol w="2743200">
+                  <a:extLst>
+                    <a:ext uri="{9D8B030D-6E8A-4147-A177-3AD203B41FA5}">
+                      <a16:colId xmlns:a16="http://schemas.microsoft.com/office/drawing/2014/main" val="20000"/>
+                    </a:ext>
+                  </a:extLst>
+                </a:gridCol>
+                <a:gridCol w="8229600">
+                  <a:extLst>
+                    <a:ext uri="{9D8B030D-6E8A-4147-A177-3AD203B41FA5}">
+                      <a16:colId xmlns:a16="http://schemas.microsoft.com/office/drawing/2014/main" val="20001"/>
+                    </a:ext>
+                  </a:extLst>
+                </a:gridCol>
               </a:tblGrid>
               <a:tr h="426720">
                 <a:tc>
@@ -17076,6 +17630,11 @@
                     </a:solidFill>
                   </a:tcPr>
                 </a:tc>
+                <a:extLst>
+                  <a:ext uri="{0D108BD9-81ED-4DB2-BD59-A6C34878D82A}">
+                    <a16:rowId xmlns:a16="http://schemas.microsoft.com/office/drawing/2014/main" val="10000"/>
+                  </a:ext>
+                </a:extLst>
               </a:tr>
               <a:tr h="426720">
                 <a:tc>
@@ -17126,6 +17685,11 @@
                     </a:solidFill>
                   </a:tcPr>
                 </a:tc>
+                <a:extLst>
+                  <a:ext uri="{0D108BD9-81ED-4DB2-BD59-A6C34878D82A}">
+                    <a16:rowId xmlns:a16="http://schemas.microsoft.com/office/drawing/2014/main" val="10001"/>
+                  </a:ext>
+                </a:extLst>
               </a:tr>
               <a:tr h="426720">
                 <a:tc>
@@ -17176,6 +17740,11 @@
                     </a:solidFill>
                   </a:tcPr>
                 </a:tc>
+                <a:extLst>
+                  <a:ext uri="{0D108BD9-81ED-4DB2-BD59-A6C34878D82A}">
+                    <a16:rowId xmlns:a16="http://schemas.microsoft.com/office/drawing/2014/main" val="10002"/>
+                  </a:ext>
+                </a:extLst>
               </a:tr>
               <a:tr h="426720">
                 <a:tc>
@@ -17226,6 +17795,11 @@
                     </a:solidFill>
                   </a:tcPr>
                 </a:tc>
+                <a:extLst>
+                  <a:ext uri="{0D108BD9-81ED-4DB2-BD59-A6C34878D82A}">
+                    <a16:rowId xmlns:a16="http://schemas.microsoft.com/office/drawing/2014/main" val="10003"/>
+                  </a:ext>
+                </a:extLst>
               </a:tr>
               <a:tr h="426720">
                 <a:tc>
@@ -17276,6 +17850,11 @@
                     </a:solidFill>
                   </a:tcPr>
                 </a:tc>
+                <a:extLst>
+                  <a:ext uri="{0D108BD9-81ED-4DB2-BD59-A6C34878D82A}">
+                    <a16:rowId xmlns:a16="http://schemas.microsoft.com/office/drawing/2014/main" val="10004"/>
+                  </a:ext>
+                </a:extLst>
               </a:tr>
               <a:tr h="426720">
                 <a:tc>
@@ -17326,6 +17905,11 @@
                     </a:solidFill>
                   </a:tcPr>
                 </a:tc>
+                <a:extLst>
+                  <a:ext uri="{0D108BD9-81ED-4DB2-BD59-A6C34878D82A}">
+                    <a16:rowId xmlns:a16="http://schemas.microsoft.com/office/drawing/2014/main" val="10005"/>
+                  </a:ext>
+                </a:extLst>
               </a:tr>
             </a:tbl>
           </a:graphicData>
@@ -17341,7 +17925,7 @@
         </p:nvGraphicFramePr>
         <p:xfrm>
           <a:off x="548640" y="4754880"/>
-          <a:ext cx="10972800" cy="1828800"/>
+          <a:ext cx="10972800" cy="1898904"/>
         </p:xfrm>
         <a:graphic>
           <a:graphicData uri="http://schemas.openxmlformats.org/drawingml/2006/table">
@@ -17350,11 +17934,41 @@
                 <a:tableStyleId>{5C22544A-7EE6-4342-B048-85BDC9FD1C3A}</a:tableStyleId>
               </a:tblPr>
               <a:tblGrid>
-                <a:gridCol w="2011680"/>
-                <a:gridCol w="2011680"/>
-                <a:gridCol w="2377440"/>
-                <a:gridCol w="2286000"/>
-                <a:gridCol w="2286000"/>
+                <a:gridCol w="2011680">
+                  <a:extLst>
+                    <a:ext uri="{9D8B030D-6E8A-4147-A177-3AD203B41FA5}">
+                      <a16:colId xmlns:a16="http://schemas.microsoft.com/office/drawing/2014/main" val="20000"/>
+                    </a:ext>
+                  </a:extLst>
+                </a:gridCol>
+                <a:gridCol w="2011680">
+                  <a:extLst>
+                    <a:ext uri="{9D8B030D-6E8A-4147-A177-3AD203B41FA5}">
+                      <a16:colId xmlns:a16="http://schemas.microsoft.com/office/drawing/2014/main" val="20001"/>
+                    </a:ext>
+                  </a:extLst>
+                </a:gridCol>
+                <a:gridCol w="2377440">
+                  <a:extLst>
+                    <a:ext uri="{9D8B030D-6E8A-4147-A177-3AD203B41FA5}">
+                      <a16:colId xmlns:a16="http://schemas.microsoft.com/office/drawing/2014/main" val="20002"/>
+                    </a:ext>
+                  </a:extLst>
+                </a:gridCol>
+                <a:gridCol w="2286000">
+                  <a:extLst>
+                    <a:ext uri="{9D8B030D-6E8A-4147-A177-3AD203B41FA5}">
+                      <a16:colId xmlns:a16="http://schemas.microsoft.com/office/drawing/2014/main" val="20003"/>
+                    </a:ext>
+                  </a:extLst>
+                </a:gridCol>
+                <a:gridCol w="2286000">
+                  <a:extLst>
+                    <a:ext uri="{9D8B030D-6E8A-4147-A177-3AD203B41FA5}">
+                      <a16:colId xmlns:a16="http://schemas.microsoft.com/office/drawing/2014/main" val="20004"/>
+                    </a:ext>
+                  </a:extLst>
+                </a:gridCol>
               </a:tblGrid>
               <a:tr h="261257">
                 <a:tc>
@@ -17477,6 +18091,11 @@
                     </a:solidFill>
                   </a:tcPr>
                 </a:tc>
+                <a:extLst>
+                  <a:ext uri="{0D108BD9-81ED-4DB2-BD59-A6C34878D82A}">
+                    <a16:rowId xmlns:a16="http://schemas.microsoft.com/office/drawing/2014/main" val="10000"/>
+                  </a:ext>
+                </a:extLst>
               </a:tr>
               <a:tr h="261257">
                 <a:tc>
@@ -17599,6 +18218,11 @@
                     </a:solidFill>
                   </a:tcPr>
                 </a:tc>
+                <a:extLst>
+                  <a:ext uri="{0D108BD9-81ED-4DB2-BD59-A6C34878D82A}">
+                    <a16:rowId xmlns:a16="http://schemas.microsoft.com/office/drawing/2014/main" val="10001"/>
+                  </a:ext>
+                </a:extLst>
               </a:tr>
               <a:tr h="261257">
                 <a:tc>
@@ -17721,6 +18345,11 @@
                     </a:solidFill>
                   </a:tcPr>
                 </a:tc>
+                <a:extLst>
+                  <a:ext uri="{0D108BD9-81ED-4DB2-BD59-A6C34878D82A}">
+                    <a16:rowId xmlns:a16="http://schemas.microsoft.com/office/drawing/2014/main" val="10002"/>
+                  </a:ext>
+                </a:extLst>
               </a:tr>
               <a:tr h="261257">
                 <a:tc>
@@ -17843,6 +18472,11 @@
                     </a:solidFill>
                   </a:tcPr>
                 </a:tc>
+                <a:extLst>
+                  <a:ext uri="{0D108BD9-81ED-4DB2-BD59-A6C34878D82A}">
+                    <a16:rowId xmlns:a16="http://schemas.microsoft.com/office/drawing/2014/main" val="10003"/>
+                  </a:ext>
+                </a:extLst>
               </a:tr>
               <a:tr h="261257">
                 <a:tc>
@@ -17965,6 +18599,11 @@
                     </a:solidFill>
                   </a:tcPr>
                 </a:tc>
+                <a:extLst>
+                  <a:ext uri="{0D108BD9-81ED-4DB2-BD59-A6C34878D82A}">
+                    <a16:rowId xmlns:a16="http://schemas.microsoft.com/office/drawing/2014/main" val="10004"/>
+                  </a:ext>
+                </a:extLst>
               </a:tr>
               <a:tr h="261257">
                 <a:tc>
@@ -18087,6 +18726,11 @@
                     </a:solidFill>
                   </a:tcPr>
                 </a:tc>
+                <a:extLst>
+                  <a:ext uri="{0D108BD9-81ED-4DB2-BD59-A6C34878D82A}">
+                    <a16:rowId xmlns:a16="http://schemas.microsoft.com/office/drawing/2014/main" val="10005"/>
+                  </a:ext>
+                </a:extLst>
               </a:tr>
               <a:tr h="261258">
                 <a:tc>
@@ -18209,6 +18853,11 @@
                     </a:solidFill>
                   </a:tcPr>
                 </a:tc>
+                <a:extLst>
+                  <a:ext uri="{0D108BD9-81ED-4DB2-BD59-A6C34878D82A}">
+                    <a16:rowId xmlns:a16="http://schemas.microsoft.com/office/drawing/2014/main" val="10006"/>
+                  </a:ext>
+                </a:extLst>
               </a:tr>
             </a:tbl>
           </a:graphicData>
@@ -18222,8 +18871,8 @@
 </p:sld>
 </file>
 
-<file path=ppt/slides/slide3.xml><?xml version="1.0" encoding="utf-8"?>
-<p:sld xmlns:a="http://schemas.openxmlformats.org/drawingml/2006/main" xmlns:p="http://schemas.openxmlformats.org/presentationml/2006/main" xmlns:r="http://schemas.openxmlformats.org/officeDocument/2006/relationships">
+<file path=ppt/slides/slide29.xml><?xml version="1.0" encoding="utf-8"?>
+<p:sld xmlns:a="http://schemas.openxmlformats.org/drawingml/2006/main" xmlns:r="http://schemas.openxmlformats.org/officeDocument/2006/relationships" xmlns:p="http://schemas.openxmlformats.org/presentationml/2006/main">
   <p:cSld>
     <p:bg>
       <p:bgPr>
@@ -18239,7 +18888,14 @@
         <p:cNvGrpSpPr/>
         <p:nvPr/>
       </p:nvGrpSpPr>
-      <p:grpSpPr/>
+      <p:grpSpPr>
+        <a:xfrm>
+          <a:off x="0" y="0"/>
+          <a:ext cx="0" cy="0"/>
+          <a:chOff x="0" y="0"/>
+          <a:chExt cx="0" cy="0"/>
+        </a:xfrm>
+      </p:grpSpPr>
       <p:sp>
         <p:nvSpPr>
           <p:cNvPr id="2" name="Rectangle 1"/>
@@ -18276,265 +18932,7 @@
           </a:fontRef>
         </p:style>
         <p:txBody>
-          <a:bodyPr rtlCol="0" anchor="ctr" lIns="457200" wrap="square"/>
-          <a:lstStyle/>
-          <a:p>
-            <a:pPr algn="l">
-              <a:defRPr sz="2800" b="1">
-                <a:solidFill>
-                  <a:srgbClr val="F0F0F0"/>
-                </a:solidFill>
-                <a:latin typeface="Calibri"/>
-              </a:defRPr>
-            </a:pPr>
-            <a:r>
-              <a:t>I. ABSTRACT</a:t>
-            </a:r>
-          </a:p>
-        </p:txBody>
-      </p:sp>
-      <p:sp>
-        <p:nvSpPr>
-          <p:cNvPr id="3" name="Rounded Rectangle 2"/>
-          <p:cNvSpPr/>
-          <p:nvPr/>
-        </p:nvSpPr>
-        <p:spPr>
-          <a:xfrm>
-            <a:off x="914400" y="1097280"/>
-            <a:ext cx="10332720" cy="5029200"/>
-          </a:xfrm>
-          <a:prstGeom prst="roundRect">
-            <a:avLst/>
-          </a:prstGeom>
-          <a:solidFill>
-            <a:srgbClr val="24243E"/>
-          </a:solidFill>
-          <a:ln w="25400">
-            <a:solidFill>
-              <a:srgbClr val="4E9AF5"/>
-            </a:solidFill>
-          </a:ln>
-        </p:spPr>
-        <p:style>
-          <a:lnRef idx="1">
-            <a:schemeClr val="accent1"/>
-          </a:lnRef>
-          <a:fillRef idx="3">
-            <a:schemeClr val="accent1"/>
-          </a:fillRef>
-          <a:effectRef idx="2">
-            <a:schemeClr val="accent1"/>
-          </a:effectRef>
-          <a:fontRef idx="minor">
-            <a:schemeClr val="lt1"/>
-          </a:fontRef>
-        </p:style>
-        <p:txBody>
-          <a:bodyPr rtlCol="0" anchor="ctr" wrap="square" lIns="365760" tIns="274320" rIns="365760"/>
-          <a:lstStyle/>
-          <a:p>
-            <a:pPr algn="l">
-              <a:defRPr sz="1800" b="0">
-                <a:solidFill>
-                  <a:srgbClr val="F0F0F0"/>
-                </a:solidFill>
-                <a:latin typeface="Calibri"/>
-              </a:defRPr>
-            </a:pPr>
-            <a:r>
-              <a:t>Network virtualization enables multiple virtual networks to coexist on shared physical infrastructure, but efficiently embedding virtual network requests onto substrate networks — the Virtual Network Embedding (VNE) problem — remains NP-hard, especially in multi-domain environments.</a:t>
-            </a:r>
-          </a:p>
-          <a:p>
-            <a:pPr algn="l">
-              <a:spcBef>
-                <a:spcPts val="600"/>
-              </a:spcBef>
-              <a:spcAft>
-                <a:spcPts val="200"/>
-              </a:spcAft>
-              <a:defRPr sz="1000" b="0">
-                <a:solidFill>
-                  <a:srgbClr val="F0F0F0"/>
-                </a:solidFill>
-                <a:latin typeface="Calibri"/>
-              </a:defRPr>
-            </a:pPr>
-          </a:p>
-          <a:p>
-            <a:pPr algn="l">
-              <a:spcBef>
-                <a:spcPts val="600"/>
-              </a:spcBef>
-              <a:spcAft>
-                <a:spcPts val="200"/>
-              </a:spcAft>
-              <a:defRPr sz="1800" b="0">
-                <a:solidFill>
-                  <a:srgbClr val="F0F0F0"/>
-                </a:solidFill>
-                <a:latin typeface="Calibri"/>
-              </a:defRPr>
-            </a:pPr>
-            <a:r>
-              <a:t>This work investigates and compares six VNE algorithms spanning three paradigms: heuristic (greedy), metaheuristic (Particle Swarm Optimization), and learning-based (Q-Learning, Deep Q-Networks, Swarm Reinforcement Learning). All algorithms operate within a unified centralized hierarchical multi-domain architecture.</a:t>
-            </a:r>
-          </a:p>
-          <a:p>
-            <a:pPr algn="l">
-              <a:spcBef>
-                <a:spcPts val="600"/>
-              </a:spcBef>
-              <a:spcAft>
-                <a:spcPts val="200"/>
-              </a:spcAft>
-              <a:defRPr sz="1000" b="0">
-                <a:solidFill>
-                  <a:srgbClr val="F0F0F0"/>
-                </a:solidFill>
-                <a:latin typeface="Calibri"/>
-              </a:defRPr>
-            </a:pPr>
-          </a:p>
-          <a:p>
-            <a:pPr algn="l">
-              <a:spcBef>
-                <a:spcPts val="600"/>
-              </a:spcBef>
-              <a:spcAft>
-                <a:spcPts val="200"/>
-              </a:spcAft>
-              <a:defRPr sz="1800" b="0">
-                <a:solidFill>
-                  <a:srgbClr val="F0F0F0"/>
-                </a:solidFill>
-                <a:latin typeface="Calibri"/>
-              </a:defRPr>
-            </a:pPr>
-            <a:r>
-              <a:t>Experiments on a multi-domain substrate network with 4 domains (120 nodes) show that hybrid approaches combining PSO with DQN-guided fitness and multi-path routing achieve the best trade-off between cost, delay, acceptance rate, and revenue-to-cost ratio. We contextualize our work against the Virne benchmark (ICLR 2026), which identifies generalization and scalability as key open challenges.</a:t>
-            </a:r>
-          </a:p>
-          <a:p>
-            <a:pPr algn="l">
-              <a:spcBef>
-                <a:spcPts val="600"/>
-              </a:spcBef>
-              <a:spcAft>
-                <a:spcPts val="200"/>
-              </a:spcAft>
-              <a:defRPr sz="800" b="0">
-                <a:solidFill>
-                  <a:srgbClr val="F0F0F0"/>
-                </a:solidFill>
-                <a:latin typeface="Calibri"/>
-              </a:defRPr>
-            </a:pPr>
-          </a:p>
-          <a:p>
-            <a:pPr algn="l">
-              <a:spcBef>
-                <a:spcPts val="600"/>
-              </a:spcBef>
-              <a:spcAft>
-                <a:spcPts val="200"/>
-              </a:spcAft>
-              <a:defRPr sz="1500" b="1">
-                <a:solidFill>
-                  <a:srgbClr val="56CCF2"/>
-                </a:solidFill>
-                <a:latin typeface="Calibri"/>
-              </a:defRPr>
-            </a:pPr>
-            <a:r>
-              <a:t>Keywords: </a:t>
-            </a:r>
-          </a:p>
-          <a:p>
-            <a:pPr algn="l">
-              <a:spcBef>
-                <a:spcPts val="600"/>
-              </a:spcBef>
-              <a:spcAft>
-                <a:spcPts val="200"/>
-              </a:spcAft>
-              <a:defRPr sz="1500" b="0">
-                <a:solidFill>
-                  <a:srgbClr val="48D1A5"/>
-                </a:solidFill>
-                <a:latin typeface="Calibri"/>
-              </a:defRPr>
-            </a:pPr>
-            <a:r>
-              <a:t>Virtual Network Embedding, Particle Swarm Optimization, Deep Q-Network, Swarm Intelligence, Multi-Domain, Multi-Path</a:t>
-            </a:r>
-          </a:p>
-        </p:txBody>
-      </p:sp>
-    </p:spTree>
-  </p:cSld>
-  <p:clrMapOvr>
-    <a:masterClrMapping/>
-  </p:clrMapOvr>
-</p:sld>
-</file>
-
-<file path=ppt/slides/slide30.xml><?xml version="1.0" encoding="utf-8"?>
-<p:sld xmlns:a="http://schemas.openxmlformats.org/drawingml/2006/main" xmlns:p="http://schemas.openxmlformats.org/presentationml/2006/main" xmlns:r="http://schemas.openxmlformats.org/officeDocument/2006/relationships">
-  <p:cSld>
-    <p:bg>
-      <p:bgPr>
-        <a:solidFill>
-          <a:srgbClr val="1B1B2F"/>
-        </a:solidFill>
-        <a:effectLst/>
-      </p:bgPr>
-    </p:bg>
-    <p:spTree>
-      <p:nvGrpSpPr>
-        <p:cNvPr id="1" name=""/>
-        <p:cNvGrpSpPr/>
-        <p:nvPr/>
-      </p:nvGrpSpPr>
-      <p:grpSpPr/>
-      <p:sp>
-        <p:nvSpPr>
-          <p:cNvPr id="2" name="Rectangle 1"/>
-          <p:cNvSpPr/>
-          <p:nvPr/>
-        </p:nvSpPr>
-        <p:spPr>
-          <a:xfrm>
-            <a:off x="0" y="0"/>
-            <a:ext cx="12191695" cy="822960"/>
-          </a:xfrm>
-          <a:prstGeom prst="rect">
-            <a:avLst/>
-          </a:prstGeom>
-          <a:solidFill>
-            <a:srgbClr val="4E9AF5"/>
-          </a:solidFill>
-          <a:ln>
-            <a:noFill/>
-          </a:ln>
-        </p:spPr>
-        <p:style>
-          <a:lnRef idx="1">
-            <a:schemeClr val="accent1"/>
-          </a:lnRef>
-          <a:fillRef idx="3">
-            <a:schemeClr val="accent1"/>
-          </a:fillRef>
-          <a:effectRef idx="2">
-            <a:schemeClr val="accent1"/>
-          </a:effectRef>
-          <a:fontRef idx="minor">
-            <a:schemeClr val="lt1"/>
-          </a:fontRef>
-        </p:style>
-        <p:txBody>
-          <a:bodyPr rtlCol="0" anchor="ctr" lIns="457200" wrap="square"/>
+          <a:bodyPr wrap="square" lIns="457200" rtlCol="0" anchor="ctr"/>
           <a:lstStyle/>
           <a:p>
             <a:pPr algn="l">
@@ -18606,10 +19004,34 @@
                 <a:tableStyleId>{5C22544A-7EE6-4342-B048-85BDC9FD1C3A}</a:tableStyleId>
               </a:tblPr>
               <a:tblGrid>
-                <a:gridCol w="3200400"/>
-                <a:gridCol w="2743200"/>
-                <a:gridCol w="2286000"/>
-                <a:gridCol w="2743200"/>
+                <a:gridCol w="3200400">
+                  <a:extLst>
+                    <a:ext uri="{9D8B030D-6E8A-4147-A177-3AD203B41FA5}">
+                      <a16:colId xmlns:a16="http://schemas.microsoft.com/office/drawing/2014/main" val="20000"/>
+                    </a:ext>
+                  </a:extLst>
+                </a:gridCol>
+                <a:gridCol w="2743200">
+                  <a:extLst>
+                    <a:ext uri="{9D8B030D-6E8A-4147-A177-3AD203B41FA5}">
+                      <a16:colId xmlns:a16="http://schemas.microsoft.com/office/drawing/2014/main" val="20001"/>
+                    </a:ext>
+                  </a:extLst>
+                </a:gridCol>
+                <a:gridCol w="2286000">
+                  <a:extLst>
+                    <a:ext uri="{9D8B030D-6E8A-4147-A177-3AD203B41FA5}">
+                      <a16:colId xmlns:a16="http://schemas.microsoft.com/office/drawing/2014/main" val="20002"/>
+                    </a:ext>
+                  </a:extLst>
+                </a:gridCol>
+                <a:gridCol w="2743200">
+                  <a:extLst>
+                    <a:ext uri="{9D8B030D-6E8A-4147-A177-3AD203B41FA5}">
+                      <a16:colId xmlns:a16="http://schemas.microsoft.com/office/drawing/2014/main" val="20003"/>
+                    </a:ext>
+                  </a:extLst>
+                </a:gridCol>
               </a:tblGrid>
               <a:tr h="457200">
                 <a:tc>
@@ -18708,6 +19130,11 @@
                     </a:solidFill>
                   </a:tcPr>
                 </a:tc>
+                <a:extLst>
+                  <a:ext uri="{0D108BD9-81ED-4DB2-BD59-A6C34878D82A}">
+                    <a16:rowId xmlns:a16="http://schemas.microsoft.com/office/drawing/2014/main" val="10000"/>
+                  </a:ext>
+                </a:extLst>
               </a:tr>
               <a:tr h="457200">
                 <a:tc>
@@ -18806,6 +19233,11 @@
                     </a:solidFill>
                   </a:tcPr>
                 </a:tc>
+                <a:extLst>
+                  <a:ext uri="{0D108BD9-81ED-4DB2-BD59-A6C34878D82A}">
+                    <a16:rowId xmlns:a16="http://schemas.microsoft.com/office/drawing/2014/main" val="10001"/>
+                  </a:ext>
+                </a:extLst>
               </a:tr>
               <a:tr h="457200">
                 <a:tc>
@@ -18904,6 +19336,11 @@
                     </a:solidFill>
                   </a:tcPr>
                 </a:tc>
+                <a:extLst>
+                  <a:ext uri="{0D108BD9-81ED-4DB2-BD59-A6C34878D82A}">
+                    <a16:rowId xmlns:a16="http://schemas.microsoft.com/office/drawing/2014/main" val="10002"/>
+                  </a:ext>
+                </a:extLst>
               </a:tr>
               <a:tr h="457200">
                 <a:tc>
@@ -19002,6 +19439,11 @@
                     </a:solidFill>
                   </a:tcPr>
                 </a:tc>
+                <a:extLst>
+                  <a:ext uri="{0D108BD9-81ED-4DB2-BD59-A6C34878D82A}">
+                    <a16:rowId xmlns:a16="http://schemas.microsoft.com/office/drawing/2014/main" val="10003"/>
+                  </a:ext>
+                </a:extLst>
               </a:tr>
               <a:tr h="457200">
                 <a:tc>
@@ -19100,6 +19542,11 @@
                     </a:solidFill>
                   </a:tcPr>
                 </a:tc>
+                <a:extLst>
+                  <a:ext uri="{0D108BD9-81ED-4DB2-BD59-A6C34878D82A}">
+                    <a16:rowId xmlns:a16="http://schemas.microsoft.com/office/drawing/2014/main" val="10004"/>
+                  </a:ext>
+                </a:extLst>
               </a:tr>
             </a:tbl>
           </a:graphicData>
@@ -19143,7 +19590,7 @@
           </a:fontRef>
         </p:style>
         <p:txBody>
-          <a:bodyPr rtlCol="0" anchor="ctr" wrap="square" lIns="137160" tIns="91440"/>
+          <a:bodyPr wrap="square" lIns="137160" tIns="91440" rtlCol="0" anchor="ctr"/>
           <a:lstStyle/>
           <a:p>
             <a:pPr algn="l">
@@ -19274,7 +19721,7 @@
           </a:fontRef>
         </p:style>
         <p:txBody>
-          <a:bodyPr rtlCol="0" anchor="ctr" wrap="square" lIns="137160" tIns="91440"/>
+          <a:bodyPr wrap="square" lIns="137160" tIns="91440" rtlCol="0" anchor="ctr"/>
           <a:lstStyle/>
           <a:p>
             <a:pPr algn="l">
@@ -19375,8 +19822,8 @@
 </p:sld>
 </file>
 
-<file path=ppt/slides/slide31.xml><?xml version="1.0" encoding="utf-8"?>
-<p:sld xmlns:a="http://schemas.openxmlformats.org/drawingml/2006/main" xmlns:p="http://schemas.openxmlformats.org/presentationml/2006/main" xmlns:r="http://schemas.openxmlformats.org/officeDocument/2006/relationships">
+<file path=ppt/slides/slide3.xml><?xml version="1.0" encoding="utf-8"?>
+<p:sld xmlns:a="http://schemas.openxmlformats.org/drawingml/2006/main" xmlns:r="http://schemas.openxmlformats.org/officeDocument/2006/relationships" xmlns:p="http://schemas.openxmlformats.org/presentationml/2006/main">
   <p:cSld>
     <p:bg>
       <p:bgPr>
@@ -19392,7 +19839,14 @@
         <p:cNvGrpSpPr/>
         <p:nvPr/>
       </p:nvGrpSpPr>
-      <p:grpSpPr/>
+      <p:grpSpPr>
+        <a:xfrm>
+          <a:off x="0" y="0"/>
+          <a:ext cx="0" cy="0"/>
+          <a:chOff x="0" y="0"/>
+          <a:chExt cx="0" cy="0"/>
+        </a:xfrm>
+      </p:grpSpPr>
       <p:sp>
         <p:nvSpPr>
           <p:cNvPr id="2" name="Rectangle 1"/>
@@ -19429,7 +19883,275 @@
           </a:fontRef>
         </p:style>
         <p:txBody>
-          <a:bodyPr rtlCol="0" anchor="ctr" lIns="457200" wrap="square"/>
+          <a:bodyPr wrap="square" lIns="457200" rtlCol="0" anchor="ctr"/>
+          <a:lstStyle/>
+          <a:p>
+            <a:pPr algn="l">
+              <a:defRPr sz="2800" b="1">
+                <a:solidFill>
+                  <a:srgbClr val="F0F0F0"/>
+                </a:solidFill>
+                <a:latin typeface="Calibri"/>
+              </a:defRPr>
+            </a:pPr>
+            <a:r>
+              <a:t>I. ABSTRACT</a:t>
+            </a:r>
+          </a:p>
+        </p:txBody>
+      </p:sp>
+      <p:sp>
+        <p:nvSpPr>
+          <p:cNvPr id="3" name="Rounded Rectangle 2"/>
+          <p:cNvSpPr/>
+          <p:nvPr/>
+        </p:nvSpPr>
+        <p:spPr>
+          <a:xfrm>
+            <a:off x="618978" y="1097279"/>
+            <a:ext cx="10628142" cy="5627077"/>
+          </a:xfrm>
+          <a:prstGeom prst="roundRect">
+            <a:avLst/>
+          </a:prstGeom>
+          <a:solidFill>
+            <a:srgbClr val="24243E"/>
+          </a:solidFill>
+          <a:ln w="25400">
+            <a:solidFill>
+              <a:srgbClr val="4E9AF5"/>
+            </a:solidFill>
+          </a:ln>
+        </p:spPr>
+        <p:style>
+          <a:lnRef idx="1">
+            <a:schemeClr val="accent1"/>
+          </a:lnRef>
+          <a:fillRef idx="3">
+            <a:schemeClr val="accent1"/>
+          </a:fillRef>
+          <a:effectRef idx="2">
+            <a:schemeClr val="accent1"/>
+          </a:effectRef>
+          <a:fontRef idx="minor">
+            <a:schemeClr val="lt1"/>
+          </a:fontRef>
+        </p:style>
+        <p:txBody>
+          <a:bodyPr wrap="square" lIns="365760" tIns="274320" rIns="365760" rtlCol="0" anchor="ctr"/>
+          <a:lstStyle/>
+          <a:p>
+            <a:pPr algn="l">
+              <a:defRPr sz="1800" b="0">
+                <a:solidFill>
+                  <a:srgbClr val="F0F0F0"/>
+                </a:solidFill>
+                <a:latin typeface="Calibri"/>
+              </a:defRPr>
+            </a:pPr>
+            <a:r>
+              <a:t>Network virtualization enables multiple virtual networks to coexist on shared physical infrastructure, but efficiently embedding virtual network requests onto substrate networks — the Virtual Network Embedding (VNE) problem — remains NP-hard, especially in multi-domain environments.</a:t>
+            </a:r>
+          </a:p>
+          <a:p>
+            <a:pPr algn="l">
+              <a:spcBef>
+                <a:spcPts val="600"/>
+              </a:spcBef>
+              <a:spcAft>
+                <a:spcPts val="200"/>
+              </a:spcAft>
+              <a:defRPr sz="1000" b="0">
+                <a:solidFill>
+                  <a:srgbClr val="F0F0F0"/>
+                </a:solidFill>
+                <a:latin typeface="Calibri"/>
+              </a:defRPr>
+            </a:pPr>
+            <a:endParaRPr/>
+          </a:p>
+          <a:p>
+            <a:pPr algn="l">
+              <a:spcBef>
+                <a:spcPts val="600"/>
+              </a:spcBef>
+              <a:spcAft>
+                <a:spcPts val="200"/>
+              </a:spcAft>
+              <a:defRPr sz="1800" b="0">
+                <a:solidFill>
+                  <a:srgbClr val="F0F0F0"/>
+                </a:solidFill>
+                <a:latin typeface="Calibri"/>
+              </a:defRPr>
+            </a:pPr>
+            <a:r>
+              <a:t>This work investigates and compares six VNE algorithms spanning three paradigms: heuristic (greedy), metaheuristic (Particle Swarm Optimization), and learning-based (Q-Learning, Deep Q-Networks, Swarm Reinforcement Learning). All algorithms operate within a unified centralized hierarchical multi-domain architecture.</a:t>
+            </a:r>
+          </a:p>
+          <a:p>
+            <a:pPr algn="l">
+              <a:spcBef>
+                <a:spcPts val="600"/>
+              </a:spcBef>
+              <a:spcAft>
+                <a:spcPts val="200"/>
+              </a:spcAft>
+              <a:defRPr sz="1000" b="0">
+                <a:solidFill>
+                  <a:srgbClr val="F0F0F0"/>
+                </a:solidFill>
+                <a:latin typeface="Calibri"/>
+              </a:defRPr>
+            </a:pPr>
+            <a:endParaRPr/>
+          </a:p>
+          <a:p>
+            <a:pPr algn="l">
+              <a:spcBef>
+                <a:spcPts val="600"/>
+              </a:spcBef>
+              <a:spcAft>
+                <a:spcPts val="200"/>
+              </a:spcAft>
+              <a:defRPr sz="1800" b="0">
+                <a:solidFill>
+                  <a:srgbClr val="F0F0F0"/>
+                </a:solidFill>
+                <a:latin typeface="Calibri"/>
+              </a:defRPr>
+            </a:pPr>
+            <a:r>
+              <a:t>Experiments on a multi-domain substrate network with 4 domains (120 nodes) show that hybrid approaches combining PSO with DQN-guided fitness and multi-path routing achieve the best trade-off between cost, delay, acceptance rate, and revenue-to-cost ratio. We contextualize our work against the Virne benchmark (ICLR 2026), which identifies generalization and scalability as key open challenges.</a:t>
+            </a:r>
+          </a:p>
+          <a:p>
+            <a:pPr algn="l">
+              <a:spcBef>
+                <a:spcPts val="600"/>
+              </a:spcBef>
+              <a:spcAft>
+                <a:spcPts val="200"/>
+              </a:spcAft>
+              <a:defRPr sz="800" b="0">
+                <a:solidFill>
+                  <a:srgbClr val="F0F0F0"/>
+                </a:solidFill>
+                <a:latin typeface="Calibri"/>
+              </a:defRPr>
+            </a:pPr>
+            <a:endParaRPr/>
+          </a:p>
+          <a:p>
+            <a:pPr algn="l">
+              <a:spcBef>
+                <a:spcPts val="600"/>
+              </a:spcBef>
+              <a:spcAft>
+                <a:spcPts val="200"/>
+              </a:spcAft>
+              <a:defRPr sz="1500" b="1">
+                <a:solidFill>
+                  <a:srgbClr val="56CCF2"/>
+                </a:solidFill>
+                <a:latin typeface="Calibri"/>
+              </a:defRPr>
+            </a:pPr>
+            <a:r>
+              <a:t>Keywords: </a:t>
+            </a:r>
+          </a:p>
+          <a:p>
+            <a:pPr algn="l">
+              <a:spcBef>
+                <a:spcPts val="600"/>
+              </a:spcBef>
+              <a:spcAft>
+                <a:spcPts val="200"/>
+              </a:spcAft>
+              <a:defRPr sz="1500" b="0">
+                <a:solidFill>
+                  <a:srgbClr val="48D1A5"/>
+                </a:solidFill>
+                <a:latin typeface="Calibri"/>
+              </a:defRPr>
+            </a:pPr>
+            <a:r>
+              <a:t>Virtual Network Embedding, Particle Swarm Optimization, Deep Q-Network, Swarm Intelligence, Multi-Domain, Multi-Path</a:t>
+            </a:r>
+          </a:p>
+        </p:txBody>
+      </p:sp>
+    </p:spTree>
+  </p:cSld>
+  <p:clrMapOvr>
+    <a:masterClrMapping/>
+  </p:clrMapOvr>
+</p:sld>
+</file>
+
+<file path=ppt/slides/slide30.xml><?xml version="1.0" encoding="utf-8"?>
+<p:sld xmlns:a="http://schemas.openxmlformats.org/drawingml/2006/main" xmlns:r="http://schemas.openxmlformats.org/officeDocument/2006/relationships" xmlns:p="http://schemas.openxmlformats.org/presentationml/2006/main">
+  <p:cSld>
+    <p:bg>
+      <p:bgPr>
+        <a:solidFill>
+          <a:srgbClr val="1B1B2F"/>
+        </a:solidFill>
+        <a:effectLst/>
+      </p:bgPr>
+    </p:bg>
+    <p:spTree>
+      <p:nvGrpSpPr>
+        <p:cNvPr id="1" name=""/>
+        <p:cNvGrpSpPr/>
+        <p:nvPr/>
+      </p:nvGrpSpPr>
+      <p:grpSpPr>
+        <a:xfrm>
+          <a:off x="0" y="0"/>
+          <a:ext cx="0" cy="0"/>
+          <a:chOff x="0" y="0"/>
+          <a:chExt cx="0" cy="0"/>
+        </a:xfrm>
+      </p:grpSpPr>
+      <p:sp>
+        <p:nvSpPr>
+          <p:cNvPr id="2" name="Rectangle 1"/>
+          <p:cNvSpPr/>
+          <p:nvPr/>
+        </p:nvSpPr>
+        <p:spPr>
+          <a:xfrm>
+            <a:off x="0" y="0"/>
+            <a:ext cx="12191695" cy="822960"/>
+          </a:xfrm>
+          <a:prstGeom prst="rect">
+            <a:avLst/>
+          </a:prstGeom>
+          <a:solidFill>
+            <a:srgbClr val="4E9AF5"/>
+          </a:solidFill>
+          <a:ln>
+            <a:noFill/>
+          </a:ln>
+        </p:spPr>
+        <p:style>
+          <a:lnRef idx="1">
+            <a:schemeClr val="accent1"/>
+          </a:lnRef>
+          <a:fillRef idx="3">
+            <a:schemeClr val="accent1"/>
+          </a:fillRef>
+          <a:effectRef idx="2">
+            <a:schemeClr val="accent1"/>
+          </a:effectRef>
+          <a:fontRef idx="minor">
+            <a:schemeClr val="lt1"/>
+          </a:fontRef>
+        </p:style>
+        <p:txBody>
+          <a:bodyPr wrap="square" lIns="457200" rtlCol="0" anchor="ctr"/>
           <a:lstStyle/>
           <a:p>
             <a:pPr algn="l">
@@ -19520,7 +20242,7 @@
           </a:fontRef>
         </p:style>
         <p:txBody>
-          <a:bodyPr rtlCol="0" anchor="ctr" wrap="square" lIns="137160" tIns="91440"/>
+          <a:bodyPr wrap="square" lIns="137160" tIns="91440" rtlCol="0" anchor="ctr"/>
           <a:lstStyle/>
           <a:p>
             <a:pPr algn="l">
@@ -19689,7 +20411,7 @@
           </a:fontRef>
         </p:style>
         <p:txBody>
-          <a:bodyPr rtlCol="0" anchor="ctr" wrap="square" lIns="137160" tIns="91440"/>
+          <a:bodyPr wrap="square" lIns="137160" tIns="91440" rtlCol="0" anchor="ctr"/>
           <a:lstStyle/>
           <a:p>
             <a:pPr algn="l">
@@ -19847,8 +20569,8 @@
 </p:sld>
 </file>
 
-<file path=ppt/slides/slide32.xml><?xml version="1.0" encoding="utf-8"?>
-<p:sld xmlns:a="http://schemas.openxmlformats.org/drawingml/2006/main" xmlns:p="http://schemas.openxmlformats.org/presentationml/2006/main" xmlns:r="http://schemas.openxmlformats.org/officeDocument/2006/relationships">
+<file path=ppt/slides/slide31.xml><?xml version="1.0" encoding="utf-8"?>
+<p:sld xmlns:a="http://schemas.openxmlformats.org/drawingml/2006/main" xmlns:r="http://schemas.openxmlformats.org/officeDocument/2006/relationships" xmlns:p="http://schemas.openxmlformats.org/presentationml/2006/main">
   <p:cSld>
     <p:bg>
       <p:bgPr>
@@ -19864,7 +20586,14 @@
         <p:cNvGrpSpPr/>
         <p:nvPr/>
       </p:nvGrpSpPr>
-      <p:grpSpPr/>
+      <p:grpSpPr>
+        <a:xfrm>
+          <a:off x="0" y="0"/>
+          <a:ext cx="0" cy="0"/>
+          <a:chOff x="0" y="0"/>
+          <a:chExt cx="0" cy="0"/>
+        </a:xfrm>
+      </p:grpSpPr>
       <p:sp>
         <p:nvSpPr>
           <p:cNvPr id="2" name="Rectangle 1"/>
@@ -19901,7 +20630,7 @@
           </a:fontRef>
         </p:style>
         <p:txBody>
-          <a:bodyPr rtlCol="0" anchor="ctr" lIns="457200" wrap="square"/>
+          <a:bodyPr wrap="square" lIns="457200" rtlCol="0" anchor="ctr"/>
           <a:lstStyle/>
           <a:p>
             <a:pPr algn="l">
@@ -19973,9 +20702,27 @@
                 <a:tableStyleId>{5C22544A-7EE6-4342-B048-85BDC9FD1C3A}</a:tableStyleId>
               </a:tblPr>
               <a:tblGrid>
-                <a:gridCol w="2926080"/>
-                <a:gridCol w="5303520"/>
-                <a:gridCol w="2743200"/>
+                <a:gridCol w="2926080">
+                  <a:extLst>
+                    <a:ext uri="{9D8B030D-6E8A-4147-A177-3AD203B41FA5}">
+                      <a16:colId xmlns:a16="http://schemas.microsoft.com/office/drawing/2014/main" val="20000"/>
+                    </a:ext>
+                  </a:extLst>
+                </a:gridCol>
+                <a:gridCol w="5303520">
+                  <a:extLst>
+                    <a:ext uri="{9D8B030D-6E8A-4147-A177-3AD203B41FA5}">
+                      <a16:colId xmlns:a16="http://schemas.microsoft.com/office/drawing/2014/main" val="20001"/>
+                    </a:ext>
+                  </a:extLst>
+                </a:gridCol>
+                <a:gridCol w="2743200">
+                  <a:extLst>
+                    <a:ext uri="{9D8B030D-6E8A-4147-A177-3AD203B41FA5}">
+                      <a16:colId xmlns:a16="http://schemas.microsoft.com/office/drawing/2014/main" val="20002"/>
+                    </a:ext>
+                  </a:extLst>
+                </a:gridCol>
               </a:tblGrid>
               <a:tr h="587828">
                 <a:tc>
@@ -20050,6 +20797,11 @@
                     </a:solidFill>
                   </a:tcPr>
                 </a:tc>
+                <a:extLst>
+                  <a:ext uri="{0D108BD9-81ED-4DB2-BD59-A6C34878D82A}">
+                    <a16:rowId xmlns:a16="http://schemas.microsoft.com/office/drawing/2014/main" val="10000"/>
+                  </a:ext>
+                </a:extLst>
               </a:tr>
               <a:tr h="587828">
                 <a:tc>
@@ -20124,6 +20876,11 @@
                     </a:solidFill>
                   </a:tcPr>
                 </a:tc>
+                <a:extLst>
+                  <a:ext uri="{0D108BD9-81ED-4DB2-BD59-A6C34878D82A}">
+                    <a16:rowId xmlns:a16="http://schemas.microsoft.com/office/drawing/2014/main" val="10001"/>
+                  </a:ext>
+                </a:extLst>
               </a:tr>
               <a:tr h="587828">
                 <a:tc>
@@ -20198,6 +20955,11 @@
                     </a:solidFill>
                   </a:tcPr>
                 </a:tc>
+                <a:extLst>
+                  <a:ext uri="{0D108BD9-81ED-4DB2-BD59-A6C34878D82A}">
+                    <a16:rowId xmlns:a16="http://schemas.microsoft.com/office/drawing/2014/main" val="10002"/>
+                  </a:ext>
+                </a:extLst>
               </a:tr>
               <a:tr h="587828">
                 <a:tc>
@@ -20272,6 +21034,11 @@
                     </a:solidFill>
                   </a:tcPr>
                 </a:tc>
+                <a:extLst>
+                  <a:ext uri="{0D108BD9-81ED-4DB2-BD59-A6C34878D82A}">
+                    <a16:rowId xmlns:a16="http://schemas.microsoft.com/office/drawing/2014/main" val="10003"/>
+                  </a:ext>
+                </a:extLst>
               </a:tr>
               <a:tr h="587828">
                 <a:tc>
@@ -20346,6 +21113,11 @@
                     </a:solidFill>
                   </a:tcPr>
                 </a:tc>
+                <a:extLst>
+                  <a:ext uri="{0D108BD9-81ED-4DB2-BD59-A6C34878D82A}">
+                    <a16:rowId xmlns:a16="http://schemas.microsoft.com/office/drawing/2014/main" val="10004"/>
+                  </a:ext>
+                </a:extLst>
               </a:tr>
               <a:tr h="587828">
                 <a:tc>
@@ -20420,6 +21192,11 @@
                     </a:solidFill>
                   </a:tcPr>
                 </a:tc>
+                <a:extLst>
+                  <a:ext uri="{0D108BD9-81ED-4DB2-BD59-A6C34878D82A}">
+                    <a16:rowId xmlns:a16="http://schemas.microsoft.com/office/drawing/2014/main" val="10005"/>
+                  </a:ext>
+                </a:extLst>
               </a:tr>
               <a:tr h="587832">
                 <a:tc>
@@ -20494,6 +21271,11 @@
                     </a:solidFill>
                   </a:tcPr>
                 </a:tc>
+                <a:extLst>
+                  <a:ext uri="{0D108BD9-81ED-4DB2-BD59-A6C34878D82A}">
+                    <a16:rowId xmlns:a16="http://schemas.microsoft.com/office/drawing/2014/main" val="10006"/>
+                  </a:ext>
+                </a:extLst>
               </a:tr>
             </a:tbl>
           </a:graphicData>
@@ -20507,8 +21289,8 @@
 </p:sld>
 </file>
 
-<file path=ppt/slides/slide33.xml><?xml version="1.0" encoding="utf-8"?>
-<p:sld xmlns:a="http://schemas.openxmlformats.org/drawingml/2006/main" xmlns:p="http://schemas.openxmlformats.org/presentationml/2006/main" xmlns:r="http://schemas.openxmlformats.org/officeDocument/2006/relationships">
+<file path=ppt/slides/slide32.xml><?xml version="1.0" encoding="utf-8"?>
+<p:sld xmlns:a="http://schemas.openxmlformats.org/drawingml/2006/main" xmlns:r="http://schemas.openxmlformats.org/officeDocument/2006/relationships" xmlns:p="http://schemas.openxmlformats.org/presentationml/2006/main">
   <p:cSld>
     <p:bg>
       <p:bgPr>
@@ -20524,7 +21306,14 @@
         <p:cNvGrpSpPr/>
         <p:nvPr/>
       </p:nvGrpSpPr>
-      <p:grpSpPr/>
+      <p:grpSpPr>
+        <a:xfrm>
+          <a:off x="0" y="0"/>
+          <a:ext cx="0" cy="0"/>
+          <a:chOff x="0" y="0"/>
+          <a:chExt cx="0" cy="0"/>
+        </a:xfrm>
+      </p:grpSpPr>
       <p:sp>
         <p:nvSpPr>
           <p:cNvPr id="2" name="Rectangle 1"/>
@@ -20561,7 +21350,7 @@
           </a:fontRef>
         </p:style>
         <p:txBody>
-          <a:bodyPr rtlCol="0" anchor="ctr" lIns="457200" wrap="square"/>
+          <a:bodyPr wrap="square" lIns="457200" rtlCol="0" anchor="ctr"/>
           <a:lstStyle/>
           <a:p>
             <a:pPr algn="l">
@@ -20627,6 +21416,7 @@
                 <a:latin typeface="Calibri"/>
               </a:defRPr>
             </a:pPr>
+            <a:endParaRPr/>
           </a:p>
           <a:p>
             <a:pPr algn="l">
@@ -20662,6 +21452,7 @@
                 <a:latin typeface="Calibri"/>
               </a:defRPr>
             </a:pPr>
+            <a:endParaRPr/>
           </a:p>
           <a:p>
             <a:pPr algn="l">
@@ -20697,6 +21488,7 @@
                 <a:latin typeface="Calibri"/>
               </a:defRPr>
             </a:pPr>
+            <a:endParaRPr/>
           </a:p>
           <a:p>
             <a:pPr algn="l">
@@ -20727,8 +21519,8 @@
 </p:sld>
 </file>
 
-<file path=ppt/slides/slide34.xml><?xml version="1.0" encoding="utf-8"?>
-<p:sld xmlns:a="http://schemas.openxmlformats.org/drawingml/2006/main" xmlns:p="http://schemas.openxmlformats.org/presentationml/2006/main" xmlns:r="http://schemas.openxmlformats.org/officeDocument/2006/relationships">
+<file path=ppt/slides/slide33.xml><?xml version="1.0" encoding="utf-8"?>
+<p:sld xmlns:a="http://schemas.openxmlformats.org/drawingml/2006/main" xmlns:r="http://schemas.openxmlformats.org/officeDocument/2006/relationships" xmlns:p="http://schemas.openxmlformats.org/presentationml/2006/main">
   <p:cSld>
     <p:bg>
       <p:bgPr>
@@ -20744,7 +21536,14 @@
         <p:cNvGrpSpPr/>
         <p:nvPr/>
       </p:nvGrpSpPr>
-      <p:grpSpPr/>
+      <p:grpSpPr>
+        <a:xfrm>
+          <a:off x="0" y="0"/>
+          <a:ext cx="0" cy="0"/>
+          <a:chOff x="0" y="0"/>
+          <a:chExt cx="0" cy="0"/>
+        </a:xfrm>
+      </p:grpSpPr>
       <p:sp>
         <p:nvSpPr>
           <p:cNvPr id="2" name="Rectangle 1"/>
@@ -20781,7 +21580,7 @@
           </a:fontRef>
         </p:style>
         <p:txBody>
-          <a:bodyPr rtlCol="0" anchor="ctr" lIns="457200" wrap="square"/>
+          <a:bodyPr wrap="square" lIns="457200" rtlCol="0" anchor="ctr"/>
           <a:lstStyle/>
           <a:p>
             <a:pPr algn="l">
@@ -20853,10 +21652,34 @@
                 <a:tableStyleId>{5C22544A-7EE6-4342-B048-85BDC9FD1C3A}</a:tableStyleId>
               </a:tblPr>
               <a:tblGrid>
-                <a:gridCol w="2743200"/>
-                <a:gridCol w="4114800"/>
-                <a:gridCol w="2286000"/>
-                <a:gridCol w="1828800"/>
+                <a:gridCol w="2743200">
+                  <a:extLst>
+                    <a:ext uri="{9D8B030D-6E8A-4147-A177-3AD203B41FA5}">
+                      <a16:colId xmlns:a16="http://schemas.microsoft.com/office/drawing/2014/main" val="20000"/>
+                    </a:ext>
+                  </a:extLst>
+                </a:gridCol>
+                <a:gridCol w="4114800">
+                  <a:extLst>
+                    <a:ext uri="{9D8B030D-6E8A-4147-A177-3AD203B41FA5}">
+                      <a16:colId xmlns:a16="http://schemas.microsoft.com/office/drawing/2014/main" val="20001"/>
+                    </a:ext>
+                  </a:extLst>
+                </a:gridCol>
+                <a:gridCol w="2286000">
+                  <a:extLst>
+                    <a:ext uri="{9D8B030D-6E8A-4147-A177-3AD203B41FA5}">
+                      <a16:colId xmlns:a16="http://schemas.microsoft.com/office/drawing/2014/main" val="20002"/>
+                    </a:ext>
+                  </a:extLst>
+                </a:gridCol>
+                <a:gridCol w="1828800">
+                  <a:extLst>
+                    <a:ext uri="{9D8B030D-6E8A-4147-A177-3AD203B41FA5}">
+                      <a16:colId xmlns:a16="http://schemas.microsoft.com/office/drawing/2014/main" val="20003"/>
+                    </a:ext>
+                  </a:extLst>
+                </a:gridCol>
               </a:tblGrid>
               <a:tr h="457200">
                 <a:tc>
@@ -20955,6 +21778,11 @@
                     </a:solidFill>
                   </a:tcPr>
                 </a:tc>
+                <a:extLst>
+                  <a:ext uri="{0D108BD9-81ED-4DB2-BD59-A6C34878D82A}">
+                    <a16:rowId xmlns:a16="http://schemas.microsoft.com/office/drawing/2014/main" val="10000"/>
+                  </a:ext>
+                </a:extLst>
               </a:tr>
               <a:tr h="457200">
                 <a:tc>
@@ -21053,6 +21881,11 @@
                     </a:solidFill>
                   </a:tcPr>
                 </a:tc>
+                <a:extLst>
+                  <a:ext uri="{0D108BD9-81ED-4DB2-BD59-A6C34878D82A}">
+                    <a16:rowId xmlns:a16="http://schemas.microsoft.com/office/drawing/2014/main" val="10001"/>
+                  </a:ext>
+                </a:extLst>
               </a:tr>
               <a:tr h="457200">
                 <a:tc>
@@ -21151,6 +21984,11 @@
                     </a:solidFill>
                   </a:tcPr>
                 </a:tc>
+                <a:extLst>
+                  <a:ext uri="{0D108BD9-81ED-4DB2-BD59-A6C34878D82A}">
+                    <a16:rowId xmlns:a16="http://schemas.microsoft.com/office/drawing/2014/main" val="10002"/>
+                  </a:ext>
+                </a:extLst>
               </a:tr>
               <a:tr h="457200">
                 <a:tc>
@@ -21249,6 +22087,11 @@
                     </a:solidFill>
                   </a:tcPr>
                 </a:tc>
+                <a:extLst>
+                  <a:ext uri="{0D108BD9-81ED-4DB2-BD59-A6C34878D82A}">
+                    <a16:rowId xmlns:a16="http://schemas.microsoft.com/office/drawing/2014/main" val="10003"/>
+                  </a:ext>
+                </a:extLst>
               </a:tr>
             </a:tbl>
           </a:graphicData>
@@ -21292,7 +22135,7 @@
           </a:fontRef>
         </p:style>
         <p:txBody>
-          <a:bodyPr rtlCol="0" anchor="ctr" wrap="square" lIns="137160" tIns="73152"/>
+          <a:bodyPr wrap="square" lIns="137160" tIns="73152" rtlCol="0" anchor="ctr"/>
           <a:lstStyle/>
           <a:p>
             <a:pPr algn="ctr">
@@ -21317,8 +22160,8 @@
 </p:sld>
 </file>
 
-<file path=ppt/slides/slide35.xml><?xml version="1.0" encoding="utf-8"?>
-<p:sld xmlns:a="http://schemas.openxmlformats.org/drawingml/2006/main" xmlns:p="http://schemas.openxmlformats.org/presentationml/2006/main" xmlns:r="http://schemas.openxmlformats.org/officeDocument/2006/relationships">
+<file path=ppt/slides/slide34.xml><?xml version="1.0" encoding="utf-8"?>
+<p:sld xmlns:a="http://schemas.openxmlformats.org/drawingml/2006/main" xmlns:r="http://schemas.openxmlformats.org/officeDocument/2006/relationships" xmlns:p="http://schemas.openxmlformats.org/presentationml/2006/main">
   <p:cSld>
     <p:bg>
       <p:bgPr>
@@ -21334,7 +22177,14 @@
         <p:cNvGrpSpPr/>
         <p:nvPr/>
       </p:nvGrpSpPr>
-      <p:grpSpPr/>
+      <p:grpSpPr>
+        <a:xfrm>
+          <a:off x="0" y="0"/>
+          <a:ext cx="0" cy="0"/>
+          <a:chOff x="0" y="0"/>
+          <a:chExt cx="0" cy="0"/>
+        </a:xfrm>
+      </p:grpSpPr>
       <p:sp>
         <p:nvSpPr>
           <p:cNvPr id="2" name="Rectangle 1"/>
@@ -21371,7 +22221,7 @@
           </a:fontRef>
         </p:style>
         <p:txBody>
-          <a:bodyPr rtlCol="0" anchor="ctr" lIns="457200" wrap="square"/>
+          <a:bodyPr wrap="square" lIns="457200" rtlCol="0" anchor="ctr"/>
           <a:lstStyle/>
           <a:p>
             <a:pPr algn="l">
@@ -21443,10 +22293,34 @@
                 <a:tableStyleId>{5C22544A-7EE6-4342-B048-85BDC9FD1C3A}</a:tableStyleId>
               </a:tblPr>
               <a:tblGrid>
-                <a:gridCol w="2743200"/>
-                <a:gridCol w="2286000"/>
-                <a:gridCol w="2514600"/>
-                <a:gridCol w="2514600"/>
+                <a:gridCol w="2743200">
+                  <a:extLst>
+                    <a:ext uri="{9D8B030D-6E8A-4147-A177-3AD203B41FA5}">
+                      <a16:colId xmlns:a16="http://schemas.microsoft.com/office/drawing/2014/main" val="20000"/>
+                    </a:ext>
+                  </a:extLst>
+                </a:gridCol>
+                <a:gridCol w="2286000">
+                  <a:extLst>
+                    <a:ext uri="{9D8B030D-6E8A-4147-A177-3AD203B41FA5}">
+                      <a16:colId xmlns:a16="http://schemas.microsoft.com/office/drawing/2014/main" val="20001"/>
+                    </a:ext>
+                  </a:extLst>
+                </a:gridCol>
+                <a:gridCol w="2514600">
+                  <a:extLst>
+                    <a:ext uri="{9D8B030D-6E8A-4147-A177-3AD203B41FA5}">
+                      <a16:colId xmlns:a16="http://schemas.microsoft.com/office/drawing/2014/main" val="20002"/>
+                    </a:ext>
+                  </a:extLst>
+                </a:gridCol>
+                <a:gridCol w="2514600">
+                  <a:extLst>
+                    <a:ext uri="{9D8B030D-6E8A-4147-A177-3AD203B41FA5}">
+                      <a16:colId xmlns:a16="http://schemas.microsoft.com/office/drawing/2014/main" val="20003"/>
+                    </a:ext>
+                  </a:extLst>
+                </a:gridCol>
               </a:tblGrid>
               <a:tr h="411480">
                 <a:tc>
@@ -21545,6 +22419,11 @@
                     </a:solidFill>
                   </a:tcPr>
                 </a:tc>
+                <a:extLst>
+                  <a:ext uri="{0D108BD9-81ED-4DB2-BD59-A6C34878D82A}">
+                    <a16:rowId xmlns:a16="http://schemas.microsoft.com/office/drawing/2014/main" val="10000"/>
+                  </a:ext>
+                </a:extLst>
               </a:tr>
               <a:tr h="411480">
                 <a:tc>
@@ -21643,6 +22522,11 @@
                     </a:solidFill>
                   </a:tcPr>
                 </a:tc>
+                <a:extLst>
+                  <a:ext uri="{0D108BD9-81ED-4DB2-BD59-A6C34878D82A}">
+                    <a16:rowId xmlns:a16="http://schemas.microsoft.com/office/drawing/2014/main" val="10001"/>
+                  </a:ext>
+                </a:extLst>
               </a:tr>
               <a:tr h="411480">
                 <a:tc>
@@ -21741,6 +22625,11 @@
                     </a:solidFill>
                   </a:tcPr>
                 </a:tc>
+                <a:extLst>
+                  <a:ext uri="{0D108BD9-81ED-4DB2-BD59-A6C34878D82A}">
+                    <a16:rowId xmlns:a16="http://schemas.microsoft.com/office/drawing/2014/main" val="10002"/>
+                  </a:ext>
+                </a:extLst>
               </a:tr>
               <a:tr h="411480">
                 <a:tc>
@@ -21805,6 +22694,7 @@
                         </a:defRPr>
                       </a:pPr>
                       <a:r>
+                        <a:rPr dirty="0"/>
                         <a:t>2000</a:t>
                       </a:r>
                     </a:p>
@@ -21839,6 +22729,11 @@
                     </a:solidFill>
                   </a:tcPr>
                 </a:tc>
+                <a:extLst>
+                  <a:ext uri="{0D108BD9-81ED-4DB2-BD59-A6C34878D82A}">
+                    <a16:rowId xmlns:a16="http://schemas.microsoft.com/office/drawing/2014/main" val="10003"/>
+                  </a:ext>
+                </a:extLst>
               </a:tr>
               <a:tr h="411480">
                 <a:tc>
@@ -21937,6 +22832,11 @@
                     </a:solidFill>
                   </a:tcPr>
                 </a:tc>
+                <a:extLst>
+                  <a:ext uri="{0D108BD9-81ED-4DB2-BD59-A6C34878D82A}">
+                    <a16:rowId xmlns:a16="http://schemas.microsoft.com/office/drawing/2014/main" val="10004"/>
+                  </a:ext>
+                </a:extLst>
               </a:tr>
               <a:tr h="411480">
                 <a:tc>
@@ -22035,6 +22935,11 @@
                     </a:solidFill>
                   </a:tcPr>
                 </a:tc>
+                <a:extLst>
+                  <a:ext uri="{0D108BD9-81ED-4DB2-BD59-A6C34878D82A}">
+                    <a16:rowId xmlns:a16="http://schemas.microsoft.com/office/drawing/2014/main" val="10005"/>
+                  </a:ext>
+                </a:extLst>
               </a:tr>
               <a:tr h="411480">
                 <a:tc>
@@ -22133,6 +23038,11 @@
                     </a:solidFill>
                   </a:tcPr>
                 </a:tc>
+                <a:extLst>
+                  <a:ext uri="{0D108BD9-81ED-4DB2-BD59-A6C34878D82A}">
+                    <a16:rowId xmlns:a16="http://schemas.microsoft.com/office/drawing/2014/main" val="10006"/>
+                  </a:ext>
+                </a:extLst>
               </a:tr>
               <a:tr h="411480">
                 <a:tc>
@@ -22231,6 +23141,11 @@
                     </a:solidFill>
                   </a:tcPr>
                 </a:tc>
+                <a:extLst>
+                  <a:ext uri="{0D108BD9-81ED-4DB2-BD59-A6C34878D82A}">
+                    <a16:rowId xmlns:a16="http://schemas.microsoft.com/office/drawing/2014/main" val="10007"/>
+                  </a:ext>
+                </a:extLst>
               </a:tr>
               <a:tr h="411480">
                 <a:tc>
@@ -22329,6 +23244,11 @@
                     </a:solidFill>
                   </a:tcPr>
                 </a:tc>
+                <a:extLst>
+                  <a:ext uri="{0D108BD9-81ED-4DB2-BD59-A6C34878D82A}">
+                    <a16:rowId xmlns:a16="http://schemas.microsoft.com/office/drawing/2014/main" val="10008"/>
+                  </a:ext>
+                </a:extLst>
               </a:tr>
               <a:tr h="411480">
                 <a:tc>
@@ -22417,6 +23337,7 @@
                         </a:defRPr>
                       </a:pPr>
                       <a:r>
+                        <a:rPr dirty="0"/>
                         <a:t>0.1</a:t>
                       </a:r>
                     </a:p>
@@ -22427,6 +23348,11 @@
                     </a:solidFill>
                   </a:tcPr>
                 </a:tc>
+                <a:extLst>
+                  <a:ext uri="{0D108BD9-81ED-4DB2-BD59-A6C34878D82A}">
+                    <a16:rowId xmlns:a16="http://schemas.microsoft.com/office/drawing/2014/main" val="10009"/>
+                  </a:ext>
+                </a:extLst>
               </a:tr>
             </a:tbl>
           </a:graphicData>
@@ -22440,8 +23366,8 @@
 </p:sld>
 </file>
 
-<file path=ppt/slides/slide36.xml><?xml version="1.0" encoding="utf-8"?>
-<p:sld xmlns:a="http://schemas.openxmlformats.org/drawingml/2006/main" xmlns:p="http://schemas.openxmlformats.org/presentationml/2006/main" xmlns:r="http://schemas.openxmlformats.org/officeDocument/2006/relationships">
+<file path=ppt/slides/slide35.xml><?xml version="1.0" encoding="utf-8"?>
+<p:sld xmlns:a="http://schemas.openxmlformats.org/drawingml/2006/main" xmlns:r="http://schemas.openxmlformats.org/officeDocument/2006/relationships" xmlns:p="http://schemas.openxmlformats.org/presentationml/2006/main">
   <p:cSld>
     <p:bg>
       <p:bgPr>
@@ -22457,7 +23383,14 @@
         <p:cNvGrpSpPr/>
         <p:nvPr/>
       </p:nvGrpSpPr>
-      <p:grpSpPr/>
+      <p:grpSpPr>
+        <a:xfrm>
+          <a:off x="0" y="0"/>
+          <a:ext cx="0" cy="0"/>
+          <a:chOff x="0" y="0"/>
+          <a:chExt cx="0" cy="0"/>
+        </a:xfrm>
+      </p:grpSpPr>
       <p:sp>
         <p:nvSpPr>
           <p:cNvPr id="2" name="Rectangle 1"/>
@@ -22498,6 +23431,7 @@
           <a:lstStyle/>
           <a:p>
             <a:pPr algn="ctr"/>
+            <a:endParaRPr/>
           </a:p>
         </p:txBody>
       </p:sp>
@@ -22613,6 +23547,7 @@
           <a:lstStyle/>
           <a:p>
             <a:pPr algn="ctr"/>
+            <a:endParaRPr/>
           </a:p>
         </p:txBody>
       </p:sp>
@@ -22625,7 +23560,7 @@
 </file>
 
 <file path=ppt/slides/slide4.xml><?xml version="1.0" encoding="utf-8"?>
-<p:sld xmlns:a="http://schemas.openxmlformats.org/drawingml/2006/main" xmlns:p="http://schemas.openxmlformats.org/presentationml/2006/main" xmlns:r="http://schemas.openxmlformats.org/officeDocument/2006/relationships">
+<p:sld xmlns:a="http://schemas.openxmlformats.org/drawingml/2006/main" xmlns:r="http://schemas.openxmlformats.org/officeDocument/2006/relationships" xmlns:p="http://schemas.openxmlformats.org/presentationml/2006/main">
   <p:cSld>
     <p:bg>
       <p:bgPr>
@@ -22641,7 +23576,14 @@
         <p:cNvGrpSpPr/>
         <p:nvPr/>
       </p:nvGrpSpPr>
-      <p:grpSpPr/>
+      <p:grpSpPr>
+        <a:xfrm>
+          <a:off x="0" y="0"/>
+          <a:ext cx="0" cy="0"/>
+          <a:chOff x="0" y="0"/>
+          <a:chExt cx="0" cy="0"/>
+        </a:xfrm>
+      </p:grpSpPr>
       <p:sp>
         <p:nvSpPr>
           <p:cNvPr id="2" name="Rectangle 1"/>
@@ -22678,7 +23620,7 @@
           </a:fontRef>
         </p:style>
         <p:txBody>
-          <a:bodyPr rtlCol="0" anchor="ctr" lIns="457200" wrap="square"/>
+          <a:bodyPr wrap="square" lIns="457200" rtlCol="0" anchor="ctr"/>
           <a:lstStyle/>
           <a:p>
             <a:pPr algn="l">
@@ -22799,8 +23741,8 @@
         </p:nvSpPr>
         <p:spPr>
           <a:xfrm>
-            <a:off x="6400800" y="1645920"/>
-            <a:ext cx="5303520" cy="1097280"/>
+            <a:off x="6836898" y="1486955"/>
+            <a:ext cx="4867422" cy="1327990"/>
           </a:xfrm>
           <a:prstGeom prst="roundRect">
             <a:avLst/>
@@ -22829,7 +23771,7 @@
           </a:fontRef>
         </p:style>
         <p:txBody>
-          <a:bodyPr rtlCol="0" anchor="ctr" wrap="square" lIns="137160" tIns="91440"/>
+          <a:bodyPr wrap="square" lIns="137160" tIns="91440" rtlCol="0" anchor="ctr"/>
           <a:lstStyle/>
           <a:p>
             <a:pPr algn="l">
@@ -22841,6 +23783,7 @@
               </a:defRPr>
             </a:pPr>
             <a:r>
+              <a:rPr dirty="0"/>
               <a:t>Applications</a:t>
             </a:r>
           </a:p>
@@ -22860,6 +23803,7 @@
               </a:defRPr>
             </a:pPr>
             <a:r>
+              <a:rPr dirty="0"/>
               <a:t>• Cloud computing: multi-tenant resource sharing</a:t>
             </a:r>
           </a:p>
@@ -22879,6 +23823,7 @@
               </a:defRPr>
             </a:pPr>
             <a:r>
+              <a:rPr dirty="0"/>
               <a:t>• 5G network slicing: dedicated VN per service</a:t>
             </a:r>
           </a:p>
@@ -22898,7 +23843,16 @@
               </a:defRPr>
             </a:pPr>
             <a:r>
-              <a:t>• Internet of Drones (IoD) in Industry 4.0</a:t>
+              <a:rPr dirty="0"/>
+              <a:t>• Internet of Drones (</a:t>
+            </a:r>
+            <a:r>
+              <a:rPr dirty="0" err="1"/>
+              <a:t>IoD</a:t>
+            </a:r>
+            <a:r>
+              <a:rPr dirty="0"/>
+              <a:t>) in Industry 4.0</a:t>
             </a:r>
           </a:p>
           <a:p>
@@ -22917,6 +23871,7 @@
               </a:defRPr>
             </a:pPr>
             <a:r>
+              <a:rPr dirty="0"/>
               <a:t>• Edge computing for latency-sensitive services</a:t>
             </a:r>
           </a:p>
@@ -22930,8 +23885,8 @@
         </p:nvSpPr>
         <p:spPr>
           <a:xfrm>
-            <a:off x="6400800" y="3017520"/>
-            <a:ext cx="5303520" cy="1097280"/>
+            <a:off x="6836898" y="3017520"/>
+            <a:ext cx="4867422" cy="1327990"/>
           </a:xfrm>
           <a:prstGeom prst="roundRect">
             <a:avLst/>
@@ -22960,7 +23915,7 @@
           </a:fontRef>
         </p:style>
         <p:txBody>
-          <a:bodyPr rtlCol="0" anchor="ctr" wrap="square" lIns="137160" tIns="91440"/>
+          <a:bodyPr wrap="square" lIns="137160" tIns="91440" rtlCol="0" anchor="ctr"/>
           <a:lstStyle/>
           <a:p>
             <a:pPr algn="l">
@@ -23042,8 +23997,8 @@
         </p:nvSpPr>
         <p:spPr>
           <a:xfrm>
-            <a:off x="6400800" y="4389120"/>
-            <a:ext cx="5303520" cy="1371600"/>
+            <a:off x="6836898" y="4541051"/>
+            <a:ext cx="4867422" cy="1659988"/>
           </a:xfrm>
           <a:prstGeom prst="roundRect">
             <a:avLst/>
@@ -23072,7 +24027,7 @@
           </a:fontRef>
         </p:style>
         <p:txBody>
-          <a:bodyPr rtlCol="0" anchor="ctr" wrap="square" lIns="137160" tIns="91440"/>
+          <a:bodyPr wrap="square" lIns="137160" tIns="91440" rtlCol="0" anchor="ctr"/>
           <a:lstStyle/>
           <a:p>
             <a:pPr algn="l">
@@ -23084,6 +24039,7 @@
               </a:defRPr>
             </a:pPr>
             <a:r>
+              <a:rPr dirty="0"/>
               <a:t>Key Challenges in Multi-Domain</a:t>
             </a:r>
           </a:p>
@@ -23103,6 +24059,7 @@
               </a:defRPr>
             </a:pPr>
             <a:r>
+              <a:rPr dirty="0"/>
               <a:t>• Combinatorial explosion: O(|Np|^|Nv|) possible mappings</a:t>
             </a:r>
           </a:p>
@@ -23122,6 +24079,7 @@
               </a:defRPr>
             </a:pPr>
             <a:r>
+              <a:rPr dirty="0"/>
               <a:t>• Coupled decisions: node placement affects link routing</a:t>
             </a:r>
           </a:p>
@@ -23141,6 +24099,7 @@
               </a:defRPr>
             </a:pPr>
             <a:r>
+              <a:rPr dirty="0"/>
               <a:t>• Cross-domain routing via boundary nodes</a:t>
             </a:r>
           </a:p>
@@ -23160,6 +24119,7 @@
               </a:defRPr>
             </a:pPr>
             <a:r>
+              <a:rPr dirty="0"/>
               <a:t>• Dynamic arrivals: online problem with resource fragmentation</a:t>
             </a:r>
           </a:p>
@@ -23174,7 +24134,7 @@
 </file>
 
 <file path=ppt/slides/slide5.xml><?xml version="1.0" encoding="utf-8"?>
-<p:sld xmlns:a="http://schemas.openxmlformats.org/drawingml/2006/main" xmlns:p="http://schemas.openxmlformats.org/presentationml/2006/main" xmlns:r="http://schemas.openxmlformats.org/officeDocument/2006/relationships">
+<p:sld xmlns:a="http://schemas.openxmlformats.org/drawingml/2006/main" xmlns:r="http://schemas.openxmlformats.org/officeDocument/2006/relationships" xmlns:p="http://schemas.openxmlformats.org/presentationml/2006/main">
   <p:cSld>
     <p:bg>
       <p:bgPr>
@@ -23190,7 +24150,14 @@
         <p:cNvGrpSpPr/>
         <p:nvPr/>
       </p:nvGrpSpPr>
-      <p:grpSpPr/>
+      <p:grpSpPr>
+        <a:xfrm>
+          <a:off x="0" y="0"/>
+          <a:ext cx="0" cy="0"/>
+          <a:chOff x="0" y="0"/>
+          <a:chExt cx="0" cy="0"/>
+        </a:xfrm>
+      </p:grpSpPr>
       <p:sp>
         <p:nvSpPr>
           <p:cNvPr id="2" name="Rectangle 1"/>
@@ -23227,7 +24194,7 @@
           </a:fontRef>
         </p:style>
         <p:txBody>
-          <a:bodyPr rtlCol="0" anchor="ctr" lIns="457200" wrap="square"/>
+          <a:bodyPr wrap="square" lIns="457200" rtlCol="0" anchor="ctr"/>
           <a:lstStyle/>
           <a:p>
             <a:pPr algn="l">
@@ -23354,7 +24321,7 @@
           </a:fontRef>
         </p:style>
         <p:txBody>
-          <a:bodyPr rtlCol="0" anchor="ctr" wrap="square" lIns="137160" tIns="91440"/>
+          <a:bodyPr wrap="square" lIns="137160" tIns="91440" rtlCol="0" anchor="ctr"/>
           <a:lstStyle/>
           <a:p>
             <a:pPr algn="l">
@@ -23485,7 +24452,7 @@
           </a:fontRef>
         </p:style>
         <p:txBody>
-          <a:bodyPr rtlCol="0" anchor="ctr" wrap="square" lIns="137160" tIns="91440"/>
+          <a:bodyPr wrap="square" lIns="137160" tIns="91440" rtlCol="0" anchor="ctr"/>
           <a:lstStyle/>
           <a:p>
             <a:pPr algn="l">
@@ -23616,7 +24583,7 @@
           </a:fontRef>
         </p:style>
         <p:txBody>
-          <a:bodyPr rtlCol="0" anchor="ctr" wrap="square" lIns="137160" tIns="91440"/>
+          <a:bodyPr wrap="square" lIns="137160" tIns="91440" rtlCol="0" anchor="ctr"/>
           <a:lstStyle/>
           <a:p>
             <a:pPr algn="l">
@@ -23747,7 +24714,7 @@
           </a:fontRef>
         </p:style>
         <p:txBody>
-          <a:bodyPr rtlCol="0" anchor="ctr" wrap="square" lIns="274320"/>
+          <a:bodyPr wrap="square" lIns="274320" rtlCol="0" anchor="ctr"/>
           <a:lstStyle/>
           <a:p>
             <a:pPr algn="ctr">
@@ -23792,7 +24759,7 @@
 </file>
 
 <file path=ppt/slides/slide6.xml><?xml version="1.0" encoding="utf-8"?>
-<p:sld xmlns:a="http://schemas.openxmlformats.org/drawingml/2006/main" xmlns:p="http://schemas.openxmlformats.org/presentationml/2006/main" xmlns:r="http://schemas.openxmlformats.org/officeDocument/2006/relationships">
+<p:sld xmlns:a="http://schemas.openxmlformats.org/drawingml/2006/main" xmlns:r="http://schemas.openxmlformats.org/officeDocument/2006/relationships" xmlns:p="http://schemas.openxmlformats.org/presentationml/2006/main">
   <p:cSld>
     <p:bg>
       <p:bgPr>
@@ -23808,7 +24775,14 @@
         <p:cNvGrpSpPr/>
         <p:nvPr/>
       </p:nvGrpSpPr>
-      <p:grpSpPr/>
+      <p:grpSpPr>
+        <a:xfrm>
+          <a:off x="0" y="0"/>
+          <a:ext cx="0" cy="0"/>
+          <a:chOff x="0" y="0"/>
+          <a:chExt cx="0" cy="0"/>
+        </a:xfrm>
+      </p:grpSpPr>
       <p:sp>
         <p:nvSpPr>
           <p:cNvPr id="2" name="Rectangle 1"/>
@@ -23845,7 +24819,7 @@
           </a:fontRef>
         </p:style>
         <p:txBody>
-          <a:bodyPr rtlCol="0" anchor="ctr" lIns="457200" wrap="square"/>
+          <a:bodyPr wrap="square" lIns="457200" rtlCol="0" anchor="ctr"/>
           <a:lstStyle/>
           <a:p>
             <a:pPr algn="l">
@@ -23972,7 +24946,7 @@
           </a:fontRef>
         </p:style>
         <p:txBody>
-          <a:bodyPr rtlCol="0" anchor="ctr" wrap="square" lIns="137160" tIns="73152"/>
+          <a:bodyPr wrap="square" lIns="137160" tIns="73152" rtlCol="0" anchor="ctr"/>
           <a:lstStyle/>
           <a:p>
             <a:pPr algn="ctr">
@@ -24008,10 +24982,34 @@
                 <a:tableStyleId>{5C22544A-7EE6-4342-B048-85BDC9FD1C3A}</a:tableStyleId>
               </a:tblPr>
               <a:tblGrid>
-                <a:gridCol w="1097280"/>
-                <a:gridCol w="914400"/>
-                <a:gridCol w="1828800"/>
-                <a:gridCol w="1463040"/>
+                <a:gridCol w="1097280">
+                  <a:extLst>
+                    <a:ext uri="{9D8B030D-6E8A-4147-A177-3AD203B41FA5}">
+                      <a16:colId xmlns:a16="http://schemas.microsoft.com/office/drawing/2014/main" val="20000"/>
+                    </a:ext>
+                  </a:extLst>
+                </a:gridCol>
+                <a:gridCol w="914400">
+                  <a:extLst>
+                    <a:ext uri="{9D8B030D-6E8A-4147-A177-3AD203B41FA5}">
+                      <a16:colId xmlns:a16="http://schemas.microsoft.com/office/drawing/2014/main" val="20001"/>
+                    </a:ext>
+                  </a:extLst>
+                </a:gridCol>
+                <a:gridCol w="1828800">
+                  <a:extLst>
+                    <a:ext uri="{9D8B030D-6E8A-4147-A177-3AD203B41FA5}">
+                      <a16:colId xmlns:a16="http://schemas.microsoft.com/office/drawing/2014/main" val="20002"/>
+                    </a:ext>
+                  </a:extLst>
+                </a:gridCol>
+                <a:gridCol w="1463040">
+                  <a:extLst>
+                    <a:ext uri="{9D8B030D-6E8A-4147-A177-3AD203B41FA5}">
+                      <a16:colId xmlns:a16="http://schemas.microsoft.com/office/drawing/2014/main" val="20003"/>
+                    </a:ext>
+                  </a:extLst>
+                </a:gridCol>
               </a:tblGrid>
               <a:tr h="402336">
                 <a:tc>
@@ -24110,6 +25108,11 @@
                     </a:solidFill>
                   </a:tcPr>
                 </a:tc>
+                <a:extLst>
+                  <a:ext uri="{0D108BD9-81ED-4DB2-BD59-A6C34878D82A}">
+                    <a16:rowId xmlns:a16="http://schemas.microsoft.com/office/drawing/2014/main" val="10000"/>
+                  </a:ext>
+                </a:extLst>
               </a:tr>
               <a:tr h="402336">
                 <a:tc>
@@ -24208,6 +25211,11 @@
                     </a:solidFill>
                   </a:tcPr>
                 </a:tc>
+                <a:extLst>
+                  <a:ext uri="{0D108BD9-81ED-4DB2-BD59-A6C34878D82A}">
+                    <a16:rowId xmlns:a16="http://schemas.microsoft.com/office/drawing/2014/main" val="10001"/>
+                  </a:ext>
+                </a:extLst>
               </a:tr>
               <a:tr h="402336">
                 <a:tc>
@@ -24306,6 +25314,11 @@
                     </a:solidFill>
                   </a:tcPr>
                 </a:tc>
+                <a:extLst>
+                  <a:ext uri="{0D108BD9-81ED-4DB2-BD59-A6C34878D82A}">
+                    <a16:rowId xmlns:a16="http://schemas.microsoft.com/office/drawing/2014/main" val="10002"/>
+                  </a:ext>
+                </a:extLst>
               </a:tr>
               <a:tr h="402336">
                 <a:tc>
@@ -24404,6 +25417,11 @@
                     </a:solidFill>
                   </a:tcPr>
                 </a:tc>
+                <a:extLst>
+                  <a:ext uri="{0D108BD9-81ED-4DB2-BD59-A6C34878D82A}">
+                    <a16:rowId xmlns:a16="http://schemas.microsoft.com/office/drawing/2014/main" val="10003"/>
+                  </a:ext>
+                </a:extLst>
               </a:tr>
               <a:tr h="402336">
                 <a:tc>
@@ -24502,6 +25520,11 @@
                     </a:solidFill>
                   </a:tcPr>
                 </a:tc>
+                <a:extLst>
+                  <a:ext uri="{0D108BD9-81ED-4DB2-BD59-A6C34878D82A}">
+                    <a16:rowId xmlns:a16="http://schemas.microsoft.com/office/drawing/2014/main" val="10004"/>
+                  </a:ext>
+                </a:extLst>
               </a:tr>
             </a:tbl>
           </a:graphicData>
@@ -24526,10 +25549,34 @@
                 <a:tableStyleId>{5C22544A-7EE6-4342-B048-85BDC9FD1C3A}</a:tableStyleId>
               </a:tblPr>
               <a:tblGrid>
-                <a:gridCol w="1280160"/>
-                <a:gridCol w="914400"/>
-                <a:gridCol w="1645920"/>
-                <a:gridCol w="1463040"/>
+                <a:gridCol w="1280160">
+                  <a:extLst>
+                    <a:ext uri="{9D8B030D-6E8A-4147-A177-3AD203B41FA5}">
+                      <a16:colId xmlns:a16="http://schemas.microsoft.com/office/drawing/2014/main" val="20000"/>
+                    </a:ext>
+                  </a:extLst>
+                </a:gridCol>
+                <a:gridCol w="914400">
+                  <a:extLst>
+                    <a:ext uri="{9D8B030D-6E8A-4147-A177-3AD203B41FA5}">
+                      <a16:colId xmlns:a16="http://schemas.microsoft.com/office/drawing/2014/main" val="20001"/>
+                    </a:ext>
+                  </a:extLst>
+                </a:gridCol>
+                <a:gridCol w="1645920">
+                  <a:extLst>
+                    <a:ext uri="{9D8B030D-6E8A-4147-A177-3AD203B41FA5}">
+                      <a16:colId xmlns:a16="http://schemas.microsoft.com/office/drawing/2014/main" val="20002"/>
+                    </a:ext>
+                  </a:extLst>
+                </a:gridCol>
+                <a:gridCol w="1463040">
+                  <a:extLst>
+                    <a:ext uri="{9D8B030D-6E8A-4147-A177-3AD203B41FA5}">
+                      <a16:colId xmlns:a16="http://schemas.microsoft.com/office/drawing/2014/main" val="20003"/>
+                    </a:ext>
+                  </a:extLst>
+                </a:gridCol>
               </a:tblGrid>
               <a:tr h="411480">
                 <a:tc>
@@ -24628,6 +25675,11 @@
                     </a:solidFill>
                   </a:tcPr>
                 </a:tc>
+                <a:extLst>
+                  <a:ext uri="{0D108BD9-81ED-4DB2-BD59-A6C34878D82A}">
+                    <a16:rowId xmlns:a16="http://schemas.microsoft.com/office/drawing/2014/main" val="10000"/>
+                  </a:ext>
+                </a:extLst>
               </a:tr>
               <a:tr h="411480">
                 <a:tc>
@@ -24726,6 +25778,11 @@
                     </a:solidFill>
                   </a:tcPr>
                 </a:tc>
+                <a:extLst>
+                  <a:ext uri="{0D108BD9-81ED-4DB2-BD59-A6C34878D82A}">
+                    <a16:rowId xmlns:a16="http://schemas.microsoft.com/office/drawing/2014/main" val="10001"/>
+                  </a:ext>
+                </a:extLst>
               </a:tr>
               <a:tr h="411480">
                 <a:tc>
@@ -24824,6 +25881,11 @@
                     </a:solidFill>
                   </a:tcPr>
                 </a:tc>
+                <a:extLst>
+                  <a:ext uri="{0D108BD9-81ED-4DB2-BD59-A6C34878D82A}">
+                    <a16:rowId xmlns:a16="http://schemas.microsoft.com/office/drawing/2014/main" val="10002"/>
+                  </a:ext>
+                </a:extLst>
               </a:tr>
               <a:tr h="411480">
                 <a:tc>
@@ -24922,6 +25984,11 @@
                     </a:solidFill>
                   </a:tcPr>
                 </a:tc>
+                <a:extLst>
+                  <a:ext uri="{0D108BD9-81ED-4DB2-BD59-A6C34878D82A}">
+                    <a16:rowId xmlns:a16="http://schemas.microsoft.com/office/drawing/2014/main" val="10003"/>
+                  </a:ext>
+                </a:extLst>
               </a:tr>
             </a:tbl>
           </a:graphicData>
@@ -24936,7 +26003,7 @@
         <p:spPr>
           <a:xfrm>
             <a:off x="548640" y="4846320"/>
-            <a:ext cx="10972800" cy="457200"/>
+            <a:ext cx="10972800" cy="323165"/>
           </a:xfrm>
           <a:prstGeom prst="rect">
             <a:avLst/>
@@ -24958,7 +26025,16 @@
               </a:defRPr>
             </a:pPr>
             <a:r>
-              <a:t>Topology: Erdos-Renyi random graph, edge probability = 0.5 per domain, 4 domains × 30 nodes = 120 total nodes</a:t>
+              <a:rPr dirty="0"/>
+              <a:t>Topology: </a:t>
+            </a:r>
+            <a:r>
+              <a:rPr lang="en-US" dirty="0"/>
+              <a:t>R</a:t>
+            </a:r>
+            <a:r>
+              <a:rPr dirty="0"/>
+              <a:t>andom graph, edge probability = 0.5 per domain, 4 domains × 30 nodes = 120 total nodes</a:t>
             </a:r>
           </a:p>
         </p:txBody>
@@ -24972,7 +26048,7 @@
 </file>
 
 <file path=ppt/slides/slide7.xml><?xml version="1.0" encoding="utf-8"?>
-<p:sld xmlns:a="http://schemas.openxmlformats.org/drawingml/2006/main" xmlns:p="http://schemas.openxmlformats.org/presentationml/2006/main" xmlns:r="http://schemas.openxmlformats.org/officeDocument/2006/relationships">
+<p:sld xmlns:a="http://schemas.openxmlformats.org/drawingml/2006/main" xmlns:r="http://schemas.openxmlformats.org/officeDocument/2006/relationships" xmlns:p="http://schemas.openxmlformats.org/presentationml/2006/main">
   <p:cSld>
     <p:bg>
       <p:bgPr>
@@ -24988,7 +26064,14 @@
         <p:cNvGrpSpPr/>
         <p:nvPr/>
       </p:nvGrpSpPr>
-      <p:grpSpPr/>
+      <p:grpSpPr>
+        <a:xfrm>
+          <a:off x="0" y="0"/>
+          <a:ext cx="0" cy="0"/>
+          <a:chOff x="0" y="0"/>
+          <a:chExt cx="0" cy="0"/>
+        </a:xfrm>
+      </p:grpSpPr>
       <p:sp>
         <p:nvSpPr>
           <p:cNvPr id="2" name="Rectangle 1"/>
@@ -25025,7 +26108,7 @@
           </a:fontRef>
         </p:style>
         <p:txBody>
-          <a:bodyPr rtlCol="0" anchor="ctr" lIns="457200" wrap="square"/>
+          <a:bodyPr wrap="square" lIns="457200" rtlCol="0" anchor="ctr"/>
           <a:lstStyle/>
           <a:p>
             <a:pPr algn="l">
@@ -25116,7 +26199,7 @@
           </a:fontRef>
         </p:style>
         <p:txBody>
-          <a:bodyPr rtlCol="0" anchor="ctr" wrap="square" lIns="137160" tIns="73152"/>
+          <a:bodyPr wrap="square" lIns="137160" tIns="73152" rtlCol="0" anchor="ctr"/>
           <a:lstStyle/>
           <a:p>
             <a:pPr algn="ctr">
@@ -25152,10 +26235,34 @@
                 <a:tableStyleId>{5C22544A-7EE6-4342-B048-85BDC9FD1C3A}</a:tableStyleId>
               </a:tblPr>
               <a:tblGrid>
-                <a:gridCol w="1188720"/>
-                <a:gridCol w="822960"/>
-                <a:gridCol w="1645920"/>
-                <a:gridCol w="1371600"/>
+                <a:gridCol w="1188720">
+                  <a:extLst>
+                    <a:ext uri="{9D8B030D-6E8A-4147-A177-3AD203B41FA5}">
+                      <a16:colId xmlns:a16="http://schemas.microsoft.com/office/drawing/2014/main" val="20000"/>
+                    </a:ext>
+                  </a:extLst>
+                </a:gridCol>
+                <a:gridCol w="822960">
+                  <a:extLst>
+                    <a:ext uri="{9D8B030D-6E8A-4147-A177-3AD203B41FA5}">
+                      <a16:colId xmlns:a16="http://schemas.microsoft.com/office/drawing/2014/main" val="20001"/>
+                    </a:ext>
+                  </a:extLst>
+                </a:gridCol>
+                <a:gridCol w="1645920">
+                  <a:extLst>
+                    <a:ext uri="{9D8B030D-6E8A-4147-A177-3AD203B41FA5}">
+                      <a16:colId xmlns:a16="http://schemas.microsoft.com/office/drawing/2014/main" val="20002"/>
+                    </a:ext>
+                  </a:extLst>
+                </a:gridCol>
+                <a:gridCol w="1371600">
+                  <a:extLst>
+                    <a:ext uri="{9D8B030D-6E8A-4147-A177-3AD203B41FA5}">
+                      <a16:colId xmlns:a16="http://schemas.microsoft.com/office/drawing/2014/main" val="20003"/>
+                    </a:ext>
+                  </a:extLst>
+                </a:gridCol>
               </a:tblGrid>
               <a:tr h="411480">
                 <a:tc>
@@ -25254,6 +26361,11 @@
                     </a:solidFill>
                   </a:tcPr>
                 </a:tc>
+                <a:extLst>
+                  <a:ext uri="{0D108BD9-81ED-4DB2-BD59-A6C34878D82A}">
+                    <a16:rowId xmlns:a16="http://schemas.microsoft.com/office/drawing/2014/main" val="10000"/>
+                  </a:ext>
+                </a:extLst>
               </a:tr>
               <a:tr h="411480">
                 <a:tc>
@@ -25352,6 +26464,11 @@
                     </a:solidFill>
                   </a:tcPr>
                 </a:tc>
+                <a:extLst>
+                  <a:ext uri="{0D108BD9-81ED-4DB2-BD59-A6C34878D82A}">
+                    <a16:rowId xmlns:a16="http://schemas.microsoft.com/office/drawing/2014/main" val="10001"/>
+                  </a:ext>
+                </a:extLst>
               </a:tr>
               <a:tr h="411480">
                 <a:tc>
@@ -25450,6 +26567,11 @@
                     </a:solidFill>
                   </a:tcPr>
                 </a:tc>
+                <a:extLst>
+                  <a:ext uri="{0D108BD9-81ED-4DB2-BD59-A6C34878D82A}">
+                    <a16:rowId xmlns:a16="http://schemas.microsoft.com/office/drawing/2014/main" val="10002"/>
+                  </a:ext>
+                </a:extLst>
               </a:tr>
               <a:tr h="411480">
                 <a:tc>
@@ -25548,6 +26670,11 @@
                     </a:solidFill>
                   </a:tcPr>
                 </a:tc>
+                <a:extLst>
+                  <a:ext uri="{0D108BD9-81ED-4DB2-BD59-A6C34878D82A}">
+                    <a16:rowId xmlns:a16="http://schemas.microsoft.com/office/drawing/2014/main" val="10003"/>
+                  </a:ext>
+                </a:extLst>
               </a:tr>
             </a:tbl>
           </a:graphicData>
@@ -25591,7 +26718,7 @@
           </a:fontRef>
         </p:style>
         <p:txBody>
-          <a:bodyPr rtlCol="0" anchor="ctr" wrap="square" lIns="137160" tIns="91440"/>
+          <a:bodyPr wrap="square" lIns="137160" tIns="91440" rtlCol="0" anchor="ctr"/>
           <a:lstStyle/>
           <a:p>
             <a:pPr algn="l">
@@ -25603,6 +26730,7 @@
               </a:defRPr>
             </a:pPr>
             <a:r>
+              <a:rPr dirty="0"/>
               <a:t>Request Arrival Model</a:t>
             </a:r>
           </a:p>
@@ -25622,6 +26750,7 @@
               </a:defRPr>
             </a:pPr>
             <a:r>
+              <a:rPr dirty="0"/>
               <a:t>• Nodes per VNR: Uniform U(3, 10)</a:t>
             </a:r>
           </a:p>
@@ -25641,6 +26770,7 @@
               </a:defRPr>
             </a:pPr>
             <a:r>
+              <a:rPr dirty="0"/>
               <a:t>• Edge probability: 0.5</a:t>
             </a:r>
           </a:p>
@@ -25660,7 +26790,16 @@
               </a:defRPr>
             </a:pPr>
             <a:r>
-              <a:t>• Arrival process: Poisson, λ = 0.04</a:t>
+              <a:rPr dirty="0"/>
+              <a:t>• Arrival process: Poisson, </a:t>
+            </a:r>
+            <a:r>
+              <a:rPr dirty="0" err="1"/>
+              <a:t>λ</a:t>
+            </a:r>
+            <a:r>
+              <a:rPr dirty="0"/>
+              <a:t> = 0.04</a:t>
             </a:r>
           </a:p>
           <a:p>
@@ -25679,6 +26818,7 @@
               </a:defRPr>
             </a:pPr>
             <a:r>
+              <a:rPr dirty="0"/>
               <a:t>• Lifetime: Exponential, mean = 500 time units</a:t>
             </a:r>
           </a:p>
@@ -25698,7 +26838,8 @@
               </a:defRPr>
             </a:pPr>
             <a:r>
-              <a:t>• </a:t>
+              <a:rPr dirty="0"/>
+              <a:t>• Dynamic online problem — requests arrive</a:t>
             </a:r>
           </a:p>
           <a:p>
@@ -25717,25 +26858,7 @@
               </a:defRPr>
             </a:pPr>
             <a:r>
-              <a:t>• Dynamic online problem — requests arrive</a:t>
-            </a:r>
-          </a:p>
-          <a:p>
-            <a:pPr>
-              <a:spcBef>
-                <a:spcPts val="400"/>
-              </a:spcBef>
-              <a:spcAft>
-                <a:spcPts val="200"/>
-              </a:spcAft>
-              <a:defRPr sz="1200" b="0">
-                <a:solidFill>
-                  <a:srgbClr val="F0F0F0"/>
-                </a:solidFill>
-                <a:latin typeface="Calibri"/>
-              </a:defRPr>
-            </a:pPr>
-            <a:r>
+              <a:rPr dirty="0"/>
               <a:t>• and depart continuously over simulation time</a:t>
             </a:r>
           </a:p>
@@ -25750,7 +26873,7 @@
 </file>
 
 <file path=ppt/slides/slide8.xml><?xml version="1.0" encoding="utf-8"?>
-<p:sld xmlns:a="http://schemas.openxmlformats.org/drawingml/2006/main" xmlns:p="http://schemas.openxmlformats.org/presentationml/2006/main" xmlns:r="http://schemas.openxmlformats.org/officeDocument/2006/relationships">
+<p:sld xmlns:a="http://schemas.openxmlformats.org/drawingml/2006/main" xmlns:r="http://schemas.openxmlformats.org/officeDocument/2006/relationships" xmlns:p="http://schemas.openxmlformats.org/presentationml/2006/main">
   <p:cSld>
     <p:bg>
       <p:bgPr>
@@ -25766,7 +26889,14 @@
         <p:cNvGrpSpPr/>
         <p:nvPr/>
       </p:nvGrpSpPr>
-      <p:grpSpPr/>
+      <p:grpSpPr>
+        <a:xfrm>
+          <a:off x="0" y="0"/>
+          <a:ext cx="0" cy="0"/>
+          <a:chOff x="0" y="0"/>
+          <a:chExt cx="0" cy="0"/>
+        </a:xfrm>
+      </p:grpSpPr>
       <p:sp>
         <p:nvSpPr>
           <p:cNvPr id="2" name="Rectangle 1"/>
@@ -25803,7 +26933,7 @@
           </a:fontRef>
         </p:style>
         <p:txBody>
-          <a:bodyPr rtlCol="0" anchor="ctr" lIns="457200" wrap="square"/>
+          <a:bodyPr wrap="square" lIns="457200" rtlCol="0" anchor="ctr"/>
           <a:lstStyle/>
           <a:p>
             <a:pPr algn="l">
@@ -25894,7 +27024,7 @@
           </a:fontRef>
         </p:style>
         <p:txBody>
-          <a:bodyPr rtlCol="0" anchor="ctr" wrap="square" lIns="137160" tIns="91440"/>
+          <a:bodyPr wrap="square" lIns="137160" tIns="91440" rtlCol="0" anchor="ctr"/>
           <a:lstStyle/>
           <a:p>
             <a:pPr algn="l">
@@ -25906,8 +27036,14 @@
               </a:defRPr>
             </a:pPr>
             <a:r>
-              <a:t>Node Mapping: Mₙ : Nᵛ → Nˢ</a:t>
-            </a:r>
+              <a:rPr dirty="0"/>
+              <a:t>Node Mapping: Mₙ : Nᵛ → </a:t>
+            </a:r>
+            <a:r>
+              <a:rPr dirty="0" err="1"/>
+              <a:t>Nˢ</a:t>
+            </a:r>
+            <a:endParaRPr dirty="0"/>
           </a:p>
           <a:p>
             <a:pPr>
@@ -25925,7 +27061,16 @@
               </a:defRPr>
             </a:pPr>
             <a:r>
-              <a:t>• Resource: Cᵢᵛ ≤ C_avail(Mₙ(nᵢᵛ))</a:t>
+              <a:rPr dirty="0"/>
+              <a:t>• Resource: Cᵢᵛ ≤ </a:t>
+            </a:r>
+            <a:r>
+              <a:rPr dirty="0" err="1"/>
+              <a:t>C_avail</a:t>
+            </a:r>
+            <a:r>
+              <a:rPr dirty="0"/>
+              <a:t>(Mₙ(nᵢᵛ))</a:t>
             </a:r>
           </a:p>
           <a:p>
@@ -25944,6 +27089,7 @@
               </a:defRPr>
             </a:pPr>
             <a:r>
+              <a:rPr dirty="0"/>
               <a:t>• Domain: Mₙ(nᵢᵛ) ∈ Domain(Dᵢᵛ)</a:t>
             </a:r>
           </a:p>
@@ -25963,7 +27109,16 @@
               </a:defRPr>
             </a:pPr>
             <a:r>
-              <a:t>• One-to-one: Mₙ(nᵢᵛ) ≠ Mₙ(nⱼᵛ)  ∀ i ≠ j</a:t>
+              <a:rPr dirty="0"/>
+              <a:t>• One-to-one: Mₙ(nᵢᵛ) ≠ Mₙ(nⱼᵛ)  ∀ </a:t>
+            </a:r>
+            <a:r>
+              <a:rPr dirty="0" err="1"/>
+              <a:t>i</a:t>
+            </a:r>
+            <a:r>
+              <a:rPr dirty="0"/>
+              <a:t> ≠ j</a:t>
             </a:r>
           </a:p>
           <a:p>
@@ -25982,7 +27137,8 @@
               </a:defRPr>
             </a:pPr>
             <a:r>
-              <a:t>• </a:t>
+              <a:rPr dirty="0"/>
+              <a:t>• Each virtual node maps to exactly one</a:t>
             </a:r>
           </a:p>
           <a:p>
@@ -26001,25 +27157,7 @@
               </a:defRPr>
             </a:pPr>
             <a:r>
-              <a:t>• Each virtual node maps to exactly one</a:t>
-            </a:r>
-          </a:p>
-          <a:p>
-            <a:pPr>
-              <a:spcBef>
-                <a:spcPts val="400"/>
-              </a:spcBef>
-              <a:spcAft>
-                <a:spcPts val="200"/>
-              </a:spcAft>
-              <a:defRPr sz="1200" b="0">
-                <a:solidFill>
-                  <a:srgbClr val="F0F0F0"/>
-                </a:solidFill>
-                <a:latin typeface="Calibri"/>
-              </a:defRPr>
-            </a:pPr>
-            <a:r>
+              <a:rPr dirty="0"/>
               <a:t>• physical node with sufficient CPU</a:t>
             </a:r>
           </a:p>
@@ -26063,7 +27201,7 @@
           </a:fontRef>
         </p:style>
         <p:txBody>
-          <a:bodyPr rtlCol="0" anchor="ctr" wrap="square" lIns="137160" tIns="91440"/>
+          <a:bodyPr wrap="square" lIns="137160" tIns="91440" rtlCol="0" anchor="ctr"/>
           <a:lstStyle/>
           <a:p>
             <a:pPr algn="l">
@@ -26075,7 +27213,16 @@
               </a:defRPr>
             </a:pPr>
             <a:r>
-              <a:t>Link Mapping: Mₗ : Lᵛ → P(Lˢ)</a:t>
+              <a:rPr dirty="0"/>
+              <a:t>Link Mapping: Mₗ : Lᵛ → P(</a:t>
+            </a:r>
+            <a:r>
+              <a:rPr dirty="0" err="1"/>
+              <a:t>Lˢ</a:t>
+            </a:r>
+            <a:r>
+              <a:rPr dirty="0"/>
+              <a:t>)</a:t>
             </a:r>
           </a:p>
           <a:p>
@@ -26094,6 +27241,7 @@
               </a:defRPr>
             </a:pPr>
             <a:r>
+              <a:rPr dirty="0"/>
               <a:t>• Single-path: one physical path per virtual link</a:t>
             </a:r>
           </a:p>
@@ -26113,6 +27261,7 @@
               </a:defRPr>
             </a:pPr>
             <a:r>
+              <a:rPr dirty="0"/>
               <a:t>• Multi-path: split BW across ≤ 5 paths</a:t>
             </a:r>
           </a:p>
@@ -26132,7 +27281,24 @@
               </a:defRPr>
             </a:pPr>
             <a:r>
-              <a:t>• Bᵢⱼᵛ ≤ Σ B_avail(p)  for all paths p</a:t>
+              <a:rPr dirty="0"/>
+              <a:t>• Bᵢⱼᵛ ≤ </a:t>
+            </a:r>
+            <a:r>
+              <a:rPr dirty="0" err="1"/>
+              <a:t>Σ</a:t>
+            </a:r>
+            <a:r>
+              <a:rPr dirty="0"/>
+              <a:t> </a:t>
+            </a:r>
+            <a:r>
+              <a:rPr dirty="0" err="1"/>
+              <a:t>B_avail</a:t>
+            </a:r>
+            <a:r>
+              <a:rPr dirty="0"/>
+              <a:t>(p)  for all paths p</a:t>
             </a:r>
           </a:p>
           <a:p>
@@ -26151,7 +27317,8 @@
               </a:defRPr>
             </a:pPr>
             <a:r>
-              <a:t>• </a:t>
+              <a:rPr dirty="0"/>
+              <a:t>• Multi-path improves acceptance rate by</a:t>
             </a:r>
           </a:p>
           <a:p>
@@ -26170,25 +27337,7 @@
               </a:defRPr>
             </a:pPr>
             <a:r>
-              <a:t>• Multi-path improves acceptance rate by</a:t>
-            </a:r>
-          </a:p>
-          <a:p>
-            <a:pPr>
-              <a:spcBef>
-                <a:spcPts val="400"/>
-              </a:spcBef>
-              <a:spcAft>
-                <a:spcPts val="200"/>
-              </a:spcAft>
-              <a:defRPr sz="1200" b="0">
-                <a:solidFill>
-                  <a:srgbClr val="F0F0F0"/>
-                </a:solidFill>
-                <a:latin typeface="Calibri"/>
-              </a:defRPr>
-            </a:pPr>
-            <a:r>
+              <a:rPr dirty="0"/>
               <a:t>• utilizing residual bandwidth across paths</a:t>
             </a:r>
           </a:p>
@@ -26232,7 +27381,7 @@
           </a:fontRef>
         </p:style>
         <p:txBody>
-          <a:bodyPr rtlCol="0" anchor="ctr" wrap="square" lIns="274320" tIns="137160"/>
+          <a:bodyPr wrap="square" lIns="274320" tIns="137160" rtlCol="0" anchor="ctr"/>
           <a:lstStyle/>
           <a:p>
             <a:pPr algn="l">
@@ -26296,7 +27445,7 @@
 </file>
 
 <file path=ppt/slides/slide9.xml><?xml version="1.0" encoding="utf-8"?>
-<p:sld xmlns:a="http://schemas.openxmlformats.org/drawingml/2006/main" xmlns:p="http://schemas.openxmlformats.org/presentationml/2006/main" xmlns:r="http://schemas.openxmlformats.org/officeDocument/2006/relationships">
+<p:sld xmlns:a="http://schemas.openxmlformats.org/drawingml/2006/main" xmlns:r="http://schemas.openxmlformats.org/officeDocument/2006/relationships" xmlns:p="http://schemas.openxmlformats.org/presentationml/2006/main">
   <p:cSld>
     <p:bg>
       <p:bgPr>
@@ -26312,7 +27461,14 @@
         <p:cNvGrpSpPr/>
         <p:nvPr/>
       </p:nvGrpSpPr>
-      <p:grpSpPr/>
+      <p:grpSpPr>
+        <a:xfrm>
+          <a:off x="0" y="0"/>
+          <a:ext cx="0" cy="0"/>
+          <a:chOff x="0" y="0"/>
+          <a:chExt cx="0" cy="0"/>
+        </a:xfrm>
+      </p:grpSpPr>
       <p:sp>
         <p:nvSpPr>
           <p:cNvPr id="2" name="Rectangle 1"/>
@@ -26349,7 +27505,7 @@
           </a:fontRef>
         </p:style>
         <p:txBody>
-          <a:bodyPr rtlCol="0" anchor="ctr" lIns="457200" wrap="square"/>
+          <a:bodyPr wrap="square" lIns="457200" rtlCol="0" anchor="ctr"/>
           <a:lstStyle/>
           <a:p>
             <a:pPr algn="l">
@@ -26421,9 +27577,27 @@
                 <a:tableStyleId>{5C22544A-7EE6-4342-B048-85BDC9FD1C3A}</a:tableStyleId>
               </a:tblPr>
               <a:tblGrid>
-                <a:gridCol w="1645920"/>
-                <a:gridCol w="4572000"/>
-                <a:gridCol w="3840480"/>
+                <a:gridCol w="1645920">
+                  <a:extLst>
+                    <a:ext uri="{9D8B030D-6E8A-4147-A177-3AD203B41FA5}">
+                      <a16:colId xmlns:a16="http://schemas.microsoft.com/office/drawing/2014/main" val="20000"/>
+                    </a:ext>
+                  </a:extLst>
+                </a:gridCol>
+                <a:gridCol w="4572000">
+                  <a:extLst>
+                    <a:ext uri="{9D8B030D-6E8A-4147-A177-3AD203B41FA5}">
+                      <a16:colId xmlns:a16="http://schemas.microsoft.com/office/drawing/2014/main" val="20001"/>
+                    </a:ext>
+                  </a:extLst>
+                </a:gridCol>
+                <a:gridCol w="3840480">
+                  <a:extLst>
+                    <a:ext uri="{9D8B030D-6E8A-4147-A177-3AD203B41FA5}">
+                      <a16:colId xmlns:a16="http://schemas.microsoft.com/office/drawing/2014/main" val="20002"/>
+                    </a:ext>
+                  </a:extLst>
+                </a:gridCol>
               </a:tblGrid>
               <a:tr h="533400">
                 <a:tc>
@@ -26498,6 +27672,11 @@
                     </a:solidFill>
                   </a:tcPr>
                 </a:tc>
+                <a:extLst>
+                  <a:ext uri="{0D108BD9-81ED-4DB2-BD59-A6C34878D82A}">
+                    <a16:rowId xmlns:a16="http://schemas.microsoft.com/office/drawing/2014/main" val="10000"/>
+                  </a:ext>
+                </a:extLst>
               </a:tr>
               <a:tr h="533400">
                 <a:tc>
@@ -26572,6 +27751,11 @@
                     </a:solidFill>
                   </a:tcPr>
                 </a:tc>
+                <a:extLst>
+                  <a:ext uri="{0D108BD9-81ED-4DB2-BD59-A6C34878D82A}">
+                    <a16:rowId xmlns:a16="http://schemas.microsoft.com/office/drawing/2014/main" val="10001"/>
+                  </a:ext>
+                </a:extLst>
               </a:tr>
               <a:tr h="533400">
                 <a:tc>
@@ -26646,6 +27830,11 @@
                     </a:solidFill>
                   </a:tcPr>
                 </a:tc>
+                <a:extLst>
+                  <a:ext uri="{0D108BD9-81ED-4DB2-BD59-A6C34878D82A}">
+                    <a16:rowId xmlns:a16="http://schemas.microsoft.com/office/drawing/2014/main" val="10002"/>
+                  </a:ext>
+                </a:extLst>
               </a:tr>
               <a:tr h="533400">
                 <a:tc>
@@ -26720,6 +27909,11 @@
                     </a:solidFill>
                   </a:tcPr>
                 </a:tc>
+                <a:extLst>
+                  <a:ext uri="{0D108BD9-81ED-4DB2-BD59-A6C34878D82A}">
+                    <a16:rowId xmlns:a16="http://schemas.microsoft.com/office/drawing/2014/main" val="10003"/>
+                  </a:ext>
+                </a:extLst>
               </a:tr>
               <a:tr h="533400">
                 <a:tc>
@@ -26794,6 +27988,11 @@
                     </a:solidFill>
                   </a:tcPr>
                 </a:tc>
+                <a:extLst>
+                  <a:ext uri="{0D108BD9-81ED-4DB2-BD59-A6C34878D82A}">
+                    <a16:rowId xmlns:a16="http://schemas.microsoft.com/office/drawing/2014/main" val="10004"/>
+                  </a:ext>
+                </a:extLst>
               </a:tr>
               <a:tr h="533400">
                 <a:tc>
@@ -26868,6 +28067,11 @@
                     </a:solidFill>
                   </a:tcPr>
                 </a:tc>
+                <a:extLst>
+                  <a:ext uri="{0D108BD9-81ED-4DB2-BD59-A6C34878D82A}">
+                    <a16:rowId xmlns:a16="http://schemas.microsoft.com/office/drawing/2014/main" val="10005"/>
+                  </a:ext>
+                </a:extLst>
               </a:tr>
             </a:tbl>
           </a:graphicData>
@@ -27235,4 +28439,10 @@
   </a:objectDefaults>
   <a:extraClrSchemeLst/>
 </a:theme>
+</file>
+
+<file path=docMetadata/LabelInfo.xml><?xml version="1.0" encoding="utf-8"?>
+<clbl:labelList xmlns:clbl="http://schemas.microsoft.com/office/2020/mipLabelMetadata">
+  <clbl:label id="{46de58f8-cc0d-49df-992b-9d125b744fc2}" enabled="1" method="Standard" siteId="{6573a299-ce07-4046-aaa3-db180daff1ae}" contentBits="1" removed="0"/>
+</clbl:labelList>
 </file>